--- a/Fol/LA CONTABILIDAD.pptx
+++ b/Fol/LA CONTABILIDAD.pptx
@@ -2,16 +2,16 @@
 <file path=ppt/presentation.xml><?xml version="1.0" encoding="utf-8"?>
 <p:presentation xmlns:a="http://schemas.openxmlformats.org/drawingml/2006/main" xmlns:r="http://schemas.openxmlformats.org/officeDocument/2006/relationships" xmlns:p="http://schemas.openxmlformats.org/presentationml/2006/main" saveSubsetFonts="1">
   <p:sldMasterIdLst>
-    <p:sldMasterId id="2147483648" r:id="rId1"/>
+    <p:sldMasterId id="2147483648" r:id="rId4"/>
   </p:sldMasterIdLst>
   <p:sldIdLst>
-    <p:sldId id="256" r:id="rId2"/>
-    <p:sldId id="257" r:id="rId3"/>
-    <p:sldId id="258" r:id="rId4"/>
-    <p:sldId id="259" r:id="rId5"/>
-    <p:sldId id="260" r:id="rId6"/>
-    <p:sldId id="261" r:id="rId7"/>
-    <p:sldId id="262" r:id="rId8"/>
+    <p:sldId id="256" r:id="rId5"/>
+    <p:sldId id="257" r:id="rId6"/>
+    <p:sldId id="258" r:id="rId7"/>
+    <p:sldId id="259" r:id="rId8"/>
+    <p:sldId id="260" r:id="rId9"/>
+    <p:sldId id="261" r:id="rId10"/>
+    <p:sldId id="262" r:id="rId11"/>
   </p:sldIdLst>
   <p:sldSz cx="9144000" cy="6858000" type="screen4x3"/>
   <p:notesSz cx="6858000" cy="9144000"/>
@@ -110,7 +110,84 @@
       </a:defRPr>
     </a:lvl9pPr>
   </p:defaultTextStyle>
+  <p:extLst>
+    <p:ext uri="{EFAFB233-063F-42B5-8137-9DF3F51BA10A}">
+      <p15:sldGuideLst xmlns:p15="http://schemas.microsoft.com/office/powerpoint/2012/main">
+        <p15:guide id="1" orient="horz" pos="2160">
+          <p15:clr>
+            <a:srgbClr val="A4A3A4"/>
+          </p15:clr>
+        </p15:guide>
+        <p15:guide id="2" pos="2880">
+          <p15:clr>
+            <a:srgbClr val="A4A3A4"/>
+          </p15:clr>
+        </p15:guide>
+      </p15:sldGuideLst>
+    </p:ext>
+  </p:extLst>
 </p:presentation>
+</file>
+
+<file path=ppt/revisionInfo.xml><?xml version="1.0" encoding="utf-8"?>
+<p1510:revInfo xmlns:a="http://schemas.openxmlformats.org/drawingml/2006/main" xmlns:r="http://schemas.openxmlformats.org/officeDocument/2006/relationships" xmlns:p1510="http://schemas.microsoft.com/office/powerpoint/2015/10/main">
+  <p1510:revLst>
+    <p1510:client id="{F42DB910-E854-2D2A-8CC5-144E13F9FB23}" v="2" dt="2026-02-02T14:13:49.035"/>
+  </p1510:revLst>
+</p1510:revInfo>
+</file>
+
+<file path=ppt/changesInfos/changesInfo1.xml><?xml version="1.0" encoding="utf-8"?>
+<pc:chgInfo xmlns:a="http://schemas.openxmlformats.org/drawingml/2006/main" xmlns:r="http://schemas.openxmlformats.org/officeDocument/2006/relationships" xmlns:ac="http://schemas.microsoft.com/office/drawing/2013/main/command" xmlns:pc="http://schemas.microsoft.com/office/powerpoint/2013/main/command">
+  <pc:docChgLst>
+    <pc:chgData name="MARIA PAZ MARTIN DIAZ" userId="S::mpazmd@educastur.org::cc29b6e3-9118-45cf-9857-9a5403c369d7" providerId="AD" clId="Web-{F42DB910-E854-2D2A-8CC5-144E13F9FB23}"/>
+    <pc:docChg chg="modSld">
+      <pc:chgData name="MARIA PAZ MARTIN DIAZ" userId="S::mpazmd@educastur.org::cc29b6e3-9118-45cf-9857-9a5403c369d7" providerId="AD" clId="Web-{F42DB910-E854-2D2A-8CC5-144E13F9FB23}" dt="2026-02-02T14:13:49.035" v="1" actId="20577"/>
+      <pc:docMkLst>
+        <pc:docMk/>
+      </pc:docMkLst>
+      <pc:sldChg chg="modSp">
+        <pc:chgData name="MARIA PAZ MARTIN DIAZ" userId="S::mpazmd@educastur.org::cc29b6e3-9118-45cf-9857-9a5403c369d7" providerId="AD" clId="Web-{F42DB910-E854-2D2A-8CC5-144E13F9FB23}" dt="2026-02-02T14:13:49.035" v="1" actId="20577"/>
+        <pc:sldMkLst>
+          <pc:docMk/>
+          <pc:sldMk cId="3766566523" sldId="261"/>
+        </pc:sldMkLst>
+        <pc:spChg chg="mod">
+          <ac:chgData name="MARIA PAZ MARTIN DIAZ" userId="S::mpazmd@educastur.org::cc29b6e3-9118-45cf-9857-9a5403c369d7" providerId="AD" clId="Web-{F42DB910-E854-2D2A-8CC5-144E13F9FB23}" dt="2026-02-02T14:13:49.035" v="1" actId="20577"/>
+          <ac:spMkLst>
+            <pc:docMk/>
+            <pc:sldMk cId="3766566523" sldId="261"/>
+            <ac:spMk id="3" creationId="{00000000-0000-0000-0000-000000000000}"/>
+          </ac:spMkLst>
+        </pc:spChg>
+      </pc:sldChg>
+    </pc:docChg>
+  </pc:docChgLst>
+  <pc:docChgLst>
+    <pc:chgData name="Joel Mata Rodríguez" userId="S::luh12152@educastur.es::eca6c471-3541-4b88-8c70-965f4ff50354" providerId="AD" clId="Web-{542FB27D-DF95-179D-29AF-FAD07CD6E8DE}"/>
+    <pc:docChg chg="modSld">
+      <pc:chgData name="Joel Mata Rodríguez" userId="S::luh12152@educastur.es::eca6c471-3541-4b88-8c70-965f4ff50354" providerId="AD" clId="Web-{542FB27D-DF95-179D-29AF-FAD07CD6E8DE}" dt="2026-02-02T14:30:57.494" v="0" actId="1076"/>
+      <pc:docMkLst>
+        <pc:docMk/>
+      </pc:docMkLst>
+      <pc:sldChg chg="modSp">
+        <pc:chgData name="Joel Mata Rodríguez" userId="S::luh12152@educastur.es::eca6c471-3541-4b88-8c70-965f4ff50354" providerId="AD" clId="Web-{542FB27D-DF95-179D-29AF-FAD07CD6E8DE}" dt="2026-02-02T14:30:57.494" v="0" actId="1076"/>
+        <pc:sldMkLst>
+          <pc:docMk/>
+          <pc:sldMk cId="1259119732" sldId="258"/>
+        </pc:sldMkLst>
+        <pc:graphicFrameChg chg="mod">
+          <ac:chgData name="Joel Mata Rodríguez" userId="S::luh12152@educastur.es::eca6c471-3541-4b88-8c70-965f4ff50354" providerId="AD" clId="Web-{542FB27D-DF95-179D-29AF-FAD07CD6E8DE}" dt="2026-02-02T14:30:57.494" v="0" actId="1076"/>
+          <ac:graphicFrameMkLst>
+            <pc:docMk/>
+            <pc:sldMk cId="1259119732" sldId="258"/>
+            <ac:graphicFrameMk id="4" creationId="{00000000-0000-0000-0000-000000000000}"/>
+          </ac:graphicFrameMkLst>
+        </pc:graphicFrameChg>
+      </pc:sldChg>
+    </pc:docChg>
+  </pc:docChgLst>
+</pc:chgInfo>
 </file>
 
 <file path=ppt/diagrams/colors1.xml><?xml version="1.0" encoding="utf-8"?>
@@ -3870,10 +3947,9 @@
         <a:lstStyle/>
         <a:p>
           <a:r>
-            <a:rPr lang="es-ES" dirty="0" smtClean="0"/>
+            <a:rPr lang="es-ES"/>
             <a:t>ACTIVO</a:t>
           </a:r>
-          <a:endParaRPr lang="es-ES" dirty="0"/>
         </a:p>
       </dgm:t>
     </dgm:pt>
@@ -3907,10 +3983,9 @@
         <a:lstStyle/>
         <a:p>
           <a:r>
-            <a:rPr lang="es-ES" dirty="0" smtClean="0"/>
+            <a:rPr lang="es-ES"/>
             <a:t>Bienes</a:t>
           </a:r>
-          <a:endParaRPr lang="es-ES" dirty="0"/>
         </a:p>
       </dgm:t>
     </dgm:pt>
@@ -3944,10 +4019,9 @@
         <a:lstStyle/>
         <a:p>
           <a:r>
-            <a:rPr lang="es-ES" dirty="0" smtClean="0"/>
+            <a:rPr lang="es-ES"/>
             <a:t>Derechos</a:t>
           </a:r>
-          <a:endParaRPr lang="es-ES" dirty="0"/>
         </a:p>
       </dgm:t>
     </dgm:pt>
@@ -3981,16 +4055,15 @@
         <a:lstStyle/>
         <a:p>
           <a:r>
-            <a:rPr lang="es-ES" dirty="0" smtClean="0"/>
+            <a:rPr lang="es-ES"/>
             <a:t>Patrimonio neto</a:t>
           </a:r>
         </a:p>
         <a:p>
           <a:r>
-            <a:rPr lang="es-ES" dirty="0" smtClean="0"/>
+            <a:rPr lang="es-ES"/>
             <a:t>(Valor contable de la empresa)</a:t>
           </a:r>
-          <a:endParaRPr lang="es-ES" dirty="0"/>
         </a:p>
       </dgm:t>
     </dgm:pt>
@@ -4024,10 +4097,9 @@
         <a:lstStyle/>
         <a:p>
           <a:r>
-            <a:rPr lang="es-ES" dirty="0" smtClean="0"/>
+            <a:rPr lang="es-ES"/>
             <a:t>Pasivo (deudas)</a:t>
           </a:r>
-          <a:endParaRPr lang="es-ES" dirty="0"/>
         </a:p>
       </dgm:t>
     </dgm:pt>
@@ -4061,10 +4133,9 @@
         <a:lstStyle/>
         <a:p>
           <a:r>
-            <a:rPr lang="es-ES" dirty="0" smtClean="0"/>
+            <a:rPr lang="es-ES"/>
             <a:t>PASIVO</a:t>
           </a:r>
-          <a:endParaRPr lang="es-ES" dirty="0"/>
         </a:p>
       </dgm:t>
     </dgm:pt>
@@ -4099,13 +4170,6 @@
         </dgm:presLayoutVars>
       </dgm:prSet>
       <dgm:spPr/>
-      <dgm:t>
-        <a:bodyPr/>
-        <a:lstStyle/>
-        <a:p>
-          <a:endParaRPr lang="es-ES"/>
-        </a:p>
-      </dgm:t>
     </dgm:pt>
     <dgm:pt modelId="{98256D3B-B03B-40DB-826F-808A1FB370DD}" type="pres">
       <dgm:prSet presAssocID="{3D8DDDFD-F794-421B-95F4-FC0A74BB4CBA}" presName="compNode" presStyleCnt="0"/>
@@ -4114,24 +4178,10 @@
     <dgm:pt modelId="{8378F2CF-AE8F-4E06-B42D-68146418046C}" type="pres">
       <dgm:prSet presAssocID="{3D8DDDFD-F794-421B-95F4-FC0A74BB4CBA}" presName="aNode" presStyleLbl="bgShp" presStyleIdx="0" presStyleCnt="2"/>
       <dgm:spPr/>
-      <dgm:t>
-        <a:bodyPr/>
-        <a:lstStyle/>
-        <a:p>
-          <a:endParaRPr lang="es-ES"/>
-        </a:p>
-      </dgm:t>
     </dgm:pt>
     <dgm:pt modelId="{E4DC6D39-F1BC-4105-8953-59983839ED2E}" type="pres">
       <dgm:prSet presAssocID="{3D8DDDFD-F794-421B-95F4-FC0A74BB4CBA}" presName="textNode" presStyleLbl="bgShp" presStyleIdx="0" presStyleCnt="2"/>
       <dgm:spPr/>
-      <dgm:t>
-        <a:bodyPr/>
-        <a:lstStyle/>
-        <a:p>
-          <a:endParaRPr lang="es-ES"/>
-        </a:p>
-      </dgm:t>
     </dgm:pt>
     <dgm:pt modelId="{14A31D8B-2985-4243-A408-DDFA1A13887B}" type="pres">
       <dgm:prSet presAssocID="{3D8DDDFD-F794-421B-95F4-FC0A74BB4CBA}" presName="compChildNode" presStyleCnt="0"/>
@@ -4148,13 +4198,6 @@
         </dgm:presLayoutVars>
       </dgm:prSet>
       <dgm:spPr/>
-      <dgm:t>
-        <a:bodyPr/>
-        <a:lstStyle/>
-        <a:p>
-          <a:endParaRPr lang="es-ES"/>
-        </a:p>
-      </dgm:t>
     </dgm:pt>
     <dgm:pt modelId="{9EFB257D-7017-4A11-9723-07CA771FA29B}" type="pres">
       <dgm:prSet presAssocID="{F87EEC81-6172-4095-AD1B-89FCE870E9BD}" presName="aSpace2" presStyleCnt="0"/>
@@ -4167,13 +4210,6 @@
         </dgm:presLayoutVars>
       </dgm:prSet>
       <dgm:spPr/>
-      <dgm:t>
-        <a:bodyPr/>
-        <a:lstStyle/>
-        <a:p>
-          <a:endParaRPr lang="es-ES"/>
-        </a:p>
-      </dgm:t>
     </dgm:pt>
     <dgm:pt modelId="{E7DF1371-1130-4F4D-A963-544AD439FCD4}" type="pres">
       <dgm:prSet presAssocID="{3D8DDDFD-F794-421B-95F4-FC0A74BB4CBA}" presName="aSpace" presStyleCnt="0"/>
@@ -4186,24 +4222,10 @@
     <dgm:pt modelId="{E2A01843-EF63-452A-8B5D-2690334E764C}" type="pres">
       <dgm:prSet presAssocID="{1F005018-1DC5-41AF-A4FD-931EF028C454}" presName="aNode" presStyleLbl="bgShp" presStyleIdx="1" presStyleCnt="2"/>
       <dgm:spPr/>
-      <dgm:t>
-        <a:bodyPr/>
-        <a:lstStyle/>
-        <a:p>
-          <a:endParaRPr lang="es-ES"/>
-        </a:p>
-      </dgm:t>
     </dgm:pt>
     <dgm:pt modelId="{47CCD921-D242-48A2-956D-0391C0725FFC}" type="pres">
       <dgm:prSet presAssocID="{1F005018-1DC5-41AF-A4FD-931EF028C454}" presName="textNode" presStyleLbl="bgShp" presStyleIdx="1" presStyleCnt="2"/>
       <dgm:spPr/>
-      <dgm:t>
-        <a:bodyPr/>
-        <a:lstStyle/>
-        <a:p>
-          <a:endParaRPr lang="es-ES"/>
-        </a:p>
-      </dgm:t>
     </dgm:pt>
     <dgm:pt modelId="{511CA4FD-1759-4E7D-82CE-26507E3547E0}" type="pres">
       <dgm:prSet presAssocID="{1F005018-1DC5-41AF-A4FD-931EF028C454}" presName="compChildNode" presStyleCnt="0"/>
@@ -4220,13 +4242,6 @@
         </dgm:presLayoutVars>
       </dgm:prSet>
       <dgm:spPr/>
-      <dgm:t>
-        <a:bodyPr/>
-        <a:lstStyle/>
-        <a:p>
-          <a:endParaRPr lang="es-ES"/>
-        </a:p>
-      </dgm:t>
     </dgm:pt>
     <dgm:pt modelId="{838CEB69-CD3F-4257-9F98-4AFBF610DA9D}" type="pres">
       <dgm:prSet presAssocID="{97B72918-D7C5-48F6-A614-30186E90E623}" presName="aSpace2" presStyleCnt="0"/>
@@ -4239,31 +4254,24 @@
         </dgm:presLayoutVars>
       </dgm:prSet>
       <dgm:spPr/>
-      <dgm:t>
-        <a:bodyPr/>
-        <a:lstStyle/>
-        <a:p>
-          <a:endParaRPr lang="es-ES"/>
-        </a:p>
-      </dgm:t>
     </dgm:pt>
   </dgm:ptLst>
   <dgm:cxnLst>
+    <dgm:cxn modelId="{ADD5B706-60EF-4DBA-A101-37A24426AAAB}" srcId="{89E6003B-F246-452A-9C03-186789E73E55}" destId="{1F005018-1DC5-41AF-A4FD-931EF028C454}" srcOrd="1" destOrd="0" parTransId="{45599ED1-6034-499D-9EDE-07AF54C21F68}" sibTransId="{0E32FE9A-58E5-404E-80B1-91E6289070B2}"/>
+    <dgm:cxn modelId="{CEE2FB1F-3F0C-43B5-929F-8F97C740C076}" srcId="{1F005018-1DC5-41AF-A4FD-931EF028C454}" destId="{11678EC8-7CD9-4C13-8EFC-2405EEED5514}" srcOrd="1" destOrd="0" parTransId="{A9C87AB8-7468-4A1D-8130-430DD20E4A32}" sibTransId="{6303BBEA-E208-41BD-A5E1-15E18024FED0}"/>
+    <dgm:cxn modelId="{A27A2A3C-D6DB-4AF6-802F-88A54B552DE3}" type="presOf" srcId="{1F005018-1DC5-41AF-A4FD-931EF028C454}" destId="{E2A01843-EF63-452A-8B5D-2690334E764C}" srcOrd="0" destOrd="0" presId="urn:microsoft.com/office/officeart/2005/8/layout/lProcess2"/>
+    <dgm:cxn modelId="{356DF33E-165A-46EB-BD3E-7E13DC000147}" type="presOf" srcId="{3D8DDDFD-F794-421B-95F4-FC0A74BB4CBA}" destId="{E4DC6D39-F1BC-4105-8953-59983839ED2E}" srcOrd="1" destOrd="0" presId="urn:microsoft.com/office/officeart/2005/8/layout/lProcess2"/>
+    <dgm:cxn modelId="{46C52D40-03E7-4586-AFB3-E3443AB153DA}" type="presOf" srcId="{75BCDD55-C64B-4B82-8B9F-43C8F11C0658}" destId="{7F091850-A88D-4301-A737-CCA4948AC503}" srcOrd="0" destOrd="0" presId="urn:microsoft.com/office/officeart/2005/8/layout/lProcess2"/>
+    <dgm:cxn modelId="{8F7DFB5D-968E-465C-BA73-29947D899C28}" srcId="{1F005018-1DC5-41AF-A4FD-931EF028C454}" destId="{97B72918-D7C5-48F6-A614-30186E90E623}" srcOrd="0" destOrd="0" parTransId="{05D14DA9-5437-4015-91A6-6A73B6393517}" sibTransId="{C739B104-8D5A-4B59-9824-3E9089E6B64A}"/>
+    <dgm:cxn modelId="{75299179-FD54-423A-82F9-B1D71E51B583}" type="presOf" srcId="{1F005018-1DC5-41AF-A4FD-931EF028C454}" destId="{47CCD921-D242-48A2-956D-0391C0725FFC}" srcOrd="1" destOrd="0" presId="urn:microsoft.com/office/officeart/2005/8/layout/lProcess2"/>
+    <dgm:cxn modelId="{4A34828B-2C64-4E90-A0C7-94F50B7B3DDB}" type="presOf" srcId="{F87EEC81-6172-4095-AD1B-89FCE870E9BD}" destId="{4BEB2360-A63D-43C1-8B59-85CE51675771}" srcOrd="0" destOrd="0" presId="urn:microsoft.com/office/officeart/2005/8/layout/lProcess2"/>
     <dgm:cxn modelId="{18E3C092-743D-4416-8224-BB3ECD68DFDD}" type="presOf" srcId="{11678EC8-7CD9-4C13-8EFC-2405EEED5514}" destId="{CF3DC780-9705-46ED-BD46-D7BCD79E7BFA}" srcOrd="0" destOrd="0" presId="urn:microsoft.com/office/officeart/2005/8/layout/lProcess2"/>
-    <dgm:cxn modelId="{75299179-FD54-423A-82F9-B1D71E51B583}" type="presOf" srcId="{1F005018-1DC5-41AF-A4FD-931EF028C454}" destId="{47CCD921-D242-48A2-956D-0391C0725FFC}" srcOrd="1" destOrd="0" presId="urn:microsoft.com/office/officeart/2005/8/layout/lProcess2"/>
+    <dgm:cxn modelId="{29B58693-BF93-4B54-854B-1A762306A570}" type="presOf" srcId="{97B72918-D7C5-48F6-A614-30186E90E623}" destId="{E5604C54-2A27-432F-944A-DC62473127B2}" srcOrd="0" destOrd="0" presId="urn:microsoft.com/office/officeart/2005/8/layout/lProcess2"/>
+    <dgm:cxn modelId="{63C48398-BB03-4F4B-8A9B-39F2AA56D86C}" srcId="{89E6003B-F246-452A-9C03-186789E73E55}" destId="{3D8DDDFD-F794-421B-95F4-FC0A74BB4CBA}" srcOrd="0" destOrd="0" parTransId="{D81959AC-6C81-4664-8B9A-EFCEC3B19588}" sibTransId="{4D481A01-C649-46D3-B1B7-3732E5060E7E}"/>
+    <dgm:cxn modelId="{F75A4FC0-E8D8-419E-82C2-99E0DFBBB2CE}" srcId="{3D8DDDFD-F794-421B-95F4-FC0A74BB4CBA}" destId="{75BCDD55-C64B-4B82-8B9F-43C8F11C0658}" srcOrd="1" destOrd="0" parTransId="{DC023AC3-6523-4E68-BB02-27192BEF5487}" sibTransId="{CFE8800E-1830-4D8A-B353-C716E4F15D50}"/>
+    <dgm:cxn modelId="{6D678CC1-80B4-46FB-BF97-898CEFD7E0E9}" srcId="{3D8DDDFD-F794-421B-95F4-FC0A74BB4CBA}" destId="{F87EEC81-6172-4095-AD1B-89FCE870E9BD}" srcOrd="0" destOrd="0" parTransId="{499A0B8C-AE6D-4F5F-B8C6-658568557B7D}" sibTransId="{2C8C3312-DDF4-49AE-B904-250E8FB1411E}"/>
     <dgm:cxn modelId="{448381C6-660A-44D7-8026-3A724BBC8E50}" type="presOf" srcId="{89E6003B-F246-452A-9C03-186789E73E55}" destId="{1F4AFD9A-222E-4116-9C70-DEBA32B25611}" srcOrd="0" destOrd="0" presId="urn:microsoft.com/office/officeart/2005/8/layout/lProcess2"/>
-    <dgm:cxn modelId="{F75A4FC0-E8D8-419E-82C2-99E0DFBBB2CE}" srcId="{3D8DDDFD-F794-421B-95F4-FC0A74BB4CBA}" destId="{75BCDD55-C64B-4B82-8B9F-43C8F11C0658}" srcOrd="1" destOrd="0" parTransId="{DC023AC3-6523-4E68-BB02-27192BEF5487}" sibTransId="{CFE8800E-1830-4D8A-B353-C716E4F15D50}"/>
-    <dgm:cxn modelId="{4A34828B-2C64-4E90-A0C7-94F50B7B3DDB}" type="presOf" srcId="{F87EEC81-6172-4095-AD1B-89FCE870E9BD}" destId="{4BEB2360-A63D-43C1-8B59-85CE51675771}" srcOrd="0" destOrd="0" presId="urn:microsoft.com/office/officeart/2005/8/layout/lProcess2"/>
-    <dgm:cxn modelId="{63C48398-BB03-4F4B-8A9B-39F2AA56D86C}" srcId="{89E6003B-F246-452A-9C03-186789E73E55}" destId="{3D8DDDFD-F794-421B-95F4-FC0A74BB4CBA}" srcOrd="0" destOrd="0" parTransId="{D81959AC-6C81-4664-8B9A-EFCEC3B19588}" sibTransId="{4D481A01-C649-46D3-B1B7-3732E5060E7E}"/>
-    <dgm:cxn modelId="{ADD5B706-60EF-4DBA-A101-37A24426AAAB}" srcId="{89E6003B-F246-452A-9C03-186789E73E55}" destId="{1F005018-1DC5-41AF-A4FD-931EF028C454}" srcOrd="1" destOrd="0" parTransId="{45599ED1-6034-499D-9EDE-07AF54C21F68}" sibTransId="{0E32FE9A-58E5-404E-80B1-91E6289070B2}"/>
-    <dgm:cxn modelId="{6D678CC1-80B4-46FB-BF97-898CEFD7E0E9}" srcId="{3D8DDDFD-F794-421B-95F4-FC0A74BB4CBA}" destId="{F87EEC81-6172-4095-AD1B-89FCE870E9BD}" srcOrd="0" destOrd="0" parTransId="{499A0B8C-AE6D-4F5F-B8C6-658568557B7D}" sibTransId="{2C8C3312-DDF4-49AE-B904-250E8FB1411E}"/>
-    <dgm:cxn modelId="{29B58693-BF93-4B54-854B-1A762306A570}" type="presOf" srcId="{97B72918-D7C5-48F6-A614-30186E90E623}" destId="{E5604C54-2A27-432F-944A-DC62473127B2}" srcOrd="0" destOrd="0" presId="urn:microsoft.com/office/officeart/2005/8/layout/lProcess2"/>
-    <dgm:cxn modelId="{356DF33E-165A-46EB-BD3E-7E13DC000147}" type="presOf" srcId="{3D8DDDFD-F794-421B-95F4-FC0A74BB4CBA}" destId="{E4DC6D39-F1BC-4105-8953-59983839ED2E}" srcOrd="1" destOrd="0" presId="urn:microsoft.com/office/officeart/2005/8/layout/lProcess2"/>
     <dgm:cxn modelId="{1C8CBBE5-6BC8-44B4-8871-A3E3B9C46928}" type="presOf" srcId="{3D8DDDFD-F794-421B-95F4-FC0A74BB4CBA}" destId="{8378F2CF-AE8F-4E06-B42D-68146418046C}" srcOrd="0" destOrd="0" presId="urn:microsoft.com/office/officeart/2005/8/layout/lProcess2"/>
-    <dgm:cxn modelId="{8F7DFB5D-968E-465C-BA73-29947D899C28}" srcId="{1F005018-1DC5-41AF-A4FD-931EF028C454}" destId="{97B72918-D7C5-48F6-A614-30186E90E623}" srcOrd="0" destOrd="0" parTransId="{05D14DA9-5437-4015-91A6-6A73B6393517}" sibTransId="{C739B104-8D5A-4B59-9824-3E9089E6B64A}"/>
-    <dgm:cxn modelId="{A27A2A3C-D6DB-4AF6-802F-88A54B552DE3}" type="presOf" srcId="{1F005018-1DC5-41AF-A4FD-931EF028C454}" destId="{E2A01843-EF63-452A-8B5D-2690334E764C}" srcOrd="0" destOrd="0" presId="urn:microsoft.com/office/officeart/2005/8/layout/lProcess2"/>
-    <dgm:cxn modelId="{46C52D40-03E7-4586-AFB3-E3443AB153DA}" type="presOf" srcId="{75BCDD55-C64B-4B82-8B9F-43C8F11C0658}" destId="{7F091850-A88D-4301-A737-CCA4948AC503}" srcOrd="0" destOrd="0" presId="urn:microsoft.com/office/officeart/2005/8/layout/lProcess2"/>
-    <dgm:cxn modelId="{CEE2FB1F-3F0C-43B5-929F-8F97C740C076}" srcId="{1F005018-1DC5-41AF-A4FD-931EF028C454}" destId="{11678EC8-7CD9-4C13-8EFC-2405EEED5514}" srcOrd="1" destOrd="0" parTransId="{A9C87AB8-7468-4A1D-8130-430DD20E4A32}" sibTransId="{6303BBEA-E208-41BD-A5E1-15E18024FED0}"/>
     <dgm:cxn modelId="{12F3CE7B-4386-473B-8E48-C727E9889184}" type="presParOf" srcId="{1F4AFD9A-222E-4116-9C70-DEBA32B25611}" destId="{98256D3B-B03B-40DB-826F-808A1FB370DD}" srcOrd="0" destOrd="0" presId="urn:microsoft.com/office/officeart/2005/8/layout/lProcess2"/>
     <dgm:cxn modelId="{6C022E99-C8EF-4B09-B07F-9431E8487F1F}" type="presParOf" srcId="{98256D3B-B03B-40DB-826F-808A1FB370DD}" destId="{8378F2CF-AE8F-4E06-B42D-68146418046C}" srcOrd="0" destOrd="0" presId="urn:microsoft.com/office/officeart/2005/8/layout/lProcess2"/>
     <dgm:cxn modelId="{F41184AC-4C46-4671-812A-E28B6C6D59F3}" type="presParOf" srcId="{98256D3B-B03B-40DB-826F-808A1FB370DD}" destId="{E4DC6D39-F1BC-4105-8953-59983839ED2E}" srcOrd="1" destOrd="0" presId="urn:microsoft.com/office/officeart/2005/8/layout/lProcess2"/>
@@ -4314,10 +4322,9 @@
         <a:lstStyle/>
         <a:p>
           <a:r>
-            <a:rPr lang="es-ES" dirty="0" smtClean="0"/>
+            <a:rPr lang="es-ES"/>
             <a:t>ACTIVO NO CORRIENTE</a:t>
           </a:r>
-          <a:endParaRPr lang="es-ES" dirty="0"/>
         </a:p>
       </dgm:t>
     </dgm:pt>
@@ -4351,10 +4358,9 @@
         <a:lstStyle/>
         <a:p>
           <a:r>
-            <a:rPr lang="es-ES" dirty="0" smtClean="0"/>
+            <a:rPr lang="es-ES"/>
             <a:t>Terrenos</a:t>
           </a:r>
-          <a:endParaRPr lang="es-ES" dirty="0"/>
         </a:p>
       </dgm:t>
     </dgm:pt>
@@ -4388,10 +4394,9 @@
         <a:lstStyle/>
         <a:p>
           <a:r>
-            <a:rPr lang="es-ES" dirty="0" smtClean="0"/>
+            <a:rPr lang="es-ES"/>
             <a:t>Maquinaria</a:t>
           </a:r>
-          <a:endParaRPr lang="es-ES" dirty="0"/>
         </a:p>
       </dgm:t>
     </dgm:pt>
@@ -4425,10 +4430,9 @@
         <a:lstStyle/>
         <a:p>
           <a:r>
-            <a:rPr lang="es-ES" dirty="0" smtClean="0"/>
+            <a:rPr lang="es-ES"/>
             <a:t>EXISTENCIAS</a:t>
           </a:r>
-          <a:endParaRPr lang="es-ES" dirty="0"/>
         </a:p>
       </dgm:t>
     </dgm:pt>
@@ -4462,10 +4466,9 @@
         <a:lstStyle/>
         <a:p>
           <a:r>
-            <a:rPr lang="es-ES" dirty="0" smtClean="0"/>
+            <a:rPr lang="es-ES"/>
             <a:t>Mercaderías( artículos que se venden en la empresa sin transformar)</a:t>
           </a:r>
-          <a:endParaRPr lang="es-ES" dirty="0"/>
         </a:p>
       </dgm:t>
     </dgm:pt>
@@ -4499,10 +4502,9 @@
         <a:lstStyle/>
         <a:p>
           <a:r>
-            <a:rPr lang="es-ES" dirty="0" smtClean="0"/>
+            <a:rPr lang="es-ES"/>
             <a:t>Envases</a:t>
           </a:r>
-          <a:endParaRPr lang="es-ES" dirty="0"/>
         </a:p>
       </dgm:t>
     </dgm:pt>
@@ -4536,10 +4538,9 @@
         <a:lstStyle/>
         <a:p>
           <a:r>
-            <a:rPr lang="es-ES" dirty="0" smtClean="0"/>
+            <a:rPr lang="es-ES"/>
             <a:t>REALIZABLE</a:t>
           </a:r>
-          <a:endParaRPr lang="es-ES" dirty="0"/>
         </a:p>
       </dgm:t>
     </dgm:pt>
@@ -4573,10 +4574,9 @@
         <a:lstStyle/>
         <a:p>
           <a:r>
-            <a:rPr lang="es-ES" dirty="0" smtClean="0"/>
+            <a:rPr lang="es-ES"/>
             <a:t>Clientes ( deudas de un cliente)</a:t>
           </a:r>
-          <a:endParaRPr lang="es-ES" dirty="0"/>
         </a:p>
       </dgm:t>
     </dgm:pt>
@@ -4610,10 +4610,9 @@
         <a:lstStyle/>
         <a:p>
           <a:r>
-            <a:rPr lang="es-ES" dirty="0" smtClean="0"/>
+            <a:rPr lang="es-ES"/>
             <a:t>Otros deudores</a:t>
           </a:r>
-          <a:endParaRPr lang="es-ES" dirty="0"/>
         </a:p>
       </dgm:t>
     </dgm:pt>
@@ -4647,10 +4646,9 @@
         <a:lstStyle/>
         <a:p>
           <a:r>
-            <a:rPr lang="es-ES" dirty="0" smtClean="0"/>
+            <a:rPr lang="es-ES"/>
             <a:t>DISPONIBLE</a:t>
           </a:r>
-          <a:endParaRPr lang="es-ES" dirty="0"/>
         </a:p>
       </dgm:t>
     </dgm:pt>
@@ -4670,10 +4668,9 @@
         <a:lstStyle/>
         <a:p>
           <a:r>
-            <a:rPr lang="es-ES" dirty="0" smtClean="0"/>
+            <a:rPr lang="es-ES"/>
             <a:t>Construcciones</a:t>
           </a:r>
-          <a:endParaRPr lang="es-ES" dirty="0"/>
         </a:p>
       </dgm:t>
     </dgm:pt>
@@ -4693,10 +4690,9 @@
         <a:lstStyle/>
         <a:p>
           <a:r>
-            <a:rPr lang="es-ES" dirty="0" smtClean="0"/>
+            <a:rPr lang="es-ES"/>
             <a:t>Utillaje (herramientas)</a:t>
           </a:r>
-          <a:endParaRPr lang="es-ES" dirty="0"/>
         </a:p>
       </dgm:t>
     </dgm:pt>
@@ -4716,10 +4712,9 @@
         <a:lstStyle/>
         <a:p>
           <a:r>
-            <a:rPr lang="es-ES" dirty="0" smtClean="0"/>
+            <a:rPr lang="es-ES"/>
             <a:t>Mobiliario</a:t>
           </a:r>
-          <a:endParaRPr lang="es-ES" dirty="0"/>
         </a:p>
       </dgm:t>
     </dgm:pt>
@@ -4739,10 +4734,9 @@
         <a:lstStyle/>
         <a:p>
           <a:r>
-            <a:rPr lang="es-ES" dirty="0" smtClean="0"/>
+            <a:rPr lang="es-ES"/>
             <a:t>Equipos para procesos de información</a:t>
           </a:r>
-          <a:endParaRPr lang="es-ES" dirty="0"/>
         </a:p>
       </dgm:t>
     </dgm:pt>
@@ -4762,10 +4756,9 @@
         <a:lstStyle/>
         <a:p>
           <a:r>
-            <a:rPr lang="es-ES" dirty="0" smtClean="0"/>
+            <a:rPr lang="es-ES"/>
             <a:t>Elementos de transporte</a:t>
           </a:r>
-          <a:endParaRPr lang="es-ES" dirty="0"/>
         </a:p>
       </dgm:t>
     </dgm:pt>
@@ -4785,10 +4778,9 @@
         <a:lstStyle/>
         <a:p>
           <a:r>
-            <a:rPr lang="es-ES" dirty="0" smtClean="0"/>
+            <a:rPr lang="es-ES"/>
             <a:t>Aplicaciones informáticas</a:t>
           </a:r>
-          <a:endParaRPr lang="es-ES" dirty="0"/>
         </a:p>
       </dgm:t>
     </dgm:pt>
@@ -4808,10 +4800,9 @@
         <a:lstStyle/>
         <a:p>
           <a:r>
-            <a:rPr lang="es-ES" dirty="0" smtClean="0"/>
+            <a:rPr lang="es-ES"/>
             <a:t>Patentes y marcas</a:t>
           </a:r>
-          <a:endParaRPr lang="es-ES" dirty="0"/>
         </a:p>
       </dgm:t>
     </dgm:pt>
@@ -4831,10 +4822,9 @@
         <a:lstStyle/>
         <a:p>
           <a:r>
-            <a:rPr lang="es-ES" dirty="0" smtClean="0"/>
+            <a:rPr lang="es-ES"/>
             <a:t>Materias primas</a:t>
           </a:r>
-          <a:endParaRPr lang="es-ES" dirty="0"/>
         </a:p>
       </dgm:t>
     </dgm:pt>
@@ -4854,10 +4844,9 @@
         <a:lstStyle/>
         <a:p>
           <a:r>
-            <a:rPr lang="es-ES" dirty="0" smtClean="0"/>
+            <a:rPr lang="es-ES"/>
             <a:t>Productos en elaboración</a:t>
           </a:r>
-          <a:endParaRPr lang="es-ES" dirty="0"/>
         </a:p>
       </dgm:t>
     </dgm:pt>
@@ -4877,10 +4866,9 @@
         <a:lstStyle/>
         <a:p>
           <a:r>
-            <a:rPr lang="es-ES" dirty="0" smtClean="0"/>
+            <a:rPr lang="es-ES"/>
             <a:t>Deudas de Hacienda: IVA soportado</a:t>
           </a:r>
-          <a:endParaRPr lang="es-ES" dirty="0"/>
         </a:p>
       </dgm:t>
     </dgm:pt>
@@ -4900,10 +4888,9 @@
         <a:lstStyle/>
         <a:p>
           <a:r>
-            <a:rPr lang="es-ES" dirty="0" smtClean="0"/>
+            <a:rPr lang="es-ES"/>
             <a:t>Bancos ( dinero en efectivo en cuentas bancarias)</a:t>
           </a:r>
-          <a:endParaRPr lang="es-ES" dirty="0"/>
         </a:p>
       </dgm:t>
     </dgm:pt>
@@ -4923,10 +4910,9 @@
         <a:lstStyle/>
         <a:p>
           <a:r>
-            <a:rPr lang="es-ES" dirty="0" smtClean="0"/>
+            <a:rPr lang="es-ES"/>
             <a:t>Caja</a:t>
           </a:r>
-          <a:endParaRPr lang="es-ES" dirty="0"/>
         </a:p>
       </dgm:t>
     </dgm:pt>
@@ -4947,13 +4933,6 @@
         </dgm:presLayoutVars>
       </dgm:prSet>
       <dgm:spPr/>
-      <dgm:t>
-        <a:bodyPr/>
-        <a:lstStyle/>
-        <a:p>
-          <a:endParaRPr lang="es-ES"/>
-        </a:p>
-      </dgm:t>
     </dgm:pt>
     <dgm:pt modelId="{4DD350FF-B5BB-4120-94BA-1A9FC6B9A109}" type="pres">
       <dgm:prSet presAssocID="{E3C11628-F4C1-4EC6-AC63-EA267AD5D872}" presName="composite" presStyleCnt="0"/>
@@ -4968,13 +4947,6 @@
         </dgm:presLayoutVars>
       </dgm:prSet>
       <dgm:spPr/>
-      <dgm:t>
-        <a:bodyPr/>
-        <a:lstStyle/>
-        <a:p>
-          <a:endParaRPr lang="es-ES"/>
-        </a:p>
-      </dgm:t>
     </dgm:pt>
     <dgm:pt modelId="{0D6F43BB-F56C-40DE-AF52-CD5CBB746C50}" type="pres">
       <dgm:prSet presAssocID="{E3C11628-F4C1-4EC6-AC63-EA267AD5D872}" presName="desTx" presStyleLbl="alignAccFollowNode1" presStyleIdx="0" presStyleCnt="4">
@@ -4983,13 +4955,6 @@
         </dgm:presLayoutVars>
       </dgm:prSet>
       <dgm:spPr/>
-      <dgm:t>
-        <a:bodyPr/>
-        <a:lstStyle/>
-        <a:p>
-          <a:endParaRPr lang="es-ES"/>
-        </a:p>
-      </dgm:t>
     </dgm:pt>
     <dgm:pt modelId="{70C24531-9C11-446A-8C72-91CAA48A1033}" type="pres">
       <dgm:prSet presAssocID="{15E3BF45-5AA0-487B-A75A-B1D031045158}" presName="space" presStyleCnt="0"/>
@@ -5008,13 +4973,6 @@
         </dgm:presLayoutVars>
       </dgm:prSet>
       <dgm:spPr/>
-      <dgm:t>
-        <a:bodyPr/>
-        <a:lstStyle/>
-        <a:p>
-          <a:endParaRPr lang="es-ES"/>
-        </a:p>
-      </dgm:t>
     </dgm:pt>
     <dgm:pt modelId="{C50CC88D-8061-4AC9-893B-FBDC7A83EE6C}" type="pres">
       <dgm:prSet presAssocID="{7B3F1C71-0B4E-4D99-8EFC-B8E25B74ACA8}" presName="desTx" presStyleLbl="alignAccFollowNode1" presStyleIdx="1" presStyleCnt="4">
@@ -5023,13 +4981,6 @@
         </dgm:presLayoutVars>
       </dgm:prSet>
       <dgm:spPr/>
-      <dgm:t>
-        <a:bodyPr/>
-        <a:lstStyle/>
-        <a:p>
-          <a:endParaRPr lang="es-ES"/>
-        </a:p>
-      </dgm:t>
     </dgm:pt>
     <dgm:pt modelId="{45BDCA3E-1129-40AA-9DBB-6A8F0263A9D6}" type="pres">
       <dgm:prSet presAssocID="{DCBC2059-6018-4AB5-B4D5-1FA0A3F10AE0}" presName="space" presStyleCnt="0"/>
@@ -5048,13 +4999,6 @@
         </dgm:presLayoutVars>
       </dgm:prSet>
       <dgm:spPr/>
-      <dgm:t>
-        <a:bodyPr/>
-        <a:lstStyle/>
-        <a:p>
-          <a:endParaRPr lang="es-ES"/>
-        </a:p>
-      </dgm:t>
     </dgm:pt>
     <dgm:pt modelId="{040C5DF5-5C5C-4086-9F94-337A50E0D986}" type="pres">
       <dgm:prSet presAssocID="{D52C3816-998C-4942-B78E-6571939A0D19}" presName="desTx" presStyleLbl="alignAccFollowNode1" presStyleIdx="2" presStyleCnt="4">
@@ -5063,13 +5007,6 @@
         </dgm:presLayoutVars>
       </dgm:prSet>
       <dgm:spPr/>
-      <dgm:t>
-        <a:bodyPr/>
-        <a:lstStyle/>
-        <a:p>
-          <a:endParaRPr lang="es-ES"/>
-        </a:p>
-      </dgm:t>
     </dgm:pt>
     <dgm:pt modelId="{2FC16BB1-A829-4160-B445-766834D00407}" type="pres">
       <dgm:prSet presAssocID="{1B7EAACE-944B-4C84-A305-79F12C6B4C29}" presName="space" presStyleCnt="0"/>
@@ -5088,13 +5025,6 @@
         </dgm:presLayoutVars>
       </dgm:prSet>
       <dgm:spPr/>
-      <dgm:t>
-        <a:bodyPr/>
-        <a:lstStyle/>
-        <a:p>
-          <a:endParaRPr lang="es-ES"/>
-        </a:p>
-      </dgm:t>
     </dgm:pt>
     <dgm:pt modelId="{BB8E3DB9-E366-4916-B7CC-0AE68235B5E6}" type="pres">
       <dgm:prSet presAssocID="{5E5BEC36-40A0-4CC8-9199-16D04CF2C010}" presName="desTx" presStyleLbl="alignAccFollowNode1" presStyleIdx="3" presStyleCnt="4">
@@ -5103,61 +5033,54 @@
         </dgm:presLayoutVars>
       </dgm:prSet>
       <dgm:spPr/>
-      <dgm:t>
-        <a:bodyPr/>
-        <a:lstStyle/>
-        <a:p>
-          <a:endParaRPr lang="es-ES"/>
-        </a:p>
-      </dgm:t>
     </dgm:pt>
   </dgm:ptLst>
   <dgm:cxnLst>
+    <dgm:cxn modelId="{E569EE02-6739-4673-93FD-2C489CF45DD1}" type="presOf" srcId="{84051B12-E9C8-4150-A4B6-BBA680C59EC2}" destId="{0D6F43BB-F56C-40DE-AF52-CD5CBB746C50}" srcOrd="0" destOrd="4" presId="urn:microsoft.com/office/officeart/2005/8/layout/hList1"/>
+    <dgm:cxn modelId="{5489FC07-FADA-402D-AECC-0D613D8DCCAC}" type="presOf" srcId="{09CA1AE8-5F8E-46A4-8A57-58BFB7F18BB1}" destId="{C50CC88D-8061-4AC9-893B-FBDC7A83EE6C}" srcOrd="0" destOrd="2" presId="urn:microsoft.com/office/officeart/2005/8/layout/hList1"/>
+    <dgm:cxn modelId="{810EA310-F97A-4C69-95BC-F6D270A9DD06}" type="presOf" srcId="{0A1BA8F5-9ED7-4C87-AC18-BBFDC77BA591}" destId="{BB8E3DB9-E366-4916-B7CC-0AE68235B5E6}" srcOrd="0" destOrd="1" presId="urn:microsoft.com/office/officeart/2005/8/layout/hList1"/>
+    <dgm:cxn modelId="{B4CC2F21-76E9-40AF-ADE4-1D87EA598494}" type="presOf" srcId="{638CA45C-4F67-478E-9B59-3142693D1DF7}" destId="{0D6F43BB-F56C-40DE-AF52-CD5CBB746C50}" srcOrd="0" destOrd="0" presId="urn:microsoft.com/office/officeart/2005/8/layout/hList1"/>
+    <dgm:cxn modelId="{ABEF902E-D87D-4ABB-815F-55EC4F841E52}" type="presOf" srcId="{83B07D4B-E513-4341-B699-6648E32E66AB}" destId="{0D6F43BB-F56C-40DE-AF52-CD5CBB746C50}" srcOrd="0" destOrd="1" presId="urn:microsoft.com/office/officeart/2005/8/layout/hList1"/>
+    <dgm:cxn modelId="{BCBFF130-0419-4972-AFC5-857540E9D0CE}" srcId="{E3C11628-F4C1-4EC6-AC63-EA267AD5D872}" destId="{E301DBDC-8BC9-4B27-BA47-413E3BA1A080}" srcOrd="3" destOrd="0" parTransId="{86E21A97-6F4C-438C-BFC0-C48CCF812F75}" sibTransId="{A2039469-5180-4C8A-B690-F4DC9EF19DD6}"/>
+    <dgm:cxn modelId="{25418531-F289-4CAD-B502-BD50F77D3A43}" type="presOf" srcId="{578EF7DC-70EE-4FD4-BAE7-F13274D212DE}" destId="{040C5DF5-5C5C-4086-9F94-337A50E0D986}" srcOrd="0" destOrd="2" presId="urn:microsoft.com/office/officeart/2005/8/layout/hList1"/>
+    <dgm:cxn modelId="{100F1A33-4FE0-48A6-8A0B-4779C7390102}" srcId="{D52C3816-998C-4942-B78E-6571939A0D19}" destId="{D30C94AC-258B-4140-85B5-FC326065C8DF}" srcOrd="1" destOrd="0" parTransId="{C272B7AF-E7DA-47AC-A2EA-384EDD4FC081}" sibTransId="{5D432214-64FA-4482-ACA5-EB60C38AC668}"/>
+    <dgm:cxn modelId="{7FD4A935-5973-40A0-B6C1-05791A7D164C}" type="presOf" srcId="{8A7B161E-B43B-4B9B-8713-01040682186B}" destId="{0D6F43BB-F56C-40DE-AF52-CD5CBB746C50}" srcOrd="0" destOrd="5" presId="urn:microsoft.com/office/officeart/2005/8/layout/hList1"/>
+    <dgm:cxn modelId="{A2771536-7873-435F-9C72-8CB96F1929F9}" srcId="{7B3F1C71-0B4E-4D99-8EFC-B8E25B74ACA8}" destId="{7AAB3A44-FDE0-42F5-A96C-02A6980FDFB8}" srcOrd="1" destOrd="0" parTransId="{49696D7B-7512-41F4-AE74-919598ED4232}" sibTransId="{33A33CE6-627C-4D1A-9DC7-83C97910E409}"/>
+    <dgm:cxn modelId="{501EFF3B-1102-4DB4-BA2E-EF4C5F5527E6}" type="presOf" srcId="{29A6A093-2AD7-4425-AF0F-15FBC4365F55}" destId="{0D6F43BB-F56C-40DE-AF52-CD5CBB746C50}" srcOrd="0" destOrd="8" presId="urn:microsoft.com/office/officeart/2005/8/layout/hList1"/>
+    <dgm:cxn modelId="{9082063F-84EF-4096-8C2A-146F924C9B6E}" type="presOf" srcId="{72068F2C-854E-493B-9163-D8BEC9328C4C}" destId="{C50CC88D-8061-4AC9-893B-FBDC7A83EE6C}" srcOrd="0" destOrd="0" presId="urn:microsoft.com/office/officeart/2005/8/layout/hList1"/>
+    <dgm:cxn modelId="{D3A7113F-F880-4E71-A8C5-6DA69511D437}" type="presOf" srcId="{B163C2E0-D5BD-4AD8-AF89-238DF53E1F13}" destId="{84649337-5604-44D5-A5F1-1B18E5B31CC7}" srcOrd="0" destOrd="0" presId="urn:microsoft.com/office/officeart/2005/8/layout/hList1"/>
+    <dgm:cxn modelId="{580EAD5C-EB41-4A86-819B-EE704BBEE994}" type="presOf" srcId="{A0122DD0-7C3A-4041-918D-F75B2E3AC36C}" destId="{BB8E3DB9-E366-4916-B7CC-0AE68235B5E6}" srcOrd="0" destOrd="0" presId="urn:microsoft.com/office/officeart/2005/8/layout/hList1"/>
+    <dgm:cxn modelId="{08C33C61-2F61-436E-B180-904FB708B6DC}" srcId="{E3C11628-F4C1-4EC6-AC63-EA267AD5D872}" destId="{2D59ABA4-302E-401C-AD94-BB954A21E944}" srcOrd="7" destOrd="0" parTransId="{747672D6-3D37-4553-86AA-36B1FDA67DD1}" sibTransId="{76DB1F48-145B-4C2B-82E6-30FAE8A1C4EB}"/>
+    <dgm:cxn modelId="{4EF62862-B6D4-4A8B-ACEA-69B46AC5CEC1}" srcId="{E3C11628-F4C1-4EC6-AC63-EA267AD5D872}" destId="{83B07D4B-E513-4341-B699-6648E32E66AB}" srcOrd="1" destOrd="0" parTransId="{9B1B1340-E6A8-442B-882F-08A7AA5F23E0}" sibTransId="{649317F3-2E7A-4FCE-8B54-F1ADF3679E9F}"/>
+    <dgm:cxn modelId="{9439C843-4491-42B8-9EFA-73C7DEEFE586}" srcId="{E3C11628-F4C1-4EC6-AC63-EA267AD5D872}" destId="{29A6A093-2AD7-4425-AF0F-15FBC4365F55}" srcOrd="8" destOrd="0" parTransId="{93F5A8DB-9631-4EC8-B7F4-09E042427977}" sibTransId="{B96E1CCC-0FFC-43F3-8115-F46033E11D04}"/>
+    <dgm:cxn modelId="{492A876B-1280-42FF-9B17-CB5A996E5102}" type="presOf" srcId="{7AAB3A44-FDE0-42F5-A96C-02A6980FDFB8}" destId="{C50CC88D-8061-4AC9-893B-FBDC7A83EE6C}" srcOrd="0" destOrd="1" presId="urn:microsoft.com/office/officeart/2005/8/layout/hList1"/>
+    <dgm:cxn modelId="{9EA9356E-74F2-4EDF-AA8E-9BDF1150F057}" type="presOf" srcId="{E301DBDC-8BC9-4B27-BA47-413E3BA1A080}" destId="{0D6F43BB-F56C-40DE-AF52-CD5CBB746C50}" srcOrd="0" destOrd="3" presId="urn:microsoft.com/office/officeart/2005/8/layout/hList1"/>
+    <dgm:cxn modelId="{D0F22157-CCCE-4DE6-B994-43E719353312}" type="presOf" srcId="{E3C11628-F4C1-4EC6-AC63-EA267AD5D872}" destId="{541E0CF7-0D25-440C-9EA4-93EA44836263}" srcOrd="0" destOrd="0" presId="urn:microsoft.com/office/officeart/2005/8/layout/hList1"/>
+    <dgm:cxn modelId="{6B11E159-707B-4C59-B50C-FEFC6A0130BF}" srcId="{D52C3816-998C-4942-B78E-6571939A0D19}" destId="{00009F88-EFA3-42AF-93E7-DFFBE4710F1A}" srcOrd="0" destOrd="0" parTransId="{BD550950-1511-416D-9A83-53C3B7F0A733}" sibTransId="{8DC00D68-4183-41B9-AF06-D06F964338BD}"/>
+    <dgm:cxn modelId="{43FA937C-6AC1-4CC6-9228-234A6C24071C}" type="presOf" srcId="{D52C3816-998C-4942-B78E-6571939A0D19}" destId="{FD5F8A26-2885-4208-8869-AFA30330F5C9}" srcOrd="0" destOrd="0" presId="urn:microsoft.com/office/officeart/2005/8/layout/hList1"/>
+    <dgm:cxn modelId="{A27AB37F-85F2-451F-9A18-8B4B5EE9FC11}" type="presOf" srcId="{2D59ABA4-302E-401C-AD94-BB954A21E944}" destId="{0D6F43BB-F56C-40DE-AF52-CD5CBB746C50}" srcOrd="0" destOrd="7" presId="urn:microsoft.com/office/officeart/2005/8/layout/hList1"/>
+    <dgm:cxn modelId="{53846E86-7B59-45FD-9287-1ECE86D253A1}" type="presOf" srcId="{9EC32CAC-81F1-4D48-B76D-AF82D82E258E}" destId="{0D6F43BB-F56C-40DE-AF52-CD5CBB746C50}" srcOrd="0" destOrd="2" presId="urn:microsoft.com/office/officeart/2005/8/layout/hList1"/>
+    <dgm:cxn modelId="{4905528A-368F-4DEB-9843-E65CEBCCB8C4}" srcId="{E3C11628-F4C1-4EC6-AC63-EA267AD5D872}" destId="{84051B12-E9C8-4150-A4B6-BBA680C59EC2}" srcOrd="4" destOrd="0" parTransId="{D0AA9C23-1572-40DA-9ECF-C6A59FEA1D6E}" sibTransId="{377BB273-B0EC-4DA3-8467-357753534CAA}"/>
+    <dgm:cxn modelId="{23AD4498-2104-4BA6-9CD6-40B9BFAD1561}" srcId="{E3C11628-F4C1-4EC6-AC63-EA267AD5D872}" destId="{638CA45C-4F67-478E-9B59-3142693D1DF7}" srcOrd="0" destOrd="0" parTransId="{63CCC5CC-72BE-49CF-8B9B-092D064B4A5D}" sibTransId="{76BA039C-C069-4EB7-8B26-F2414193ADD1}"/>
+    <dgm:cxn modelId="{FF60569D-BC94-4345-8CF3-11A08E810FF1}" srcId="{B163C2E0-D5BD-4AD8-AF89-238DF53E1F13}" destId="{7B3F1C71-0B4E-4D99-8EFC-B8E25B74ACA8}" srcOrd="1" destOrd="0" parTransId="{DD6CE754-9EE1-4F9F-AB8A-46C2F326C47D}" sibTransId="{DCBC2059-6018-4AB5-B4D5-1FA0A3F10AE0}"/>
+    <dgm:cxn modelId="{2DA3F1A0-4FA9-4F0A-9C4B-FADAC1FEB00A}" srcId="{5E5BEC36-40A0-4CC8-9199-16D04CF2C010}" destId="{A0122DD0-7C3A-4041-918D-F75B2E3AC36C}" srcOrd="0" destOrd="0" parTransId="{E98EC1B1-3D03-4DB3-898B-6C0F998DE854}" sibTransId="{08222769-7EBA-4CAD-8F6A-618871F452B9}"/>
     <dgm:cxn modelId="{F4D2EDA1-5B2E-4742-A8E0-DD5E7515440A}" srcId="{B163C2E0-D5BD-4AD8-AF89-238DF53E1F13}" destId="{D52C3816-998C-4942-B78E-6571939A0D19}" srcOrd="2" destOrd="0" parTransId="{1884D2D0-1EB5-491B-BE48-F94671299505}" sibTransId="{1B7EAACE-944B-4C84-A305-79F12C6B4C29}"/>
-    <dgm:cxn modelId="{43FA937C-6AC1-4CC6-9228-234A6C24071C}" type="presOf" srcId="{D52C3816-998C-4942-B78E-6571939A0D19}" destId="{FD5F8A26-2885-4208-8869-AFA30330F5C9}" srcOrd="0" destOrd="0" presId="urn:microsoft.com/office/officeart/2005/8/layout/hList1"/>
-    <dgm:cxn modelId="{5489FC07-FADA-402D-AECC-0D613D8DCCAC}" type="presOf" srcId="{09CA1AE8-5F8E-46A4-8A57-58BFB7F18BB1}" destId="{C50CC88D-8061-4AC9-893B-FBDC7A83EE6C}" srcOrd="0" destOrd="2" presId="urn:microsoft.com/office/officeart/2005/8/layout/hList1"/>
-    <dgm:cxn modelId="{100F1A33-4FE0-48A6-8A0B-4779C7390102}" srcId="{D52C3816-998C-4942-B78E-6571939A0D19}" destId="{D30C94AC-258B-4140-85B5-FC326065C8DF}" srcOrd="1" destOrd="0" parTransId="{C272B7AF-E7DA-47AC-A2EA-384EDD4FC081}" sibTransId="{5D432214-64FA-4482-ACA5-EB60C38AC668}"/>
-    <dgm:cxn modelId="{25418531-F289-4CAD-B502-BD50F77D3A43}" type="presOf" srcId="{578EF7DC-70EE-4FD4-BAE7-F13274D212DE}" destId="{040C5DF5-5C5C-4086-9F94-337A50E0D986}" srcOrd="0" destOrd="2" presId="urn:microsoft.com/office/officeart/2005/8/layout/hList1"/>
-    <dgm:cxn modelId="{23AD4498-2104-4BA6-9CD6-40B9BFAD1561}" srcId="{E3C11628-F4C1-4EC6-AC63-EA267AD5D872}" destId="{638CA45C-4F67-478E-9B59-3142693D1DF7}" srcOrd="0" destOrd="0" parTransId="{63CCC5CC-72BE-49CF-8B9B-092D064B4A5D}" sibTransId="{76BA039C-C069-4EB7-8B26-F2414193ADD1}"/>
+    <dgm:cxn modelId="{31E914A7-3994-4BAB-9D24-9683D0028539}" type="presOf" srcId="{1BF21FCE-73B6-41A9-9FF2-3D4E758781CB}" destId="{0D6F43BB-F56C-40DE-AF52-CD5CBB746C50}" srcOrd="0" destOrd="6" presId="urn:microsoft.com/office/officeart/2005/8/layout/hList1"/>
+    <dgm:cxn modelId="{A116ACA7-66D1-4C1D-A1E7-41705E8C7769}" srcId="{5E5BEC36-40A0-4CC8-9199-16D04CF2C010}" destId="{0A1BA8F5-9ED7-4C87-AC18-BBFDC77BA591}" srcOrd="1" destOrd="0" parTransId="{F5C653C6-B97F-47B0-9326-71BFF397C5E8}" sibTransId="{D7AD0E16-E513-4D98-9388-09DE3FC41220}"/>
+    <dgm:cxn modelId="{6D10C5A8-4F0D-4A8C-95A5-FEE909C0E106}" srcId="{7B3F1C71-0B4E-4D99-8EFC-B8E25B74ACA8}" destId="{09CA1AE8-5F8E-46A4-8A57-58BFB7F18BB1}" srcOrd="2" destOrd="0" parTransId="{93633064-13F2-4259-A69E-A372DF2607D5}" sibTransId="{34F6BD5A-E881-4821-BD27-0521E290409B}"/>
+    <dgm:cxn modelId="{7E295CAE-4E23-419A-B43A-39DB4F7E13F5}" srcId="{D52C3816-998C-4942-B78E-6571939A0D19}" destId="{578EF7DC-70EE-4FD4-BAE7-F13274D212DE}" srcOrd="2" destOrd="0" parTransId="{C2025A33-B892-4DFC-AAE6-EFB3F4A13A6C}" sibTransId="{C46FA71B-054F-4E98-B0AD-BCC0F71FD5F7}"/>
+    <dgm:cxn modelId="{F01566BD-2B1B-4A38-B11A-2BE4D1968907}" srcId="{B163C2E0-D5BD-4AD8-AF89-238DF53E1F13}" destId="{5E5BEC36-40A0-4CC8-9199-16D04CF2C010}" srcOrd="3" destOrd="0" parTransId="{5C3FF737-6A73-4DB7-9069-0F05B3184306}" sibTransId="{4633EC89-F012-4624-B0EB-1AB6368D8007}"/>
+    <dgm:cxn modelId="{2098FDC1-55DA-4549-BA8D-7DB69A24F3F6}" srcId="{E3C11628-F4C1-4EC6-AC63-EA267AD5D872}" destId="{9EC32CAC-81F1-4D48-B76D-AF82D82E258E}" srcOrd="2" destOrd="0" parTransId="{1E4BA933-175C-4EE9-8C91-942FF20A7415}" sibTransId="{F5FDA8E8-04B0-4B1F-B65E-386AB01B2B1E}"/>
+    <dgm:cxn modelId="{5D0541C3-4B85-47C9-BAF1-3B8B19E6EF5A}" type="presOf" srcId="{D30C94AC-258B-4140-85B5-FC326065C8DF}" destId="{040C5DF5-5C5C-4086-9F94-337A50E0D986}" srcOrd="0" destOrd="1" presId="urn:microsoft.com/office/officeart/2005/8/layout/hList1"/>
+    <dgm:cxn modelId="{10BCB2CD-A334-4E08-B362-4A02B37CCEE3}" type="presOf" srcId="{00009F88-EFA3-42AF-93E7-DFFBE4710F1A}" destId="{040C5DF5-5C5C-4086-9F94-337A50E0D986}" srcOrd="0" destOrd="0" presId="urn:microsoft.com/office/officeart/2005/8/layout/hList1"/>
+    <dgm:cxn modelId="{F85657D1-BF3B-45EA-AB02-395B1B61EF83}" type="presOf" srcId="{C73B6194-8CAC-4588-8D09-A7DFABFA09DB}" destId="{C50CC88D-8061-4AC9-893B-FBDC7A83EE6C}" srcOrd="0" destOrd="3" presId="urn:microsoft.com/office/officeart/2005/8/layout/hList1"/>
     <dgm:cxn modelId="{FE0FBEDB-28A0-41FB-B468-3B9CB43E9965}" srcId="{B163C2E0-D5BD-4AD8-AF89-238DF53E1F13}" destId="{E3C11628-F4C1-4EC6-AC63-EA267AD5D872}" srcOrd="0" destOrd="0" parTransId="{20FFEB3E-B955-4772-8C8F-5BE2DE180ED6}" sibTransId="{15E3BF45-5AA0-487B-A75A-B1D031045158}"/>
-    <dgm:cxn modelId="{BCBFF130-0419-4972-AFC5-857540E9D0CE}" srcId="{E3C11628-F4C1-4EC6-AC63-EA267AD5D872}" destId="{E301DBDC-8BC9-4B27-BA47-413E3BA1A080}" srcOrd="3" destOrd="0" parTransId="{86E21A97-6F4C-438C-BFC0-C48CCF812F75}" sibTransId="{A2039469-5180-4C8A-B690-F4DC9EF19DD6}"/>
+    <dgm:cxn modelId="{8C7E01E0-9953-4501-9453-EC70D10A6AAB}" srcId="{E3C11628-F4C1-4EC6-AC63-EA267AD5D872}" destId="{1BF21FCE-73B6-41A9-9FF2-3D4E758781CB}" srcOrd="6" destOrd="0" parTransId="{A0C98BEF-9347-45C0-9D57-A42DFD181FAB}" sibTransId="{ABB97915-067E-49C4-AE62-981729542855}"/>
+    <dgm:cxn modelId="{BF9143E3-5B74-4AF6-ABCC-E3ECED25E057}" srcId="{7B3F1C71-0B4E-4D99-8EFC-B8E25B74ACA8}" destId="{C73B6194-8CAC-4588-8D09-A7DFABFA09DB}" srcOrd="3" destOrd="0" parTransId="{2A62283E-F633-47B9-82E3-AEC684D84EB2}" sibTransId="{94DE03EE-8007-4CC3-962F-CC9CF55F1332}"/>
     <dgm:cxn modelId="{0ACCB6E9-126A-49F4-B16F-701B244A6213}" srcId="{E3C11628-F4C1-4EC6-AC63-EA267AD5D872}" destId="{8A7B161E-B43B-4B9B-8713-01040682186B}" srcOrd="5" destOrd="0" parTransId="{864FF9F8-9793-4A83-89E0-E07995106972}" sibTransId="{C8607AE4-28DB-4791-89A6-63666FF2E8FF}"/>
-    <dgm:cxn modelId="{5D0541C3-4B85-47C9-BAF1-3B8B19E6EF5A}" type="presOf" srcId="{D30C94AC-258B-4140-85B5-FC326065C8DF}" destId="{040C5DF5-5C5C-4086-9F94-337A50E0D986}" srcOrd="0" destOrd="1" presId="urn:microsoft.com/office/officeart/2005/8/layout/hList1"/>
-    <dgm:cxn modelId="{31E914A7-3994-4BAB-9D24-9683D0028539}" type="presOf" srcId="{1BF21FCE-73B6-41A9-9FF2-3D4E758781CB}" destId="{0D6F43BB-F56C-40DE-AF52-CD5CBB746C50}" srcOrd="0" destOrd="6" presId="urn:microsoft.com/office/officeart/2005/8/layout/hList1"/>
-    <dgm:cxn modelId="{D0F22157-CCCE-4DE6-B994-43E719353312}" type="presOf" srcId="{E3C11628-F4C1-4EC6-AC63-EA267AD5D872}" destId="{541E0CF7-0D25-440C-9EA4-93EA44836263}" srcOrd="0" destOrd="0" presId="urn:microsoft.com/office/officeart/2005/8/layout/hList1"/>
-    <dgm:cxn modelId="{9439C843-4491-42B8-9EFA-73C7DEEFE586}" srcId="{E3C11628-F4C1-4EC6-AC63-EA267AD5D872}" destId="{29A6A093-2AD7-4425-AF0F-15FBC4365F55}" srcOrd="8" destOrd="0" parTransId="{93F5A8DB-9631-4EC8-B7F4-09E042427977}" sibTransId="{B96E1CCC-0FFC-43F3-8115-F46033E11D04}"/>
-    <dgm:cxn modelId="{F01566BD-2B1B-4A38-B11A-2BE4D1968907}" srcId="{B163C2E0-D5BD-4AD8-AF89-238DF53E1F13}" destId="{5E5BEC36-40A0-4CC8-9199-16D04CF2C010}" srcOrd="3" destOrd="0" parTransId="{5C3FF737-6A73-4DB7-9069-0F05B3184306}" sibTransId="{4633EC89-F012-4624-B0EB-1AB6368D8007}"/>
-    <dgm:cxn modelId="{6D10C5A8-4F0D-4A8C-95A5-FEE909C0E106}" srcId="{7B3F1C71-0B4E-4D99-8EFC-B8E25B74ACA8}" destId="{09CA1AE8-5F8E-46A4-8A57-58BFB7F18BB1}" srcOrd="2" destOrd="0" parTransId="{93633064-13F2-4259-A69E-A372DF2607D5}" sibTransId="{34F6BD5A-E881-4821-BD27-0521E290409B}"/>
-    <dgm:cxn modelId="{4905528A-368F-4DEB-9843-E65CEBCCB8C4}" srcId="{E3C11628-F4C1-4EC6-AC63-EA267AD5D872}" destId="{84051B12-E9C8-4150-A4B6-BBA680C59EC2}" srcOrd="4" destOrd="0" parTransId="{D0AA9C23-1572-40DA-9ECF-C6A59FEA1D6E}" sibTransId="{377BB273-B0EC-4DA3-8467-357753534CAA}"/>
-    <dgm:cxn modelId="{8C7E01E0-9953-4501-9453-EC70D10A6AAB}" srcId="{E3C11628-F4C1-4EC6-AC63-EA267AD5D872}" destId="{1BF21FCE-73B6-41A9-9FF2-3D4E758781CB}" srcOrd="6" destOrd="0" parTransId="{A0C98BEF-9347-45C0-9D57-A42DFD181FAB}" sibTransId="{ABB97915-067E-49C4-AE62-981729542855}"/>
-    <dgm:cxn modelId="{08C33C61-2F61-436E-B180-904FB708B6DC}" srcId="{E3C11628-F4C1-4EC6-AC63-EA267AD5D872}" destId="{2D59ABA4-302E-401C-AD94-BB954A21E944}" srcOrd="7" destOrd="0" parTransId="{747672D6-3D37-4553-86AA-36B1FDA67DD1}" sibTransId="{76DB1F48-145B-4C2B-82E6-30FAE8A1C4EB}"/>
-    <dgm:cxn modelId="{2098FDC1-55DA-4549-BA8D-7DB69A24F3F6}" srcId="{E3C11628-F4C1-4EC6-AC63-EA267AD5D872}" destId="{9EC32CAC-81F1-4D48-B76D-AF82D82E258E}" srcOrd="2" destOrd="0" parTransId="{1E4BA933-175C-4EE9-8C91-942FF20A7415}" sibTransId="{F5FDA8E8-04B0-4B1F-B65E-386AB01B2B1E}"/>
-    <dgm:cxn modelId="{580EAD5C-EB41-4A86-819B-EE704BBEE994}" type="presOf" srcId="{A0122DD0-7C3A-4041-918D-F75B2E3AC36C}" destId="{BB8E3DB9-E366-4916-B7CC-0AE68235B5E6}" srcOrd="0" destOrd="0" presId="urn:microsoft.com/office/officeart/2005/8/layout/hList1"/>
-    <dgm:cxn modelId="{B4CC2F21-76E9-40AF-ADE4-1D87EA598494}" type="presOf" srcId="{638CA45C-4F67-478E-9B59-3142693D1DF7}" destId="{0D6F43BB-F56C-40DE-AF52-CD5CBB746C50}" srcOrd="0" destOrd="0" presId="urn:microsoft.com/office/officeart/2005/8/layout/hList1"/>
+    <dgm:cxn modelId="{4C9FBFF0-9212-40A0-A574-BBDB95DBE5D8}" srcId="{7B3F1C71-0B4E-4D99-8EFC-B8E25B74ACA8}" destId="{72068F2C-854E-493B-9163-D8BEC9328C4C}" srcOrd="0" destOrd="0" parTransId="{3777CB73-A3DB-44E5-B290-1859F313C991}" sibTransId="{38AF3D03-9ED7-4A6D-8896-62FA0C41FD54}"/>
     <dgm:cxn modelId="{209184F1-2813-4043-A8D2-5FE2FB7932E6}" type="presOf" srcId="{5E5BEC36-40A0-4CC8-9199-16D04CF2C010}" destId="{F8715E8B-9339-44CD-911E-03B28016FEFC}" srcOrd="0" destOrd="0" presId="urn:microsoft.com/office/officeart/2005/8/layout/hList1"/>
-    <dgm:cxn modelId="{D3A7113F-F880-4E71-A8C5-6DA69511D437}" type="presOf" srcId="{B163C2E0-D5BD-4AD8-AF89-238DF53E1F13}" destId="{84649337-5604-44D5-A5F1-1B18E5B31CC7}" srcOrd="0" destOrd="0" presId="urn:microsoft.com/office/officeart/2005/8/layout/hList1"/>
-    <dgm:cxn modelId="{6B11E159-707B-4C59-B50C-FEFC6A0130BF}" srcId="{D52C3816-998C-4942-B78E-6571939A0D19}" destId="{00009F88-EFA3-42AF-93E7-DFFBE4710F1A}" srcOrd="0" destOrd="0" parTransId="{BD550950-1511-416D-9A83-53C3B7F0A733}" sibTransId="{8DC00D68-4183-41B9-AF06-D06F964338BD}"/>
-    <dgm:cxn modelId="{ABEF902E-D87D-4ABB-815F-55EC4F841E52}" type="presOf" srcId="{83B07D4B-E513-4341-B699-6648E32E66AB}" destId="{0D6F43BB-F56C-40DE-AF52-CD5CBB746C50}" srcOrd="0" destOrd="1" presId="urn:microsoft.com/office/officeart/2005/8/layout/hList1"/>
-    <dgm:cxn modelId="{9082063F-84EF-4096-8C2A-146F924C9B6E}" type="presOf" srcId="{72068F2C-854E-493B-9163-D8BEC9328C4C}" destId="{C50CC88D-8061-4AC9-893B-FBDC7A83EE6C}" srcOrd="0" destOrd="0" presId="urn:microsoft.com/office/officeart/2005/8/layout/hList1"/>
-    <dgm:cxn modelId="{FF60569D-BC94-4345-8CF3-11A08E810FF1}" srcId="{B163C2E0-D5BD-4AD8-AF89-238DF53E1F13}" destId="{7B3F1C71-0B4E-4D99-8EFC-B8E25B74ACA8}" srcOrd="1" destOrd="0" parTransId="{DD6CE754-9EE1-4F9F-AB8A-46C2F326C47D}" sibTransId="{DCBC2059-6018-4AB5-B4D5-1FA0A3F10AE0}"/>
-    <dgm:cxn modelId="{E569EE02-6739-4673-93FD-2C489CF45DD1}" type="presOf" srcId="{84051B12-E9C8-4150-A4B6-BBA680C59EC2}" destId="{0D6F43BB-F56C-40DE-AF52-CD5CBB746C50}" srcOrd="0" destOrd="4" presId="urn:microsoft.com/office/officeart/2005/8/layout/hList1"/>
-    <dgm:cxn modelId="{492A876B-1280-42FF-9B17-CB5A996E5102}" type="presOf" srcId="{7AAB3A44-FDE0-42F5-A96C-02A6980FDFB8}" destId="{C50CC88D-8061-4AC9-893B-FBDC7A83EE6C}" srcOrd="0" destOrd="1" presId="urn:microsoft.com/office/officeart/2005/8/layout/hList1"/>
     <dgm:cxn modelId="{8286C0FB-EDDA-4CE4-9452-19415186831E}" type="presOf" srcId="{7B3F1C71-0B4E-4D99-8EFC-B8E25B74ACA8}" destId="{6DC4A548-0B25-4566-BF48-5C73C9C447B5}" srcOrd="0" destOrd="0" presId="urn:microsoft.com/office/officeart/2005/8/layout/hList1"/>
-    <dgm:cxn modelId="{A27AB37F-85F2-451F-9A18-8B4B5EE9FC11}" type="presOf" srcId="{2D59ABA4-302E-401C-AD94-BB954A21E944}" destId="{0D6F43BB-F56C-40DE-AF52-CD5CBB746C50}" srcOrd="0" destOrd="7" presId="urn:microsoft.com/office/officeart/2005/8/layout/hList1"/>
-    <dgm:cxn modelId="{10BCB2CD-A334-4E08-B362-4A02B37CCEE3}" type="presOf" srcId="{00009F88-EFA3-42AF-93E7-DFFBE4710F1A}" destId="{040C5DF5-5C5C-4086-9F94-337A50E0D986}" srcOrd="0" destOrd="0" presId="urn:microsoft.com/office/officeart/2005/8/layout/hList1"/>
-    <dgm:cxn modelId="{4EF62862-B6D4-4A8B-ACEA-69B46AC5CEC1}" srcId="{E3C11628-F4C1-4EC6-AC63-EA267AD5D872}" destId="{83B07D4B-E513-4341-B699-6648E32E66AB}" srcOrd="1" destOrd="0" parTransId="{9B1B1340-E6A8-442B-882F-08A7AA5F23E0}" sibTransId="{649317F3-2E7A-4FCE-8B54-F1ADF3679E9F}"/>
-    <dgm:cxn modelId="{7FD4A935-5973-40A0-B6C1-05791A7D164C}" type="presOf" srcId="{8A7B161E-B43B-4B9B-8713-01040682186B}" destId="{0D6F43BB-F56C-40DE-AF52-CD5CBB746C50}" srcOrd="0" destOrd="5" presId="urn:microsoft.com/office/officeart/2005/8/layout/hList1"/>
-    <dgm:cxn modelId="{7E295CAE-4E23-419A-B43A-39DB4F7E13F5}" srcId="{D52C3816-998C-4942-B78E-6571939A0D19}" destId="{578EF7DC-70EE-4FD4-BAE7-F13274D212DE}" srcOrd="2" destOrd="0" parTransId="{C2025A33-B892-4DFC-AAE6-EFB3F4A13A6C}" sibTransId="{C46FA71B-054F-4E98-B0AD-BCC0F71FD5F7}"/>
-    <dgm:cxn modelId="{A2771536-7873-435F-9C72-8CB96F1929F9}" srcId="{7B3F1C71-0B4E-4D99-8EFC-B8E25B74ACA8}" destId="{7AAB3A44-FDE0-42F5-A96C-02A6980FDFB8}" srcOrd="1" destOrd="0" parTransId="{49696D7B-7512-41F4-AE74-919598ED4232}" sibTransId="{33A33CE6-627C-4D1A-9DC7-83C97910E409}"/>
-    <dgm:cxn modelId="{2DA3F1A0-4FA9-4F0A-9C4B-FADAC1FEB00A}" srcId="{5E5BEC36-40A0-4CC8-9199-16D04CF2C010}" destId="{A0122DD0-7C3A-4041-918D-F75B2E3AC36C}" srcOrd="0" destOrd="0" parTransId="{E98EC1B1-3D03-4DB3-898B-6C0F998DE854}" sibTransId="{08222769-7EBA-4CAD-8F6A-618871F452B9}"/>
-    <dgm:cxn modelId="{4C9FBFF0-9212-40A0-A574-BBDB95DBE5D8}" srcId="{7B3F1C71-0B4E-4D99-8EFC-B8E25B74ACA8}" destId="{72068F2C-854E-493B-9163-D8BEC9328C4C}" srcOrd="0" destOrd="0" parTransId="{3777CB73-A3DB-44E5-B290-1859F313C991}" sibTransId="{38AF3D03-9ED7-4A6D-8896-62FA0C41FD54}"/>
-    <dgm:cxn modelId="{F85657D1-BF3B-45EA-AB02-395B1B61EF83}" type="presOf" srcId="{C73B6194-8CAC-4588-8D09-A7DFABFA09DB}" destId="{C50CC88D-8061-4AC9-893B-FBDC7A83EE6C}" srcOrd="0" destOrd="3" presId="urn:microsoft.com/office/officeart/2005/8/layout/hList1"/>
-    <dgm:cxn modelId="{9EA9356E-74F2-4EDF-AA8E-9BDF1150F057}" type="presOf" srcId="{E301DBDC-8BC9-4B27-BA47-413E3BA1A080}" destId="{0D6F43BB-F56C-40DE-AF52-CD5CBB746C50}" srcOrd="0" destOrd="3" presId="urn:microsoft.com/office/officeart/2005/8/layout/hList1"/>
-    <dgm:cxn modelId="{53846E86-7B59-45FD-9287-1ECE86D253A1}" type="presOf" srcId="{9EC32CAC-81F1-4D48-B76D-AF82D82E258E}" destId="{0D6F43BB-F56C-40DE-AF52-CD5CBB746C50}" srcOrd="0" destOrd="2" presId="urn:microsoft.com/office/officeart/2005/8/layout/hList1"/>
-    <dgm:cxn modelId="{501EFF3B-1102-4DB4-BA2E-EF4C5F5527E6}" type="presOf" srcId="{29A6A093-2AD7-4425-AF0F-15FBC4365F55}" destId="{0D6F43BB-F56C-40DE-AF52-CD5CBB746C50}" srcOrd="0" destOrd="8" presId="urn:microsoft.com/office/officeart/2005/8/layout/hList1"/>
-    <dgm:cxn modelId="{810EA310-F97A-4C69-95BC-F6D270A9DD06}" type="presOf" srcId="{0A1BA8F5-9ED7-4C87-AC18-BBFDC77BA591}" destId="{BB8E3DB9-E366-4916-B7CC-0AE68235B5E6}" srcOrd="0" destOrd="1" presId="urn:microsoft.com/office/officeart/2005/8/layout/hList1"/>
-    <dgm:cxn modelId="{BF9143E3-5B74-4AF6-ABCC-E3ECED25E057}" srcId="{7B3F1C71-0B4E-4D99-8EFC-B8E25B74ACA8}" destId="{C73B6194-8CAC-4588-8D09-A7DFABFA09DB}" srcOrd="3" destOrd="0" parTransId="{2A62283E-F633-47B9-82E3-AEC684D84EB2}" sibTransId="{94DE03EE-8007-4CC3-962F-CC9CF55F1332}"/>
-    <dgm:cxn modelId="{A116ACA7-66D1-4C1D-A1E7-41705E8C7769}" srcId="{5E5BEC36-40A0-4CC8-9199-16D04CF2C010}" destId="{0A1BA8F5-9ED7-4C87-AC18-BBFDC77BA591}" srcOrd="1" destOrd="0" parTransId="{F5C653C6-B97F-47B0-9326-71BFF397C5E8}" sibTransId="{D7AD0E16-E513-4D98-9388-09DE3FC41220}"/>
     <dgm:cxn modelId="{BF64BF18-B073-4FEA-B6F5-B57AD3B59A27}" type="presParOf" srcId="{84649337-5604-44D5-A5F1-1B18E5B31CC7}" destId="{4DD350FF-B5BB-4120-94BA-1A9FC6B9A109}" srcOrd="0" destOrd="0" presId="urn:microsoft.com/office/officeart/2005/8/layout/hList1"/>
     <dgm:cxn modelId="{CA31E782-DFAB-4A79-B09B-D928DA3EF03B}" type="presParOf" srcId="{4DD350FF-B5BB-4120-94BA-1A9FC6B9A109}" destId="{541E0CF7-0D25-440C-9EA4-93EA44836263}" srcOrd="0" destOrd="0" presId="urn:microsoft.com/office/officeart/2005/8/layout/hList1"/>
     <dgm:cxn modelId="{F5345E81-7DB7-4E18-A452-4FB5655C2246}" type="presParOf" srcId="{4DD350FF-B5BB-4120-94BA-1A9FC6B9A109}" destId="{0D6F43BB-F56C-40DE-AF52-CD5CBB746C50}" srcOrd="1" destOrd="0" presId="urn:microsoft.com/office/officeart/2005/8/layout/hList1"/>
@@ -5206,10 +5129,9 @@
         <a:lstStyle/>
         <a:p>
           <a:r>
-            <a:rPr lang="es-ES" dirty="0" smtClean="0"/>
+            <a:rPr lang="es-ES"/>
             <a:t>PASIVO NO CORRIENTE</a:t>
           </a:r>
-          <a:endParaRPr lang="es-ES" dirty="0"/>
         </a:p>
       </dgm:t>
     </dgm:pt>
@@ -5243,10 +5165,9 @@
         <a:lstStyle/>
         <a:p>
           <a:r>
-            <a:rPr lang="es-ES" dirty="0" smtClean="0"/>
+            <a:rPr lang="es-ES"/>
             <a:t>Préstamo a largo plazo </a:t>
           </a:r>
-          <a:endParaRPr lang="es-ES" dirty="0"/>
         </a:p>
       </dgm:t>
     </dgm:pt>
@@ -5280,10 +5201,9 @@
         <a:lstStyle/>
         <a:p>
           <a:r>
-            <a:rPr lang="es-ES" dirty="0" smtClean="0"/>
+            <a:rPr lang="es-ES"/>
             <a:t>PASIVO CORRIENTE</a:t>
           </a:r>
-          <a:endParaRPr lang="es-ES" dirty="0"/>
         </a:p>
       </dgm:t>
     </dgm:pt>
@@ -5317,18 +5237,9 @@
         <a:lstStyle/>
         <a:p>
           <a:r>
-            <a:rPr lang="es-ES" dirty="0" smtClean="0"/>
-            <a:t>Préstamos y </a:t>
+            <a:rPr lang="es-ES"/>
+            <a:t>Préstamos y créditos bancarios a corto plazo</a:t>
           </a:r>
-          <a:r>
-            <a:rPr lang="es-ES" smtClean="0"/>
-            <a:t>créditos bancarios </a:t>
-          </a:r>
-          <a:r>
-            <a:rPr lang="es-ES" dirty="0" smtClean="0"/>
-            <a:t>a corto plazo</a:t>
-          </a:r>
-          <a:endParaRPr lang="es-ES" dirty="0"/>
         </a:p>
       </dgm:t>
     </dgm:pt>
@@ -5362,10 +5273,9 @@
         <a:lstStyle/>
         <a:p>
           <a:r>
-            <a:rPr lang="es-ES" dirty="0" smtClean="0"/>
+            <a:rPr lang="es-ES"/>
             <a:t>Deudas con Hacienda: IVA repercutido</a:t>
           </a:r>
-          <a:endParaRPr lang="es-ES" dirty="0"/>
         </a:p>
       </dgm:t>
     </dgm:pt>
@@ -5399,10 +5309,9 @@
         <a:lstStyle/>
         <a:p>
           <a:r>
-            <a:rPr lang="es-ES" dirty="0" smtClean="0"/>
+            <a:rPr lang="es-ES"/>
             <a:t>PATRIMONIO NETO</a:t>
           </a:r>
-          <a:endParaRPr lang="es-ES" dirty="0"/>
         </a:p>
       </dgm:t>
     </dgm:pt>
@@ -5436,10 +5345,9 @@
         <a:lstStyle/>
         <a:p>
           <a:r>
-            <a:rPr lang="es-ES" dirty="0" smtClean="0"/>
+            <a:rPr lang="es-ES"/>
             <a:t>Capital</a:t>
           </a:r>
-          <a:endParaRPr lang="es-ES" dirty="0"/>
         </a:p>
       </dgm:t>
     </dgm:pt>
@@ -5473,10 +5381,9 @@
         <a:lstStyle/>
         <a:p>
           <a:r>
-            <a:rPr lang="es-ES" dirty="0" smtClean="0"/>
+            <a:rPr lang="es-ES"/>
             <a:t>Resultados del ejercicio</a:t>
           </a:r>
-          <a:endParaRPr lang="es-ES" dirty="0"/>
         </a:p>
       </dgm:t>
     </dgm:pt>
@@ -5510,10 +5417,9 @@
         <a:lstStyle/>
         <a:p>
           <a:r>
-            <a:rPr lang="es-ES" dirty="0" smtClean="0"/>
+            <a:rPr lang="es-ES"/>
             <a:t>Proveedores</a:t>
           </a:r>
-          <a:endParaRPr lang="es-ES" dirty="0"/>
         </a:p>
       </dgm:t>
     </dgm:pt>
@@ -5533,10 +5439,9 @@
         <a:lstStyle/>
         <a:p>
           <a:r>
-            <a:rPr lang="es-ES" dirty="0" smtClean="0"/>
+            <a:rPr lang="es-ES"/>
             <a:t>Acreedores: deudas con otras empresas ( ej. luz) </a:t>
           </a:r>
-          <a:endParaRPr lang="es-ES" dirty="0"/>
         </a:p>
       </dgm:t>
     </dgm:pt>
@@ -5556,10 +5461,9 @@
         <a:lstStyle/>
         <a:p>
           <a:r>
-            <a:rPr lang="es-ES" dirty="0" smtClean="0"/>
+            <a:rPr lang="es-ES"/>
             <a:t>Deudas con la Seguridad Social</a:t>
           </a:r>
-          <a:endParaRPr lang="es-ES" dirty="0"/>
         </a:p>
       </dgm:t>
     </dgm:pt>
@@ -5579,10 +5483,9 @@
         <a:lstStyle/>
         <a:p>
           <a:r>
-            <a:rPr lang="es-ES" dirty="0" smtClean="0"/>
+            <a:rPr lang="es-ES"/>
             <a:t>Reservas</a:t>
           </a:r>
-          <a:endParaRPr lang="es-ES" dirty="0"/>
         </a:p>
       </dgm:t>
     </dgm:pt>
@@ -5603,13 +5506,6 @@
         </dgm:presLayoutVars>
       </dgm:prSet>
       <dgm:spPr/>
-      <dgm:t>
-        <a:bodyPr/>
-        <a:lstStyle/>
-        <a:p>
-          <a:endParaRPr lang="es-ES"/>
-        </a:p>
-      </dgm:t>
     </dgm:pt>
     <dgm:pt modelId="{52D84AE8-36FB-4AEE-B274-CC2DA61CAFE8}" type="pres">
       <dgm:prSet presAssocID="{513DAF51-5FF1-4AB6-ABCE-77E2F2C0C450}" presName="composite" presStyleCnt="0"/>
@@ -5624,13 +5520,6 @@
         </dgm:presLayoutVars>
       </dgm:prSet>
       <dgm:spPr/>
-      <dgm:t>
-        <a:bodyPr/>
-        <a:lstStyle/>
-        <a:p>
-          <a:endParaRPr lang="es-ES"/>
-        </a:p>
-      </dgm:t>
     </dgm:pt>
     <dgm:pt modelId="{C46D2A45-45D0-4936-AD86-6E63A1DA7459}" type="pres">
       <dgm:prSet presAssocID="{513DAF51-5FF1-4AB6-ABCE-77E2F2C0C450}" presName="desTx" presStyleLbl="alignAccFollowNode1" presStyleIdx="0" presStyleCnt="3">
@@ -5639,13 +5528,6 @@
         </dgm:presLayoutVars>
       </dgm:prSet>
       <dgm:spPr/>
-      <dgm:t>
-        <a:bodyPr/>
-        <a:lstStyle/>
-        <a:p>
-          <a:endParaRPr lang="es-ES"/>
-        </a:p>
-      </dgm:t>
     </dgm:pt>
     <dgm:pt modelId="{B586B1FD-A154-47FD-9A90-47BFE26DB3D2}" type="pres">
       <dgm:prSet presAssocID="{050651B5-1101-4E85-8649-DCDEC89DE1E3}" presName="space" presStyleCnt="0"/>
@@ -5664,13 +5546,6 @@
         </dgm:presLayoutVars>
       </dgm:prSet>
       <dgm:spPr/>
-      <dgm:t>
-        <a:bodyPr/>
-        <a:lstStyle/>
-        <a:p>
-          <a:endParaRPr lang="es-ES"/>
-        </a:p>
-      </dgm:t>
     </dgm:pt>
     <dgm:pt modelId="{25FC9817-D46B-4E60-961F-47316A95EB9C}" type="pres">
       <dgm:prSet presAssocID="{CDF3F8B7-3E26-4611-8FDF-AE8B6F1AD51A}" presName="desTx" presStyleLbl="alignAccFollowNode1" presStyleIdx="1" presStyleCnt="3">
@@ -5679,13 +5554,6 @@
         </dgm:presLayoutVars>
       </dgm:prSet>
       <dgm:spPr/>
-      <dgm:t>
-        <a:bodyPr/>
-        <a:lstStyle/>
-        <a:p>
-          <a:endParaRPr lang="es-ES"/>
-        </a:p>
-      </dgm:t>
     </dgm:pt>
     <dgm:pt modelId="{A4D854B6-79ED-4E22-A843-029EE5049E42}" type="pres">
       <dgm:prSet presAssocID="{C8A9A264-EBD7-4A47-9504-E79C3FA78021}" presName="space" presStyleCnt="0"/>
@@ -5704,13 +5572,6 @@
         </dgm:presLayoutVars>
       </dgm:prSet>
       <dgm:spPr/>
-      <dgm:t>
-        <a:bodyPr/>
-        <a:lstStyle/>
-        <a:p>
-          <a:endParaRPr lang="es-ES"/>
-        </a:p>
-      </dgm:t>
     </dgm:pt>
     <dgm:pt modelId="{3AF536A8-2844-4013-83AF-BF132EC7C949}" type="pres">
       <dgm:prSet presAssocID="{73B8CAD2-B284-44ED-A146-CB0F96C7D579}" presName="desTx" presStyleLbl="alignAccFollowNode1" presStyleIdx="2" presStyleCnt="3">
@@ -5719,41 +5580,34 @@
         </dgm:presLayoutVars>
       </dgm:prSet>
       <dgm:spPr/>
-      <dgm:t>
-        <a:bodyPr/>
-        <a:lstStyle/>
-        <a:p>
-          <a:endParaRPr lang="es-ES"/>
-        </a:p>
-      </dgm:t>
     </dgm:pt>
   </dgm:ptLst>
   <dgm:cxnLst>
-    <dgm:cxn modelId="{85AED6C3-24D2-4192-8D17-6463DD259DD8}" type="presOf" srcId="{5C958C0B-39DD-42AB-8B42-26E432666B47}" destId="{25FC9817-D46B-4E60-961F-47316A95EB9C}" srcOrd="0" destOrd="4" presId="urn:microsoft.com/office/officeart/2005/8/layout/hList1"/>
+    <dgm:cxn modelId="{DF370103-8134-4C4E-A30E-F3C2FF8F2279}" type="presOf" srcId="{513DAF51-5FF1-4AB6-ABCE-77E2F2C0C450}" destId="{9488BF9B-9000-4AEA-857F-F4716B52649D}" srcOrd="0" destOrd="0" presId="urn:microsoft.com/office/officeart/2005/8/layout/hList1"/>
+    <dgm:cxn modelId="{016BE019-A841-4134-B3BB-FFB1DA5A8FE5}" type="presOf" srcId="{21D842BC-7258-4D45-A594-7BD123C2E991}" destId="{3AF536A8-2844-4013-83AF-BF132EC7C949}" srcOrd="0" destOrd="1" presId="urn:microsoft.com/office/officeart/2005/8/layout/hList1"/>
+    <dgm:cxn modelId="{6FED8E39-5355-4E40-A636-339CC5D6E0B9}" srcId="{CDF3F8B7-3E26-4611-8FDF-AE8B6F1AD51A}" destId="{B49B9A66-B9FD-4BAE-8D0E-493C870E9BC8}" srcOrd="0" destOrd="0" parTransId="{488A2721-DAE2-44E2-BFC7-C8A736FDF9D8}" sibTransId="{CF5B6C5B-E187-4539-8325-FE4061A5E62E}"/>
+    <dgm:cxn modelId="{A42D455D-4E4A-4C93-BB22-66C61812A47C}" srcId="{73B8CAD2-B284-44ED-A146-CB0F96C7D579}" destId="{B0D21CF9-C709-4646-ACFA-A3A520124282}" srcOrd="2" destOrd="0" parTransId="{E1C97D89-6BC2-4D91-B859-017E77D9B8C2}" sibTransId="{3003C8AB-B0A2-4128-8197-3889A5516E08}"/>
     <dgm:cxn modelId="{DBD74B62-1AC9-45C4-84FC-FB08C1D89004}" type="presOf" srcId="{73B8CAD2-B284-44ED-A146-CB0F96C7D579}" destId="{9095FD78-6E84-40B3-A106-7AA29EC8557E}" srcOrd="0" destOrd="0" presId="urn:microsoft.com/office/officeart/2005/8/layout/hList1"/>
-    <dgm:cxn modelId="{6FED8E39-5355-4E40-A636-339CC5D6E0B9}" srcId="{CDF3F8B7-3E26-4611-8FDF-AE8B6F1AD51A}" destId="{B49B9A66-B9FD-4BAE-8D0E-493C870E9BC8}" srcOrd="0" destOrd="0" parTransId="{488A2721-DAE2-44E2-BFC7-C8A736FDF9D8}" sibTransId="{CF5B6C5B-E187-4539-8325-FE4061A5E62E}"/>
+    <dgm:cxn modelId="{CB283744-3AE5-4E2E-AF63-202D1729684E}" type="presOf" srcId="{CDF3F8B7-3E26-4611-8FDF-AE8B6F1AD51A}" destId="{039F0A33-845C-4CEF-AB81-1058DE878A02}" srcOrd="0" destOrd="0" presId="urn:microsoft.com/office/officeart/2005/8/layout/hList1"/>
+    <dgm:cxn modelId="{151F146B-1308-4E11-9478-2AD54E5BB663}" srcId="{4B5685B2-8D89-45F8-88DE-CEEF9F6968FC}" destId="{73B8CAD2-B284-44ED-A146-CB0F96C7D579}" srcOrd="2" destOrd="0" parTransId="{0C675F30-630C-4D1C-8FB1-86B394481177}" sibTransId="{4BF1C7AE-C327-4FAD-8BA6-CAED11D56967}"/>
+    <dgm:cxn modelId="{F4659C4D-3BD4-4490-AACD-E1ECEBBB9ACC}" type="presOf" srcId="{45BE611D-5ED8-4EC6-BF65-DC2A9A61AFFE}" destId="{25FC9817-D46B-4E60-961F-47316A95EB9C}" srcOrd="0" destOrd="3" presId="urn:microsoft.com/office/officeart/2005/8/layout/hList1"/>
     <dgm:cxn modelId="{D0AAFA75-22E2-47EC-AA98-6B59A343C642}" type="presOf" srcId="{B0D21CF9-C709-4646-ACFA-A3A520124282}" destId="{3AF536A8-2844-4013-83AF-BF132EC7C949}" srcOrd="0" destOrd="2" presId="urn:microsoft.com/office/officeart/2005/8/layout/hList1"/>
-    <dgm:cxn modelId="{C224D9AF-12B7-461D-BABB-3F5813EF0156}" srcId="{4B5685B2-8D89-45F8-88DE-CEEF9F6968FC}" destId="{513DAF51-5FF1-4AB6-ABCE-77E2F2C0C450}" srcOrd="0" destOrd="0" parTransId="{57F7ABA1-6E9B-48A5-A6A2-5D3665A6F277}" sibTransId="{050651B5-1101-4E85-8649-DCDEC89DE1E3}"/>
+    <dgm:cxn modelId="{3F8A9B58-5EF8-47F4-80FD-7BB4F632BB62}" srcId="{4B5685B2-8D89-45F8-88DE-CEEF9F6968FC}" destId="{CDF3F8B7-3E26-4611-8FDF-AE8B6F1AD51A}" srcOrd="1" destOrd="0" parTransId="{4BDDA7FA-0272-4774-B37F-645499B689F1}" sibTransId="{C8A9A264-EBD7-4A47-9504-E79C3FA78021}"/>
     <dgm:cxn modelId="{69736B83-CEDF-4DB7-9BF4-40E46A885E95}" type="presOf" srcId="{1C785C87-4589-479A-8B2C-66AB27D3F35D}" destId="{C46D2A45-45D0-4936-AD86-6E63A1DA7459}" srcOrd="0" destOrd="0" presId="urn:microsoft.com/office/officeart/2005/8/layout/hList1"/>
     <dgm:cxn modelId="{77C29793-2880-47BE-9ECA-43765B74179E}" srcId="{CDF3F8B7-3E26-4611-8FDF-AE8B6F1AD51A}" destId="{45BE611D-5ED8-4EC6-BF65-DC2A9A61AFFE}" srcOrd="3" destOrd="0" parTransId="{2F998951-D422-467E-B4D5-F7D4100733E0}" sibTransId="{AA743206-D37D-4C8E-99AF-E0E44B18B6B1}"/>
-    <dgm:cxn modelId="{964513F5-EF6A-4154-9536-1FC1AAA125AC}" type="presOf" srcId="{B49B9A66-B9FD-4BAE-8D0E-493C870E9BC8}" destId="{25FC9817-D46B-4E60-961F-47316A95EB9C}" srcOrd="0" destOrd="0" presId="urn:microsoft.com/office/officeart/2005/8/layout/hList1"/>
+    <dgm:cxn modelId="{9E6B069A-39A6-422A-B604-DA5337B5A97E}" srcId="{73B8CAD2-B284-44ED-A146-CB0F96C7D579}" destId="{7B5926C6-0A76-4B27-950A-BCB3D7E0302E}" srcOrd="0" destOrd="0" parTransId="{9A13BCF4-FED9-4296-9C68-601F3A62E088}" sibTransId="{329490B6-B6FF-46BF-BCC8-D6E3F09DC636}"/>
     <dgm:cxn modelId="{41AD90AE-FBE6-4595-92CB-7EB75FA66EF7}" srcId="{CDF3F8B7-3E26-4611-8FDF-AE8B6F1AD51A}" destId="{7B6C4A98-32C6-4E05-BEE4-08B924650C7A}" srcOrd="1" destOrd="0" parTransId="{0D8375C3-0C9D-40CD-BC66-68E261560C8B}" sibTransId="{0967A991-E386-4AF8-85BC-7A68FEDD1F3E}"/>
+    <dgm:cxn modelId="{C224D9AF-12B7-461D-BABB-3F5813EF0156}" srcId="{4B5685B2-8D89-45F8-88DE-CEEF9F6968FC}" destId="{513DAF51-5FF1-4AB6-ABCE-77E2F2C0C450}" srcOrd="0" destOrd="0" parTransId="{57F7ABA1-6E9B-48A5-A6A2-5D3665A6F277}" sibTransId="{050651B5-1101-4E85-8649-DCDEC89DE1E3}"/>
     <dgm:cxn modelId="{734C09B1-0F11-4C80-9D66-CC0F97C8C51D}" srcId="{CDF3F8B7-3E26-4611-8FDF-AE8B6F1AD51A}" destId="{AB690EC8-541C-43FE-B84F-7013C32F31E1}" srcOrd="2" destOrd="0" parTransId="{8AC48085-D88D-4D9C-B9BC-B073B23AE2B4}" sibTransId="{406D3A0A-4752-48D8-A13A-3E636FC9542E}"/>
-    <dgm:cxn modelId="{706D64FC-D26C-42FB-89CC-CA2AAA85B4BA}" type="presOf" srcId="{4B5685B2-8D89-45F8-88DE-CEEF9F6968FC}" destId="{4864C259-933E-4466-8809-1BC5A6F45A1D}" srcOrd="0" destOrd="0" presId="urn:microsoft.com/office/officeart/2005/8/layout/hList1"/>
-    <dgm:cxn modelId="{F4659C4D-3BD4-4490-AACD-E1ECEBBB9ACC}" type="presOf" srcId="{45BE611D-5ED8-4EC6-BF65-DC2A9A61AFFE}" destId="{25FC9817-D46B-4E60-961F-47316A95EB9C}" srcOrd="0" destOrd="3" presId="urn:microsoft.com/office/officeart/2005/8/layout/hList1"/>
-    <dgm:cxn modelId="{151F146B-1308-4E11-9478-2AD54E5BB663}" srcId="{4B5685B2-8D89-45F8-88DE-CEEF9F6968FC}" destId="{73B8CAD2-B284-44ED-A146-CB0F96C7D579}" srcOrd="2" destOrd="0" parTransId="{0C675F30-630C-4D1C-8FB1-86B394481177}" sibTransId="{4BF1C7AE-C327-4FAD-8BA6-CAED11D56967}"/>
     <dgm:cxn modelId="{9B09E7BB-E2EB-4822-AE4A-9673609C65F8}" type="presOf" srcId="{AB690EC8-541C-43FE-B84F-7013C32F31E1}" destId="{25FC9817-D46B-4E60-961F-47316A95EB9C}" srcOrd="0" destOrd="2" presId="urn:microsoft.com/office/officeart/2005/8/layout/hList1"/>
-    <dgm:cxn modelId="{A42D455D-4E4A-4C93-BB22-66C61812A47C}" srcId="{73B8CAD2-B284-44ED-A146-CB0F96C7D579}" destId="{B0D21CF9-C709-4646-ACFA-A3A520124282}" srcOrd="2" destOrd="0" parTransId="{E1C97D89-6BC2-4D91-B859-017E77D9B8C2}" sibTransId="{3003C8AB-B0A2-4128-8197-3889A5516E08}"/>
-    <dgm:cxn modelId="{DF370103-8134-4C4E-A30E-F3C2FF8F2279}" type="presOf" srcId="{513DAF51-5FF1-4AB6-ABCE-77E2F2C0C450}" destId="{9488BF9B-9000-4AEA-857F-F4716B52649D}" srcOrd="0" destOrd="0" presId="urn:microsoft.com/office/officeart/2005/8/layout/hList1"/>
-    <dgm:cxn modelId="{179C97F0-4151-4286-9ACC-8749649CD63A}" srcId="{513DAF51-5FF1-4AB6-ABCE-77E2F2C0C450}" destId="{1C785C87-4589-479A-8B2C-66AB27D3F35D}" srcOrd="0" destOrd="0" parTransId="{6C25D835-C79E-4A3A-B796-12FFD3D3F66F}" sibTransId="{AE5B250F-6727-4C92-8F72-4137B1B5F3B7}"/>
+    <dgm:cxn modelId="{85AED6C3-24D2-4192-8D17-6463DD259DD8}" type="presOf" srcId="{5C958C0B-39DD-42AB-8B42-26E432666B47}" destId="{25FC9817-D46B-4E60-961F-47316A95EB9C}" srcOrd="0" destOrd="4" presId="urn:microsoft.com/office/officeart/2005/8/layout/hList1"/>
+    <dgm:cxn modelId="{6B2B74DF-551C-4590-BDED-263FE99ABD11}" srcId="{73B8CAD2-B284-44ED-A146-CB0F96C7D579}" destId="{21D842BC-7258-4D45-A594-7BD123C2E991}" srcOrd="1" destOrd="0" parTransId="{8BA90931-7A44-480A-B174-2D7EB685808B}" sibTransId="{0C566F21-16A5-4EDF-843B-0A24B5D97315}"/>
     <dgm:cxn modelId="{AB2A65E8-85EC-468A-89D4-179BE6E79CEE}" type="presOf" srcId="{7B5926C6-0A76-4B27-950A-BCB3D7E0302E}" destId="{3AF536A8-2844-4013-83AF-BF132EC7C949}" srcOrd="0" destOrd="0" presId="urn:microsoft.com/office/officeart/2005/8/layout/hList1"/>
     <dgm:cxn modelId="{9925BBEE-E316-47C4-B292-8DE0C6F7C25F}" srcId="{CDF3F8B7-3E26-4611-8FDF-AE8B6F1AD51A}" destId="{5C958C0B-39DD-42AB-8B42-26E432666B47}" srcOrd="4" destOrd="0" parTransId="{A5FFB389-4A78-44A6-AE15-54FC611E4E76}" sibTransId="{FD60E919-5AC0-4AA3-A097-5F18AB998F9B}"/>
-    <dgm:cxn modelId="{9E6B069A-39A6-422A-B604-DA5337B5A97E}" srcId="{73B8CAD2-B284-44ED-A146-CB0F96C7D579}" destId="{7B5926C6-0A76-4B27-950A-BCB3D7E0302E}" srcOrd="0" destOrd="0" parTransId="{9A13BCF4-FED9-4296-9C68-601F3A62E088}" sibTransId="{329490B6-B6FF-46BF-BCC8-D6E3F09DC636}"/>
-    <dgm:cxn modelId="{6B2B74DF-551C-4590-BDED-263FE99ABD11}" srcId="{73B8CAD2-B284-44ED-A146-CB0F96C7D579}" destId="{21D842BC-7258-4D45-A594-7BD123C2E991}" srcOrd="1" destOrd="0" parTransId="{8BA90931-7A44-480A-B174-2D7EB685808B}" sibTransId="{0C566F21-16A5-4EDF-843B-0A24B5D97315}"/>
+    <dgm:cxn modelId="{179C97F0-4151-4286-9ACC-8749649CD63A}" srcId="{513DAF51-5FF1-4AB6-ABCE-77E2F2C0C450}" destId="{1C785C87-4589-479A-8B2C-66AB27D3F35D}" srcOrd="0" destOrd="0" parTransId="{6C25D835-C79E-4A3A-B796-12FFD3D3F66F}" sibTransId="{AE5B250F-6727-4C92-8F72-4137B1B5F3B7}"/>
     <dgm:cxn modelId="{DC3DE0F0-B98E-45C1-95E8-0B77CA7A4602}" type="presOf" srcId="{7B6C4A98-32C6-4E05-BEE4-08B924650C7A}" destId="{25FC9817-D46B-4E60-961F-47316A95EB9C}" srcOrd="0" destOrd="1" presId="urn:microsoft.com/office/officeart/2005/8/layout/hList1"/>
-    <dgm:cxn modelId="{016BE019-A841-4134-B3BB-FFB1DA5A8FE5}" type="presOf" srcId="{21D842BC-7258-4D45-A594-7BD123C2E991}" destId="{3AF536A8-2844-4013-83AF-BF132EC7C949}" srcOrd="0" destOrd="1" presId="urn:microsoft.com/office/officeart/2005/8/layout/hList1"/>
-    <dgm:cxn modelId="{3F8A9B58-5EF8-47F4-80FD-7BB4F632BB62}" srcId="{4B5685B2-8D89-45F8-88DE-CEEF9F6968FC}" destId="{CDF3F8B7-3E26-4611-8FDF-AE8B6F1AD51A}" srcOrd="1" destOrd="0" parTransId="{4BDDA7FA-0272-4774-B37F-645499B689F1}" sibTransId="{C8A9A264-EBD7-4A47-9504-E79C3FA78021}"/>
-    <dgm:cxn modelId="{CB283744-3AE5-4E2E-AF63-202D1729684E}" type="presOf" srcId="{CDF3F8B7-3E26-4611-8FDF-AE8B6F1AD51A}" destId="{039F0A33-845C-4CEF-AB81-1058DE878A02}" srcOrd="0" destOrd="0" presId="urn:microsoft.com/office/officeart/2005/8/layout/hList1"/>
+    <dgm:cxn modelId="{964513F5-EF6A-4154-9536-1FC1AAA125AC}" type="presOf" srcId="{B49B9A66-B9FD-4BAE-8D0E-493C870E9BC8}" destId="{25FC9817-D46B-4E60-961F-47316A95EB9C}" srcOrd="0" destOrd="0" presId="urn:microsoft.com/office/officeart/2005/8/layout/hList1"/>
+    <dgm:cxn modelId="{706D64FC-D26C-42FB-89CC-CA2AAA85B4BA}" type="presOf" srcId="{4B5685B2-8D89-45F8-88DE-CEEF9F6968FC}" destId="{4864C259-933E-4466-8809-1BC5A6F45A1D}" srcOrd="0" destOrd="0" presId="urn:microsoft.com/office/officeart/2005/8/layout/hList1"/>
     <dgm:cxn modelId="{2B53E79F-D48E-4E3B-9875-86A500717A02}" type="presParOf" srcId="{4864C259-933E-4466-8809-1BC5A6F45A1D}" destId="{52D84AE8-36FB-4AEE-B274-CC2DA61CAFE8}" srcOrd="0" destOrd="0" presId="urn:microsoft.com/office/officeart/2005/8/layout/hList1"/>
     <dgm:cxn modelId="{8A5EDF57-92A9-4769-ABEF-C53549BDD180}" type="presParOf" srcId="{52D84AE8-36FB-4AEE-B274-CC2DA61CAFE8}" destId="{9488BF9B-9000-4AEA-857F-F4716B52649D}" srcOrd="0" destOrd="0" presId="urn:microsoft.com/office/officeart/2005/8/layout/hList1"/>
     <dgm:cxn modelId="{028C0B32-B6CD-442C-8A57-D38C021D7E41}" type="presParOf" srcId="{52D84AE8-36FB-4AEE-B274-CC2DA61CAFE8}" destId="{C46D2A45-45D0-4936-AD86-6E63A1DA7459}" srcOrd="1" destOrd="0" presId="urn:microsoft.com/office/officeart/2005/8/layout/hList1"/>
@@ -5798,10 +5652,9 @@
         <a:lstStyle/>
         <a:p>
           <a:r>
-            <a:rPr lang="es-ES" dirty="0" smtClean="0"/>
+            <a:rPr lang="es-ES"/>
             <a:t>ACTIVO</a:t>
           </a:r>
-          <a:endParaRPr lang="es-ES" dirty="0"/>
         </a:p>
       </dgm:t>
     </dgm:pt>
@@ -5835,10 +5688,9 @@
         <a:lstStyle/>
         <a:p>
           <a:r>
-            <a:rPr lang="es-ES" dirty="0" smtClean="0"/>
+            <a:rPr lang="es-ES"/>
             <a:t>ACTIVO NO CORRIENTE</a:t>
           </a:r>
-          <a:endParaRPr lang="es-ES" dirty="0"/>
         </a:p>
       </dgm:t>
     </dgm:pt>
@@ -5876,10 +5728,9 @@
         <a:lstStyle/>
         <a:p>
           <a:r>
-            <a:rPr lang="es-ES" dirty="0" smtClean="0"/>
+            <a:rPr lang="es-ES"/>
             <a:t>EXISTENCIAS</a:t>
           </a:r>
-          <a:endParaRPr lang="es-ES" dirty="0"/>
         </a:p>
       </dgm:t>
     </dgm:pt>
@@ -5913,10 +5764,9 @@
         <a:lstStyle/>
         <a:p>
           <a:r>
-            <a:rPr lang="es-ES" dirty="0" smtClean="0"/>
+            <a:rPr lang="es-ES"/>
             <a:t>PASIVO</a:t>
           </a:r>
-          <a:endParaRPr lang="es-ES" dirty="0"/>
         </a:p>
       </dgm:t>
     </dgm:pt>
@@ -5950,10 +5800,9 @@
         <a:lstStyle/>
         <a:p>
           <a:r>
-            <a:rPr lang="es-ES" dirty="0" smtClean="0"/>
+            <a:rPr lang="es-ES"/>
             <a:t>PATRIMONIO NETO </a:t>
           </a:r>
-          <a:endParaRPr lang="es-ES" dirty="0"/>
         </a:p>
       </dgm:t>
     </dgm:pt>
@@ -5987,10 +5836,9 @@
         <a:lstStyle/>
         <a:p>
           <a:r>
-            <a:rPr lang="es-ES" dirty="0" smtClean="0"/>
+            <a:rPr lang="es-ES"/>
             <a:t>PASIVO NO CORRIENTE</a:t>
           </a:r>
-          <a:endParaRPr lang="es-ES" dirty="0"/>
         </a:p>
       </dgm:t>
     </dgm:pt>
@@ -6028,10 +5876,9 @@
         <a:lstStyle/>
         <a:p>
           <a:r>
-            <a:rPr lang="es-ES" dirty="0" smtClean="0"/>
+            <a:rPr lang="es-ES"/>
             <a:t>PASIVO CORRIENTE</a:t>
           </a:r>
-          <a:endParaRPr lang="es-ES" dirty="0"/>
         </a:p>
       </dgm:t>
     </dgm:pt>
@@ -6069,10 +5916,9 @@
         <a:lstStyle/>
         <a:p>
           <a:r>
-            <a:rPr lang="es-ES" dirty="0" smtClean="0"/>
+            <a:rPr lang="es-ES"/>
             <a:t>REALIZABLE</a:t>
           </a:r>
-          <a:endParaRPr lang="es-ES" dirty="0"/>
         </a:p>
       </dgm:t>
     </dgm:pt>
@@ -6096,10 +5942,9 @@
         <a:lstStyle/>
         <a:p>
           <a:r>
-            <a:rPr lang="es-ES" dirty="0" smtClean="0"/>
+            <a:rPr lang="es-ES"/>
             <a:t>DISPONIBLE</a:t>
           </a:r>
-          <a:endParaRPr lang="es-ES" dirty="0"/>
         </a:p>
       </dgm:t>
     </dgm:pt>
@@ -6120,13 +5965,6 @@
         </dgm:presLayoutVars>
       </dgm:prSet>
       <dgm:spPr/>
-      <dgm:t>
-        <a:bodyPr/>
-        <a:lstStyle/>
-        <a:p>
-          <a:endParaRPr lang="es-ES"/>
-        </a:p>
-      </dgm:t>
     </dgm:pt>
     <dgm:pt modelId="{AD9366F9-31F2-4DDC-B8D3-A7E7AD84C2FC}" type="pres">
       <dgm:prSet presAssocID="{3C4D1535-F223-4940-8E7D-3C8BC5A39DFC}" presName="compNode" presStyleCnt="0"/>
@@ -6135,24 +5973,10 @@
     <dgm:pt modelId="{2B2E4D01-B7C3-4D70-B5D4-80D64E447E48}" type="pres">
       <dgm:prSet presAssocID="{3C4D1535-F223-4940-8E7D-3C8BC5A39DFC}" presName="aNode" presStyleLbl="bgShp" presStyleIdx="0" presStyleCnt="2"/>
       <dgm:spPr/>
-      <dgm:t>
-        <a:bodyPr/>
-        <a:lstStyle/>
-        <a:p>
-          <a:endParaRPr lang="es-ES"/>
-        </a:p>
-      </dgm:t>
     </dgm:pt>
     <dgm:pt modelId="{AFADF575-0B40-4548-A0F9-F54544E026DF}" type="pres">
       <dgm:prSet presAssocID="{3C4D1535-F223-4940-8E7D-3C8BC5A39DFC}" presName="textNode" presStyleLbl="bgShp" presStyleIdx="0" presStyleCnt="2"/>
       <dgm:spPr/>
-      <dgm:t>
-        <a:bodyPr/>
-        <a:lstStyle/>
-        <a:p>
-          <a:endParaRPr lang="es-ES"/>
-        </a:p>
-      </dgm:t>
     </dgm:pt>
     <dgm:pt modelId="{C1EEFD51-5A07-428E-ADCD-0978D6968FDA}" type="pres">
       <dgm:prSet presAssocID="{3C4D1535-F223-4940-8E7D-3C8BC5A39DFC}" presName="compChildNode" presStyleCnt="0"/>
@@ -6169,13 +5993,6 @@
         </dgm:presLayoutVars>
       </dgm:prSet>
       <dgm:spPr/>
-      <dgm:t>
-        <a:bodyPr/>
-        <a:lstStyle/>
-        <a:p>
-          <a:endParaRPr lang="es-ES"/>
-        </a:p>
-      </dgm:t>
     </dgm:pt>
     <dgm:pt modelId="{15C5BF20-0361-4BFD-8DEA-69791B3F7280}" type="pres">
       <dgm:prSet presAssocID="{A5BADB4E-EE61-495F-BD6C-BA0DFDAA8704}" presName="aSpace2" presStyleCnt="0"/>
@@ -6188,13 +6005,6 @@
         </dgm:presLayoutVars>
       </dgm:prSet>
       <dgm:spPr/>
-      <dgm:t>
-        <a:bodyPr/>
-        <a:lstStyle/>
-        <a:p>
-          <a:endParaRPr lang="es-ES"/>
-        </a:p>
-      </dgm:t>
     </dgm:pt>
     <dgm:pt modelId="{A8EBC013-08C7-4737-B981-F599A78EC3DF}" type="pres">
       <dgm:prSet presAssocID="{637287DC-DB1A-40BD-9DB8-96BBADB09433}" presName="aSpace2" presStyleCnt="0"/>
@@ -6207,13 +6017,6 @@
         </dgm:presLayoutVars>
       </dgm:prSet>
       <dgm:spPr/>
-      <dgm:t>
-        <a:bodyPr/>
-        <a:lstStyle/>
-        <a:p>
-          <a:endParaRPr lang="es-ES"/>
-        </a:p>
-      </dgm:t>
     </dgm:pt>
     <dgm:pt modelId="{AC253646-9CE8-481A-B6B9-C758E4CBCAE1}" type="pres">
       <dgm:prSet presAssocID="{E404A811-D609-4036-872B-E6D5B9DA8342}" presName="aSpace2" presStyleCnt="0"/>
@@ -6226,13 +6029,6 @@
         </dgm:presLayoutVars>
       </dgm:prSet>
       <dgm:spPr/>
-      <dgm:t>
-        <a:bodyPr/>
-        <a:lstStyle/>
-        <a:p>
-          <a:endParaRPr lang="es-ES"/>
-        </a:p>
-      </dgm:t>
     </dgm:pt>
     <dgm:pt modelId="{BB693C0D-0A4C-4C62-8763-21E47C2B8219}" type="pres">
       <dgm:prSet presAssocID="{3C4D1535-F223-4940-8E7D-3C8BC5A39DFC}" presName="aSpace" presStyleCnt="0"/>
@@ -6245,24 +6041,10 @@
     <dgm:pt modelId="{AD238C67-8E60-4943-A569-FB85BA11C2EA}" type="pres">
       <dgm:prSet presAssocID="{1E72DCD4-8160-446C-8F69-800D6CE4C135}" presName="aNode" presStyleLbl="bgShp" presStyleIdx="1" presStyleCnt="2"/>
       <dgm:spPr/>
-      <dgm:t>
-        <a:bodyPr/>
-        <a:lstStyle/>
-        <a:p>
-          <a:endParaRPr lang="es-ES"/>
-        </a:p>
-      </dgm:t>
     </dgm:pt>
     <dgm:pt modelId="{8F244147-1D88-4188-9509-60033E4B833C}" type="pres">
       <dgm:prSet presAssocID="{1E72DCD4-8160-446C-8F69-800D6CE4C135}" presName="textNode" presStyleLbl="bgShp" presStyleIdx="1" presStyleCnt="2"/>
       <dgm:spPr/>
-      <dgm:t>
-        <a:bodyPr/>
-        <a:lstStyle/>
-        <a:p>
-          <a:endParaRPr lang="es-ES"/>
-        </a:p>
-      </dgm:t>
     </dgm:pt>
     <dgm:pt modelId="{02855759-2627-4D0F-9CE4-C8278D31927E}" type="pres">
       <dgm:prSet presAssocID="{1E72DCD4-8160-446C-8F69-800D6CE4C135}" presName="compChildNode" presStyleCnt="0"/>
@@ -6279,13 +6061,6 @@
         </dgm:presLayoutVars>
       </dgm:prSet>
       <dgm:spPr/>
-      <dgm:t>
-        <a:bodyPr/>
-        <a:lstStyle/>
-        <a:p>
-          <a:endParaRPr lang="es-ES"/>
-        </a:p>
-      </dgm:t>
     </dgm:pt>
     <dgm:pt modelId="{C7A1E390-B5AE-4AAD-8BD9-C69A5C745F4F}" type="pres">
       <dgm:prSet presAssocID="{D52974CD-506C-4947-B839-5A1F5D19E716}" presName="aSpace2" presStyleCnt="0"/>
@@ -6298,13 +6073,6 @@
         </dgm:presLayoutVars>
       </dgm:prSet>
       <dgm:spPr/>
-      <dgm:t>
-        <a:bodyPr/>
-        <a:lstStyle/>
-        <a:p>
-          <a:endParaRPr lang="es-ES"/>
-        </a:p>
-      </dgm:t>
     </dgm:pt>
     <dgm:pt modelId="{D1CAC5C1-DA69-42E2-8ED2-B1EE9B3D943F}" type="pres">
       <dgm:prSet presAssocID="{18C29CAB-4457-41EA-B4C0-3EA16CAF0A67}" presName="aSpace2" presStyleCnt="0"/>
@@ -6317,37 +6085,30 @@
         </dgm:presLayoutVars>
       </dgm:prSet>
       <dgm:spPr/>
-      <dgm:t>
-        <a:bodyPr/>
-        <a:lstStyle/>
-        <a:p>
-          <a:endParaRPr lang="es-ES"/>
-        </a:p>
-      </dgm:t>
     </dgm:pt>
   </dgm:ptLst>
   <dgm:cxnLst>
+    <dgm:cxn modelId="{3190F60A-FB67-46D8-AD34-3C86C7A4F034}" srcId="{3C4D1535-F223-4940-8E7D-3C8BC5A39DFC}" destId="{E404A811-D609-4036-872B-E6D5B9DA8342}" srcOrd="2" destOrd="0" parTransId="{3F0F41B2-E10B-4B86-A046-9C80C2921CE4}" sibTransId="{4E16B419-94F1-4AA4-AEDF-CB377CF926FF}"/>
+    <dgm:cxn modelId="{5BECDA1A-D465-453B-A9AB-E1BCFD3DEE34}" type="presOf" srcId="{D52974CD-506C-4947-B839-5A1F5D19E716}" destId="{54B3B9C5-4110-47AC-882E-CB80BFA3CFCF}" srcOrd="0" destOrd="0" presId="urn:microsoft.com/office/officeart/2005/8/layout/lProcess2"/>
+    <dgm:cxn modelId="{FF319E34-37B3-4EDF-8C11-798929E6A3EB}" type="presOf" srcId="{E404A811-D609-4036-872B-E6D5B9DA8342}" destId="{CA64A64F-0014-4D5F-9AC3-6FE6E349EC1A}" srcOrd="0" destOrd="0" presId="urn:microsoft.com/office/officeart/2005/8/layout/lProcess2"/>
+    <dgm:cxn modelId="{11542B35-D487-46F5-B677-DCA46F28454D}" srcId="{E6F60356-E3A2-4386-BB9B-5E737AEC33D2}" destId="{1E72DCD4-8160-446C-8F69-800D6CE4C135}" srcOrd="1" destOrd="0" parTransId="{2667FDAD-FFA2-4000-96A2-46B48672A1F5}" sibTransId="{9DCDEC32-5C6E-46B4-9F2D-86A236A5224B}"/>
+    <dgm:cxn modelId="{4B226D40-0FFA-4891-972A-5491C32262BA}" srcId="{1E72DCD4-8160-446C-8F69-800D6CE4C135}" destId="{D52974CD-506C-4947-B839-5A1F5D19E716}" srcOrd="0" destOrd="0" parTransId="{7CC0F3E0-FEF3-4A41-A8F8-4E89A7D3A9EA}" sibTransId="{4B6CE639-E15E-4C40-9EEE-70C2B6DE662D}"/>
+    <dgm:cxn modelId="{BFF05662-90AE-48F0-811C-D03D9FCD73FB}" type="presOf" srcId="{637287DC-DB1A-40BD-9DB8-96BBADB09433}" destId="{F7059FB1-AC5B-4548-8DC7-056F30EFD30A}" srcOrd="0" destOrd="0" presId="urn:microsoft.com/office/officeart/2005/8/layout/lProcess2"/>
+    <dgm:cxn modelId="{5A4C016D-35DC-44F6-A5A3-3E11E7595935}" type="presOf" srcId="{3C4D1535-F223-4940-8E7D-3C8BC5A39DFC}" destId="{AFADF575-0B40-4548-A0F9-F54544E026DF}" srcOrd="1" destOrd="0" presId="urn:microsoft.com/office/officeart/2005/8/layout/lProcess2"/>
+    <dgm:cxn modelId="{C73FF04D-8DAD-4899-A54F-0567B798B31A}" type="presOf" srcId="{A5BADB4E-EE61-495F-BD6C-BA0DFDAA8704}" destId="{DEA305F7-C7E6-406D-9AB4-043CBCD5F473}" srcOrd="0" destOrd="0" presId="urn:microsoft.com/office/officeart/2005/8/layout/lProcess2"/>
+    <dgm:cxn modelId="{E3F08353-8DF2-4BD6-B875-B7BD0EE38526}" type="presOf" srcId="{1E72DCD4-8160-446C-8F69-800D6CE4C135}" destId="{8F244147-1D88-4188-9509-60033E4B833C}" srcOrd="1" destOrd="0" presId="urn:microsoft.com/office/officeart/2005/8/layout/lProcess2"/>
+    <dgm:cxn modelId="{AC33BA88-28D0-46F3-88BE-2EC85997D8D9}" type="presOf" srcId="{E6F60356-E3A2-4386-BB9B-5E737AEC33D2}" destId="{2BDC84B2-728D-442E-9D15-438AA7E605FD}" srcOrd="0" destOrd="0" presId="urn:microsoft.com/office/officeart/2005/8/layout/lProcess2"/>
+    <dgm:cxn modelId="{B857EA91-BC22-4B8B-8C88-9290FE3FF3DC}" srcId="{1E72DCD4-8160-446C-8F69-800D6CE4C135}" destId="{56C18DB4-9F26-411C-955E-01291B28DBB4}" srcOrd="2" destOrd="0" parTransId="{BA9340FF-0DF5-45CE-B111-B365A9086AD6}" sibTransId="{DABC9514-EA6B-4601-A7B1-F08B7C2E301D}"/>
+    <dgm:cxn modelId="{6D860B9B-4190-482E-83DC-B14931FA4B10}" type="presOf" srcId="{56C18DB4-9F26-411C-955E-01291B28DBB4}" destId="{6B5F06A8-D323-4B1A-8B28-100B192B6381}" srcOrd="0" destOrd="0" presId="urn:microsoft.com/office/officeart/2005/8/layout/lProcess2"/>
+    <dgm:cxn modelId="{843C679C-DC09-43AE-AF88-B77974C54B50}" srcId="{3C4D1535-F223-4940-8E7D-3C8BC5A39DFC}" destId="{A5BADB4E-EE61-495F-BD6C-BA0DFDAA8704}" srcOrd="0" destOrd="0" parTransId="{20456A00-7426-4A09-A33D-66116351348C}" sibTransId="{04B798F4-48A7-418A-BA05-B38172E08835}"/>
     <dgm:cxn modelId="{25A113B5-CCE8-4CD3-9060-9A3F1A405248}" type="presOf" srcId="{18C29CAB-4457-41EA-B4C0-3EA16CAF0A67}" destId="{11E1F0F4-DBB0-41A4-96BB-FECA7A3298B4}" srcOrd="0" destOrd="0" presId="urn:microsoft.com/office/officeart/2005/8/layout/lProcess2"/>
-    <dgm:cxn modelId="{E3F08353-8DF2-4BD6-B875-B7BD0EE38526}" type="presOf" srcId="{1E72DCD4-8160-446C-8F69-800D6CE4C135}" destId="{8F244147-1D88-4188-9509-60033E4B833C}" srcOrd="1" destOrd="0" presId="urn:microsoft.com/office/officeart/2005/8/layout/lProcess2"/>
+    <dgm:cxn modelId="{52A3E9B6-3620-4544-8843-13B820C1575B}" srcId="{3C4D1535-F223-4940-8E7D-3C8BC5A39DFC}" destId="{88DC23EC-68B3-4D5C-95B1-7B553A5817D2}" srcOrd="3" destOrd="0" parTransId="{61C5C932-4703-4D86-A55C-E4322840CA2A}" sibTransId="{83D8D893-7FE8-4C4B-B507-65A3E28EF3BF}"/>
+    <dgm:cxn modelId="{551D7CC1-00B6-4D10-AFCB-107ACF93B19B}" srcId="{3C4D1535-F223-4940-8E7D-3C8BC5A39DFC}" destId="{637287DC-DB1A-40BD-9DB8-96BBADB09433}" srcOrd="1" destOrd="0" parTransId="{C158C9F7-E29D-4E7D-BBCA-E9F4EE7A8B86}" sibTransId="{D865ECEC-BF6A-4DAA-AB19-005E11A7B09C}"/>
+    <dgm:cxn modelId="{218830C8-2A85-47AB-B421-062394EA59D4}" type="presOf" srcId="{3C4D1535-F223-4940-8E7D-3C8BC5A39DFC}" destId="{2B2E4D01-B7C3-4D70-B5D4-80D64E447E48}" srcOrd="0" destOrd="0" presId="urn:microsoft.com/office/officeart/2005/8/layout/lProcess2"/>
     <dgm:cxn modelId="{15609DCB-3D96-452D-B73E-1C26B20DC67C}" srcId="{1E72DCD4-8160-446C-8F69-800D6CE4C135}" destId="{18C29CAB-4457-41EA-B4C0-3EA16CAF0A67}" srcOrd="1" destOrd="0" parTransId="{DA159327-8E23-44FF-8923-FBCB339BC5E3}" sibTransId="{52DF7E80-1579-4DD8-8BA8-BD181E04E726}"/>
     <dgm:cxn modelId="{F5A95ED4-4709-4E9B-8448-849113A617E3}" type="presOf" srcId="{1E72DCD4-8160-446C-8F69-800D6CE4C135}" destId="{AD238C67-8E60-4943-A569-FB85BA11C2EA}" srcOrd="0" destOrd="0" presId="urn:microsoft.com/office/officeart/2005/8/layout/lProcess2"/>
-    <dgm:cxn modelId="{AC33BA88-28D0-46F3-88BE-2EC85997D8D9}" type="presOf" srcId="{E6F60356-E3A2-4386-BB9B-5E737AEC33D2}" destId="{2BDC84B2-728D-442E-9D15-438AA7E605FD}" srcOrd="0" destOrd="0" presId="urn:microsoft.com/office/officeart/2005/8/layout/lProcess2"/>
-    <dgm:cxn modelId="{11542B35-D487-46F5-B677-DCA46F28454D}" srcId="{E6F60356-E3A2-4386-BB9B-5E737AEC33D2}" destId="{1E72DCD4-8160-446C-8F69-800D6CE4C135}" srcOrd="1" destOrd="0" parTransId="{2667FDAD-FFA2-4000-96A2-46B48672A1F5}" sibTransId="{9DCDEC32-5C6E-46B4-9F2D-86A236A5224B}"/>
-    <dgm:cxn modelId="{3190F60A-FB67-46D8-AD34-3C86C7A4F034}" srcId="{3C4D1535-F223-4940-8E7D-3C8BC5A39DFC}" destId="{E404A811-D609-4036-872B-E6D5B9DA8342}" srcOrd="2" destOrd="0" parTransId="{3F0F41B2-E10B-4B86-A046-9C80C2921CE4}" sibTransId="{4E16B419-94F1-4AA4-AEDF-CB377CF926FF}"/>
     <dgm:cxn modelId="{96C3CCD6-82B5-43AB-BD32-3DF88CE9AAD5}" srcId="{E6F60356-E3A2-4386-BB9B-5E737AEC33D2}" destId="{3C4D1535-F223-4940-8E7D-3C8BC5A39DFC}" srcOrd="0" destOrd="0" parTransId="{4CD8DDA8-0E37-4F77-9BB6-71ABBBB0249F}" sibTransId="{19AF7E0C-B450-4048-BB4C-9671014CE314}"/>
-    <dgm:cxn modelId="{551D7CC1-00B6-4D10-AFCB-107ACF93B19B}" srcId="{3C4D1535-F223-4940-8E7D-3C8BC5A39DFC}" destId="{637287DC-DB1A-40BD-9DB8-96BBADB09433}" srcOrd="1" destOrd="0" parTransId="{C158C9F7-E29D-4E7D-BBCA-E9F4EE7A8B86}" sibTransId="{D865ECEC-BF6A-4DAA-AB19-005E11A7B09C}"/>
-    <dgm:cxn modelId="{6D860B9B-4190-482E-83DC-B14931FA4B10}" type="presOf" srcId="{56C18DB4-9F26-411C-955E-01291B28DBB4}" destId="{6B5F06A8-D323-4B1A-8B28-100B192B6381}" srcOrd="0" destOrd="0" presId="urn:microsoft.com/office/officeart/2005/8/layout/lProcess2"/>
-    <dgm:cxn modelId="{52A3E9B6-3620-4544-8843-13B820C1575B}" srcId="{3C4D1535-F223-4940-8E7D-3C8BC5A39DFC}" destId="{88DC23EC-68B3-4D5C-95B1-7B553A5817D2}" srcOrd="3" destOrd="0" parTransId="{61C5C932-4703-4D86-A55C-E4322840CA2A}" sibTransId="{83D8D893-7FE8-4C4B-B507-65A3E28EF3BF}"/>
-    <dgm:cxn modelId="{218830C8-2A85-47AB-B421-062394EA59D4}" type="presOf" srcId="{3C4D1535-F223-4940-8E7D-3C8BC5A39DFC}" destId="{2B2E4D01-B7C3-4D70-B5D4-80D64E447E48}" srcOrd="0" destOrd="0" presId="urn:microsoft.com/office/officeart/2005/8/layout/lProcess2"/>
     <dgm:cxn modelId="{374A25E0-0CCE-4A46-9C82-31E0EA48DDAB}" type="presOf" srcId="{88DC23EC-68B3-4D5C-95B1-7B553A5817D2}" destId="{6EA35884-0D9D-4624-880B-BDA87D8C5DA7}" srcOrd="0" destOrd="0" presId="urn:microsoft.com/office/officeart/2005/8/layout/lProcess2"/>
-    <dgm:cxn modelId="{4B226D40-0FFA-4891-972A-5491C32262BA}" srcId="{1E72DCD4-8160-446C-8F69-800D6CE4C135}" destId="{D52974CD-506C-4947-B839-5A1F5D19E716}" srcOrd="0" destOrd="0" parTransId="{7CC0F3E0-FEF3-4A41-A8F8-4E89A7D3A9EA}" sibTransId="{4B6CE639-E15E-4C40-9EEE-70C2B6DE662D}"/>
-    <dgm:cxn modelId="{BFF05662-90AE-48F0-811C-D03D9FCD73FB}" type="presOf" srcId="{637287DC-DB1A-40BD-9DB8-96BBADB09433}" destId="{F7059FB1-AC5B-4548-8DC7-056F30EFD30A}" srcOrd="0" destOrd="0" presId="urn:microsoft.com/office/officeart/2005/8/layout/lProcess2"/>
-    <dgm:cxn modelId="{C73FF04D-8DAD-4899-A54F-0567B798B31A}" type="presOf" srcId="{A5BADB4E-EE61-495F-BD6C-BA0DFDAA8704}" destId="{DEA305F7-C7E6-406D-9AB4-043CBCD5F473}" srcOrd="0" destOrd="0" presId="urn:microsoft.com/office/officeart/2005/8/layout/lProcess2"/>
-    <dgm:cxn modelId="{5BECDA1A-D465-453B-A9AB-E1BCFD3DEE34}" type="presOf" srcId="{D52974CD-506C-4947-B839-5A1F5D19E716}" destId="{54B3B9C5-4110-47AC-882E-CB80BFA3CFCF}" srcOrd="0" destOrd="0" presId="urn:microsoft.com/office/officeart/2005/8/layout/lProcess2"/>
-    <dgm:cxn modelId="{B857EA91-BC22-4B8B-8C88-9290FE3FF3DC}" srcId="{1E72DCD4-8160-446C-8F69-800D6CE4C135}" destId="{56C18DB4-9F26-411C-955E-01291B28DBB4}" srcOrd="2" destOrd="0" parTransId="{BA9340FF-0DF5-45CE-B111-B365A9086AD6}" sibTransId="{DABC9514-EA6B-4601-A7B1-F08B7C2E301D}"/>
-    <dgm:cxn modelId="{FF319E34-37B3-4EDF-8C11-798929E6A3EB}" type="presOf" srcId="{E404A811-D609-4036-872B-E6D5B9DA8342}" destId="{CA64A64F-0014-4D5F-9AC3-6FE6E349EC1A}" srcOrd="0" destOrd="0" presId="urn:microsoft.com/office/officeart/2005/8/layout/lProcess2"/>
-    <dgm:cxn modelId="{5A4C016D-35DC-44F6-A5A3-3E11E7595935}" type="presOf" srcId="{3C4D1535-F223-4940-8E7D-3C8BC5A39DFC}" destId="{AFADF575-0B40-4548-A0F9-F54544E026DF}" srcOrd="1" destOrd="0" presId="urn:microsoft.com/office/officeart/2005/8/layout/lProcess2"/>
-    <dgm:cxn modelId="{843C679C-DC09-43AE-AF88-B77974C54B50}" srcId="{3C4D1535-F223-4940-8E7D-3C8BC5A39DFC}" destId="{A5BADB4E-EE61-495F-BD6C-BA0DFDAA8704}" srcOrd="0" destOrd="0" parTransId="{20456A00-7426-4A09-A33D-66116351348C}" sibTransId="{04B798F4-48A7-418A-BA05-B38172E08835}"/>
     <dgm:cxn modelId="{3FCBF10D-1BC8-4F60-BDC4-4362006E3A9C}" type="presParOf" srcId="{2BDC84B2-728D-442E-9D15-438AA7E605FD}" destId="{AD9366F9-31F2-4DDC-B8D3-A7E7AD84C2FC}" srcOrd="0" destOrd="0" presId="urn:microsoft.com/office/officeart/2005/8/layout/lProcess2"/>
     <dgm:cxn modelId="{910CB27E-B921-4203-BBC2-D872F03F7187}" type="presParOf" srcId="{AD9366F9-31F2-4DDC-B8D3-A7E7AD84C2FC}" destId="{2B2E4D01-B7C3-4D70-B5D4-80D64E447E48}" srcOrd="0" destOrd="0" presId="urn:microsoft.com/office/officeart/2005/8/layout/lProcess2"/>
     <dgm:cxn modelId="{2CFD51A1-3EC6-4DBE-BF1B-5A577EDA8EFA}" type="presParOf" srcId="{AD9366F9-31F2-4DDC-B8D3-A7E7AD84C2FC}" destId="{AFADF575-0B40-4548-A0F9-F54544E026DF}" srcOrd="1" destOrd="0" presId="urn:microsoft.com/office/officeart/2005/8/layout/lProcess2"/>
@@ -6404,10 +6165,9 @@
         <a:lstStyle/>
         <a:p>
           <a:r>
-            <a:rPr lang="es-ES" dirty="0" smtClean="0"/>
+            <a:rPr lang="es-ES"/>
             <a:t>Resultado de la explotación</a:t>
           </a:r>
-          <a:endParaRPr lang="es-ES" dirty="0"/>
         </a:p>
       </dgm:t>
     </dgm:pt>
@@ -6441,14 +6201,9 @@
         <a:lstStyle/>
         <a:p>
           <a:r>
-            <a:rPr lang="es-ES" dirty="0" smtClean="0"/>
-            <a:t>INGRESOS DE LA EXPLOTACIÓN: </a:t>
+            <a:rPr lang="es-ES"/>
+            <a:t>INGRESOS DE LA EXPLOTACIÓN: Ventas de las mercaderías y los ingresos por servicios </a:t>
           </a:r>
-          <a:r>
-            <a:rPr lang="es-ES" dirty="0" smtClean="0"/>
-            <a:t>Ventas de las mercaderías y los ingresos por servicios </a:t>
-          </a:r>
-          <a:endParaRPr lang="es-ES" dirty="0"/>
         </a:p>
       </dgm:t>
     </dgm:pt>
@@ -6482,14 +6237,9 @@
         <a:lstStyle/>
         <a:p>
           <a:r>
-            <a:rPr lang="es-ES" dirty="0" smtClean="0"/>
-            <a:t>GASTOS DE EXPLOTACIÓN: </a:t>
+            <a:rPr lang="es-ES"/>
+            <a:t>GASTOS DE EXPLOTACIÓN: Alquiler, nóminas, seguridad social, mercaderías, publicidad, seguros, reparaciones, transportes, etc.</a:t>
           </a:r>
-          <a:r>
-            <a:rPr lang="es-ES" dirty="0" smtClean="0"/>
-            <a:t>Alquiler, nóminas, seguridad social, mercaderías, publicidad, seguros, reparaciones, transportes, etc.</a:t>
-          </a:r>
-          <a:endParaRPr lang="es-ES" dirty="0"/>
         </a:p>
       </dgm:t>
     </dgm:pt>
@@ -6523,10 +6273,9 @@
         <a:lstStyle/>
         <a:p>
           <a:r>
-            <a:rPr lang="es-ES" dirty="0" smtClean="0"/>
+            <a:rPr lang="es-ES"/>
             <a:t>Resultado financiero</a:t>
           </a:r>
-          <a:endParaRPr lang="es-ES" dirty="0"/>
         </a:p>
       </dgm:t>
     </dgm:pt>
@@ -6560,10 +6309,9 @@
         <a:lstStyle/>
         <a:p>
           <a:r>
-            <a:rPr lang="es-ES" dirty="0" smtClean="0"/>
+            <a:rPr lang="es-ES"/>
             <a:t>INGRESOS FINANCIEROS: Intereses de la cuenta corriente</a:t>
           </a:r>
-          <a:endParaRPr lang="es-ES" dirty="0"/>
         </a:p>
       </dgm:t>
     </dgm:pt>
@@ -6597,10 +6345,9 @@
         <a:lstStyle/>
         <a:p>
           <a:r>
-            <a:rPr lang="es-ES" dirty="0" smtClean="0"/>
+            <a:rPr lang="es-ES"/>
             <a:t>GASTOS FINANCIEROS: Intereses por préstamo, comisiones…</a:t>
           </a:r>
-          <a:endParaRPr lang="es-ES" dirty="0"/>
         </a:p>
       </dgm:t>
     </dgm:pt>
@@ -6634,10 +6381,9 @@
         <a:lstStyle/>
         <a:p>
           <a:r>
-            <a:rPr lang="es-ES" dirty="0" smtClean="0"/>
+            <a:rPr lang="es-ES"/>
             <a:t>Resultado antes de impuestos</a:t>
           </a:r>
-          <a:endParaRPr lang="es-ES" dirty="0"/>
         </a:p>
       </dgm:t>
     </dgm:pt>
@@ -6671,10 +6417,9 @@
         <a:lstStyle/>
         <a:p>
           <a:r>
-            <a:rPr lang="es-ES" dirty="0" smtClean="0"/>
+            <a:rPr lang="es-ES"/>
             <a:t>Resultado de la explotación + Resultado financiero</a:t>
           </a:r>
-          <a:endParaRPr lang="es-ES" dirty="0"/>
         </a:p>
       </dgm:t>
     </dgm:pt>
@@ -6708,10 +6453,9 @@
         <a:lstStyle/>
         <a:p>
           <a:r>
-            <a:rPr lang="es-ES" dirty="0" smtClean="0"/>
+            <a:rPr lang="es-ES"/>
             <a:t>Es el que se envía a Hacienda, para calcular el impuesto</a:t>
           </a:r>
-          <a:endParaRPr lang="es-ES" dirty="0"/>
         </a:p>
       </dgm:t>
     </dgm:pt>
@@ -6745,10 +6489,9 @@
         <a:lstStyle/>
         <a:p>
           <a:r>
-            <a:rPr lang="es-ES" dirty="0" smtClean="0"/>
+            <a:rPr lang="es-ES"/>
             <a:t>Resultado después de impuestos</a:t>
           </a:r>
-          <a:endParaRPr lang="es-ES" dirty="0"/>
         </a:p>
       </dgm:t>
     </dgm:pt>
@@ -6782,10 +6525,9 @@
         <a:lstStyle/>
         <a:p>
           <a:r>
-            <a:rPr lang="es-ES" dirty="0" smtClean="0"/>
+            <a:rPr lang="es-ES"/>
             <a:t>Se aplica el % de IRPF o de Impuesto de Sociedades correspondiente.</a:t>
           </a:r>
-          <a:endParaRPr lang="es-ES" dirty="0"/>
         </a:p>
       </dgm:t>
     </dgm:pt>
@@ -6805,10 +6547,9 @@
         <a:lstStyle/>
         <a:p>
           <a:r>
-            <a:rPr lang="es-ES" dirty="0" smtClean="0"/>
+            <a:rPr lang="es-ES"/>
             <a:t>Figurará en el balance. </a:t>
           </a:r>
-          <a:endParaRPr lang="es-ES" dirty="0"/>
         </a:p>
       </dgm:t>
     </dgm:pt>
@@ -6828,10 +6569,9 @@
         <a:lstStyle/>
         <a:p>
           <a:r>
-            <a:rPr lang="es-ES" dirty="0" smtClean="0"/>
+            <a:rPr lang="es-ES"/>
             <a:t>Cantidad a repartir entre los socios</a:t>
           </a:r>
-          <a:endParaRPr lang="es-ES" dirty="0"/>
         </a:p>
       </dgm:t>
     </dgm:pt>
@@ -6852,24 +6592,10 @@
         </dgm:presLayoutVars>
       </dgm:prSet>
       <dgm:spPr/>
-      <dgm:t>
-        <a:bodyPr/>
-        <a:lstStyle/>
-        <a:p>
-          <a:endParaRPr lang="es-ES"/>
-        </a:p>
-      </dgm:t>
     </dgm:pt>
     <dgm:pt modelId="{3DA8AB9B-B65F-4D81-B2EA-F566FF664565}" type="pres">
       <dgm:prSet presAssocID="{A486086D-3973-41CD-BFDA-99DD16F60116}" presName="linNode" presStyleCnt="0"/>
       <dgm:spPr/>
-      <dgm:t>
-        <a:bodyPr/>
-        <a:lstStyle/>
-        <a:p>
-          <a:endParaRPr lang="es-ES"/>
-        </a:p>
-      </dgm:t>
     </dgm:pt>
     <dgm:pt modelId="{47755CC4-8276-4149-B465-0EDDD68DB703}" type="pres">
       <dgm:prSet presAssocID="{A486086D-3973-41CD-BFDA-99DD16F60116}" presName="parentText" presStyleLbl="node1" presStyleIdx="0" presStyleCnt="4">
@@ -6879,13 +6605,6 @@
         </dgm:presLayoutVars>
       </dgm:prSet>
       <dgm:spPr/>
-      <dgm:t>
-        <a:bodyPr/>
-        <a:lstStyle/>
-        <a:p>
-          <a:endParaRPr lang="es-ES"/>
-        </a:p>
-      </dgm:t>
     </dgm:pt>
     <dgm:pt modelId="{02951DDA-FB41-4901-978A-B011C066A09C}" type="pres">
       <dgm:prSet presAssocID="{A486086D-3973-41CD-BFDA-99DD16F60116}" presName="descendantText" presStyleLbl="alignAccFollowNode1" presStyleIdx="0" presStyleCnt="4">
@@ -6894,35 +6613,14 @@
         </dgm:presLayoutVars>
       </dgm:prSet>
       <dgm:spPr/>
-      <dgm:t>
-        <a:bodyPr/>
-        <a:lstStyle/>
-        <a:p>
-          <a:endParaRPr lang="es-ES"/>
-        </a:p>
-      </dgm:t>
     </dgm:pt>
     <dgm:pt modelId="{8B8B3973-A91A-4047-BAC7-9EDDC16AE78A}" type="pres">
       <dgm:prSet presAssocID="{2054207B-5C55-487F-8CDA-E2502887E681}" presName="sp" presStyleCnt="0"/>
       <dgm:spPr/>
-      <dgm:t>
-        <a:bodyPr/>
-        <a:lstStyle/>
-        <a:p>
-          <a:endParaRPr lang="es-ES"/>
-        </a:p>
-      </dgm:t>
     </dgm:pt>
     <dgm:pt modelId="{6A62AF31-647A-4157-BE6E-3765D3BCBC30}" type="pres">
       <dgm:prSet presAssocID="{F8762282-0DB6-4EED-9E6C-C1B2895B4E3A}" presName="linNode" presStyleCnt="0"/>
       <dgm:spPr/>
-      <dgm:t>
-        <a:bodyPr/>
-        <a:lstStyle/>
-        <a:p>
-          <a:endParaRPr lang="es-ES"/>
-        </a:p>
-      </dgm:t>
     </dgm:pt>
     <dgm:pt modelId="{FDB54CF2-CC95-4814-AB27-738DE01EDE33}" type="pres">
       <dgm:prSet presAssocID="{F8762282-0DB6-4EED-9E6C-C1B2895B4E3A}" presName="parentText" presStyleLbl="node1" presStyleIdx="1" presStyleCnt="4">
@@ -6932,13 +6630,6 @@
         </dgm:presLayoutVars>
       </dgm:prSet>
       <dgm:spPr/>
-      <dgm:t>
-        <a:bodyPr/>
-        <a:lstStyle/>
-        <a:p>
-          <a:endParaRPr lang="es-ES"/>
-        </a:p>
-      </dgm:t>
     </dgm:pt>
     <dgm:pt modelId="{3B90F7AB-354C-474F-BD17-4415D3D7E4D7}" type="pres">
       <dgm:prSet presAssocID="{F8762282-0DB6-4EED-9E6C-C1B2895B4E3A}" presName="descendantText" presStyleLbl="alignAccFollowNode1" presStyleIdx="1" presStyleCnt="4">
@@ -6947,35 +6638,14 @@
         </dgm:presLayoutVars>
       </dgm:prSet>
       <dgm:spPr/>
-      <dgm:t>
-        <a:bodyPr/>
-        <a:lstStyle/>
-        <a:p>
-          <a:endParaRPr lang="es-ES"/>
-        </a:p>
-      </dgm:t>
     </dgm:pt>
     <dgm:pt modelId="{BA36D31B-7CE1-4CCF-B51E-54B0CFD7ED7D}" type="pres">
       <dgm:prSet presAssocID="{AD995CD1-8334-4EE1-9EF5-428C6FA3BDF8}" presName="sp" presStyleCnt="0"/>
       <dgm:spPr/>
-      <dgm:t>
-        <a:bodyPr/>
-        <a:lstStyle/>
-        <a:p>
-          <a:endParaRPr lang="es-ES"/>
-        </a:p>
-      </dgm:t>
     </dgm:pt>
     <dgm:pt modelId="{A4AE1060-CD49-48C3-9507-6658640FD35B}" type="pres">
       <dgm:prSet presAssocID="{9334AD0D-EE29-43F4-9642-B470C28FB030}" presName="linNode" presStyleCnt="0"/>
       <dgm:spPr/>
-      <dgm:t>
-        <a:bodyPr/>
-        <a:lstStyle/>
-        <a:p>
-          <a:endParaRPr lang="es-ES"/>
-        </a:p>
-      </dgm:t>
     </dgm:pt>
     <dgm:pt modelId="{7A51DDFF-A7ED-417B-ABF2-F06D402A14E4}" type="pres">
       <dgm:prSet presAssocID="{9334AD0D-EE29-43F4-9642-B470C28FB030}" presName="parentText" presStyleLbl="node1" presStyleIdx="2" presStyleCnt="4">
@@ -6985,13 +6655,6 @@
         </dgm:presLayoutVars>
       </dgm:prSet>
       <dgm:spPr/>
-      <dgm:t>
-        <a:bodyPr/>
-        <a:lstStyle/>
-        <a:p>
-          <a:endParaRPr lang="es-ES"/>
-        </a:p>
-      </dgm:t>
     </dgm:pt>
     <dgm:pt modelId="{1E99C034-FE49-4C05-A699-202F5B8D9D6B}" type="pres">
       <dgm:prSet presAssocID="{9334AD0D-EE29-43F4-9642-B470C28FB030}" presName="descendantText" presStyleLbl="alignAccFollowNode1" presStyleIdx="2" presStyleCnt="4">
@@ -7000,35 +6663,14 @@
         </dgm:presLayoutVars>
       </dgm:prSet>
       <dgm:spPr/>
-      <dgm:t>
-        <a:bodyPr/>
-        <a:lstStyle/>
-        <a:p>
-          <a:endParaRPr lang="es-ES"/>
-        </a:p>
-      </dgm:t>
     </dgm:pt>
     <dgm:pt modelId="{E950526B-88C4-473E-86D1-AB4C5F72365A}" type="pres">
       <dgm:prSet presAssocID="{448829C6-74C9-40A7-B742-71146D7B3D32}" presName="sp" presStyleCnt="0"/>
       <dgm:spPr/>
-      <dgm:t>
-        <a:bodyPr/>
-        <a:lstStyle/>
-        <a:p>
-          <a:endParaRPr lang="es-ES"/>
-        </a:p>
-      </dgm:t>
     </dgm:pt>
     <dgm:pt modelId="{8C5813E3-6F42-498F-A20C-FD08A50DE7CE}" type="pres">
       <dgm:prSet presAssocID="{93EB7FA8-6339-4D36-9783-B1863C6713A9}" presName="linNode" presStyleCnt="0"/>
       <dgm:spPr/>
-      <dgm:t>
-        <a:bodyPr/>
-        <a:lstStyle/>
-        <a:p>
-          <a:endParaRPr lang="es-ES"/>
-        </a:p>
-      </dgm:t>
     </dgm:pt>
     <dgm:pt modelId="{0818DD7D-2D0F-4458-95C9-C9894DF63875}" type="pres">
       <dgm:prSet presAssocID="{93EB7FA8-6339-4D36-9783-B1863C6713A9}" presName="parentText" presStyleLbl="node1" presStyleIdx="3" presStyleCnt="4">
@@ -7038,13 +6680,6 @@
         </dgm:presLayoutVars>
       </dgm:prSet>
       <dgm:spPr/>
-      <dgm:t>
-        <a:bodyPr/>
-        <a:lstStyle/>
-        <a:p>
-          <a:endParaRPr lang="es-ES"/>
-        </a:p>
-      </dgm:t>
     </dgm:pt>
     <dgm:pt modelId="{0CB98AD7-1C95-44AE-9AB0-B296DF711396}" type="pres">
       <dgm:prSet presAssocID="{93EB7FA8-6339-4D36-9783-B1863C6713A9}" presName="descendantText" presStyleLbl="alignAccFollowNode1" presStyleIdx="3" presStyleCnt="4">
@@ -7053,43 +6688,36 @@
         </dgm:presLayoutVars>
       </dgm:prSet>
       <dgm:spPr/>
-      <dgm:t>
-        <a:bodyPr/>
-        <a:lstStyle/>
-        <a:p>
-          <a:endParaRPr lang="es-ES"/>
-        </a:p>
-      </dgm:t>
     </dgm:pt>
   </dgm:ptLst>
   <dgm:cxnLst>
+    <dgm:cxn modelId="{68E2C40E-EE44-40DA-8C3E-F2941CE8D4FE}" srcId="{F8762282-0DB6-4EED-9E6C-C1B2895B4E3A}" destId="{5644627F-407D-48D8-AE09-5B4222A7B34C}" srcOrd="1" destOrd="0" parTransId="{B1A3B3D1-458E-46E6-8BB5-A86BDAAEFF3F}" sibTransId="{8D6D4F2E-2AC2-4BEF-B983-75A431882F0B}"/>
+    <dgm:cxn modelId="{5D02BC15-F74A-4A2F-BB8F-9643D3E2726A}" type="presOf" srcId="{E59B4DAA-4A65-43A1-A857-46B9CDBDE94C}" destId="{02951DDA-FB41-4901-978A-B011C066A09C}" srcOrd="0" destOrd="1" presId="urn:microsoft.com/office/officeart/2005/8/layout/vList5"/>
+    <dgm:cxn modelId="{C7BB4816-98E8-44AA-B0D5-878AF10F4411}" srcId="{A486086D-3973-41CD-BFDA-99DD16F60116}" destId="{E59B4DAA-4A65-43A1-A857-46B9CDBDE94C}" srcOrd="1" destOrd="0" parTransId="{2D1A7CAC-74AA-4F46-B3FB-4E5CF9375ADD}" sibTransId="{8F583882-4D1E-447A-B12C-CC6F438C80D9}"/>
+    <dgm:cxn modelId="{2314E816-1CD7-4E85-89F7-5B43AC52F499}" srcId="{9334AD0D-EE29-43F4-9642-B470C28FB030}" destId="{4628840C-EE3A-4565-9D8A-2D2298BADD80}" srcOrd="0" destOrd="0" parTransId="{4B0228C6-4236-45CA-8D0A-5DF16BB9959D}" sibTransId="{968F6485-546D-4481-B9F5-462D50490E67}"/>
+    <dgm:cxn modelId="{AFF18217-5C5F-4ECC-9606-E1734D1D9D92}" srcId="{47E17375-23AB-42EE-A038-F242B4CECC8E}" destId="{A486086D-3973-41CD-BFDA-99DD16F60116}" srcOrd="0" destOrd="0" parTransId="{0CC8FD28-77E6-4E44-A204-B7D2B3D58224}" sibTransId="{2054207B-5C55-487F-8CDA-E2502887E681}"/>
+    <dgm:cxn modelId="{04F52C26-9955-4691-AD15-EF9E1F0949FE}" type="presOf" srcId="{FDFA7363-EA81-496A-B51B-DCB6629F8BAA}" destId="{1E99C034-FE49-4C05-A699-202F5B8D9D6B}" srcOrd="0" destOrd="1" presId="urn:microsoft.com/office/officeart/2005/8/layout/vList5"/>
     <dgm:cxn modelId="{17B2352A-6CAD-43DE-99E0-DE9F0D5CE88C}" type="presOf" srcId="{9334AD0D-EE29-43F4-9642-B470C28FB030}" destId="{7A51DDFF-A7ED-417B-ABF2-F06D402A14E4}" srcOrd="0" destOrd="0" presId="urn:microsoft.com/office/officeart/2005/8/layout/vList5"/>
+    <dgm:cxn modelId="{EC853230-4E3A-4A74-9126-29CD2F449A80}" srcId="{93EB7FA8-6339-4D36-9783-B1863C6713A9}" destId="{C94612BA-A14E-4FCD-8FDF-7D7D4D813D00}" srcOrd="0" destOrd="0" parTransId="{A9FA2BF0-9F7B-434F-BDF6-CB0E71C8595F}" sibTransId="{696922EC-69DD-4046-9F73-84F02BA56E41}"/>
     <dgm:cxn modelId="{862A6339-B494-48F3-82AE-2BD19F9FE0E6}" type="presOf" srcId="{5A1432F7-B645-4FAB-BE9E-0FF8F6CA59E2}" destId="{0CB98AD7-1C95-44AE-9AB0-B296DF711396}" srcOrd="0" destOrd="2" presId="urn:microsoft.com/office/officeart/2005/8/layout/vList5"/>
+    <dgm:cxn modelId="{AF3E4B3D-4C45-46AE-91D6-3CAF2615DCD8}" type="presOf" srcId="{F8762282-0DB6-4EED-9E6C-C1B2895B4E3A}" destId="{FDB54CF2-CC95-4814-AB27-738DE01EDE33}" srcOrd="0" destOrd="0" presId="urn:microsoft.com/office/officeart/2005/8/layout/vList5"/>
+    <dgm:cxn modelId="{0FD6D04D-55A9-4154-B7AB-AEB7B7CD7A4A}" type="presOf" srcId="{C94612BA-A14E-4FCD-8FDF-7D7D4D813D00}" destId="{0CB98AD7-1C95-44AE-9AB0-B296DF711396}" srcOrd="0" destOrd="0" presId="urn:microsoft.com/office/officeart/2005/8/layout/vList5"/>
+    <dgm:cxn modelId="{BDB90781-5396-47EE-93B8-63FE1D5F40D5}" srcId="{93EB7FA8-6339-4D36-9783-B1863C6713A9}" destId="{5A1432F7-B645-4FAB-BE9E-0FF8F6CA59E2}" srcOrd="2" destOrd="0" parTransId="{B0218C89-BF8A-4166-B3C2-EAC71A5DFE09}" sibTransId="{9F2E6F8F-E21B-4B1D-BCD6-9C20877641E7}"/>
+    <dgm:cxn modelId="{2623B583-71D2-4618-8A60-BA26CF930827}" type="presOf" srcId="{630A21CF-A64F-4644-B674-9D39693D9252}" destId="{02951DDA-FB41-4901-978A-B011C066A09C}" srcOrd="0" destOrd="0" presId="urn:microsoft.com/office/officeart/2005/8/layout/vList5"/>
+    <dgm:cxn modelId="{8288DF86-8206-442D-A089-F872ACA0D952}" type="presOf" srcId="{11E99BA6-90F3-41C2-A46D-ED2227724B67}" destId="{3B90F7AB-354C-474F-BD17-4415D3D7E4D7}" srcOrd="0" destOrd="0" presId="urn:microsoft.com/office/officeart/2005/8/layout/vList5"/>
     <dgm:cxn modelId="{820A86A0-AB64-4BCB-B9D1-A58B4A970942}" srcId="{47E17375-23AB-42EE-A038-F242B4CECC8E}" destId="{F8762282-0DB6-4EED-9E6C-C1B2895B4E3A}" srcOrd="1" destOrd="0" parTransId="{DED28B0B-A871-4D4E-8DC2-9E1EC0DFA278}" sibTransId="{AD995CD1-8334-4EE1-9EF5-428C6FA3BDF8}"/>
+    <dgm:cxn modelId="{584DB6A4-3A9A-4218-9C2F-83D58AA4DB0D}" srcId="{F8762282-0DB6-4EED-9E6C-C1B2895B4E3A}" destId="{11E99BA6-90F3-41C2-A46D-ED2227724B67}" srcOrd="0" destOrd="0" parTransId="{B045A075-526D-4F5A-8801-9757F65651AA}" sibTransId="{6F1DA75C-B1E6-4EEF-8979-3FAD634F5C7C}"/>
+    <dgm:cxn modelId="{A88A15A7-E465-4686-A9F3-B85550350AD0}" type="presOf" srcId="{A486086D-3973-41CD-BFDA-99DD16F60116}" destId="{47755CC4-8276-4149-B465-0EDDD68DB703}" srcOrd="0" destOrd="0" presId="urn:microsoft.com/office/officeart/2005/8/layout/vList5"/>
+    <dgm:cxn modelId="{DB42EAA9-C64E-4E85-929C-F9FD114BC046}" srcId="{47E17375-23AB-42EE-A038-F242B4CECC8E}" destId="{9334AD0D-EE29-43F4-9642-B470C28FB030}" srcOrd="2" destOrd="0" parTransId="{2A584E55-955E-42C5-87EA-7A21A3FFF000}" sibTransId="{448829C6-74C9-40A7-B742-71146D7B3D32}"/>
+    <dgm:cxn modelId="{2CDDCEBB-8BCD-4FF6-A6D3-9ADD7C8A43C7}" srcId="{A486086D-3973-41CD-BFDA-99DD16F60116}" destId="{630A21CF-A64F-4644-B674-9D39693D9252}" srcOrd="0" destOrd="0" parTransId="{33AA3D73-D036-473D-81BD-E697DCBB0225}" sibTransId="{446AF9C9-E3B3-4004-B17D-BEE76BEF9E79}"/>
     <dgm:cxn modelId="{D3DB36C1-D7DC-4F1D-ABBA-549C6C8AF0EF}" type="presOf" srcId="{0D077101-4E5D-4D89-A1D4-089C6B0ED72D}" destId="{0CB98AD7-1C95-44AE-9AB0-B296DF711396}" srcOrd="0" destOrd="1" presId="urn:microsoft.com/office/officeart/2005/8/layout/vList5"/>
     <dgm:cxn modelId="{7B7E50C7-15E5-4290-81B3-A4C3E2BA6E8A}" type="presOf" srcId="{47E17375-23AB-42EE-A038-F242B4CECC8E}" destId="{CBEF7033-8276-4471-9A1E-BE464D7BF6A4}" srcOrd="0" destOrd="0" presId="urn:microsoft.com/office/officeart/2005/8/layout/vList5"/>
-    <dgm:cxn modelId="{A88A15A7-E465-4686-A9F3-B85550350AD0}" type="presOf" srcId="{A486086D-3973-41CD-BFDA-99DD16F60116}" destId="{47755CC4-8276-4149-B465-0EDDD68DB703}" srcOrd="0" destOrd="0" presId="urn:microsoft.com/office/officeart/2005/8/layout/vList5"/>
     <dgm:cxn modelId="{0C46DED1-CF7E-4E71-BB7D-86FA49D6C7CC}" srcId="{93EB7FA8-6339-4D36-9783-B1863C6713A9}" destId="{0D077101-4E5D-4D89-A1D4-089C6B0ED72D}" srcOrd="1" destOrd="0" parTransId="{607D0E7A-D334-4C7A-A34E-B0404AE5EC52}" sibTransId="{DE8CDF71-2EA3-4A14-B3DA-F40B081791D7}"/>
+    <dgm:cxn modelId="{D75D14D2-C099-409C-B2A3-27566199AF0C}" type="presOf" srcId="{5644627F-407D-48D8-AE09-5B4222A7B34C}" destId="{3B90F7AB-354C-474F-BD17-4415D3D7E4D7}" srcOrd="0" destOrd="1" presId="urn:microsoft.com/office/officeart/2005/8/layout/vList5"/>
+    <dgm:cxn modelId="{C3422FD9-3EDE-448A-92BA-580039EC5EB9}" srcId="{47E17375-23AB-42EE-A038-F242B4CECC8E}" destId="{93EB7FA8-6339-4D36-9783-B1863C6713A9}" srcOrd="3" destOrd="0" parTransId="{96AA1A08-C108-4153-AED5-ED1F6FC7FB13}" sibTransId="{15C990F6-260B-41F1-A696-A713EB064E0C}"/>
     <dgm:cxn modelId="{54DB51E7-8305-4295-BDFC-39AB60F65956}" srcId="{9334AD0D-EE29-43F4-9642-B470C28FB030}" destId="{FDFA7363-EA81-496A-B51B-DCB6629F8BAA}" srcOrd="1" destOrd="0" parTransId="{CB5DC20B-F03D-4232-88A7-98D3D2210DE5}" sibTransId="{5A5A119C-AC62-46B5-8C27-E1E5FD944D0D}"/>
-    <dgm:cxn modelId="{AFF18217-5C5F-4ECC-9606-E1734D1D9D92}" srcId="{47E17375-23AB-42EE-A038-F242B4CECC8E}" destId="{A486086D-3973-41CD-BFDA-99DD16F60116}" srcOrd="0" destOrd="0" parTransId="{0CC8FD28-77E6-4E44-A204-B7D2B3D58224}" sibTransId="{2054207B-5C55-487F-8CDA-E2502887E681}"/>
-    <dgm:cxn modelId="{5D02BC15-F74A-4A2F-BB8F-9643D3E2726A}" type="presOf" srcId="{E59B4DAA-4A65-43A1-A857-46B9CDBDE94C}" destId="{02951DDA-FB41-4901-978A-B011C066A09C}" srcOrd="0" destOrd="1" presId="urn:microsoft.com/office/officeart/2005/8/layout/vList5"/>
-    <dgm:cxn modelId="{2314E816-1CD7-4E85-89F7-5B43AC52F499}" srcId="{9334AD0D-EE29-43F4-9642-B470C28FB030}" destId="{4628840C-EE3A-4565-9D8A-2D2298BADD80}" srcOrd="0" destOrd="0" parTransId="{4B0228C6-4236-45CA-8D0A-5DF16BB9959D}" sibTransId="{968F6485-546D-4481-B9F5-462D50490E67}"/>
     <dgm:cxn modelId="{C932BDF7-C3D3-4DCA-BB70-F5974AE61D7C}" type="presOf" srcId="{93EB7FA8-6339-4D36-9783-B1863C6713A9}" destId="{0818DD7D-2D0F-4458-95C9-C9894DF63875}" srcOrd="0" destOrd="0" presId="urn:microsoft.com/office/officeart/2005/8/layout/vList5"/>
-    <dgm:cxn modelId="{BDB90781-5396-47EE-93B8-63FE1D5F40D5}" srcId="{93EB7FA8-6339-4D36-9783-B1863C6713A9}" destId="{5A1432F7-B645-4FAB-BE9E-0FF8F6CA59E2}" srcOrd="2" destOrd="0" parTransId="{B0218C89-BF8A-4166-B3C2-EAC71A5DFE09}" sibTransId="{9F2E6F8F-E21B-4B1D-BCD6-9C20877641E7}"/>
-    <dgm:cxn modelId="{0FD6D04D-55A9-4154-B7AB-AEB7B7CD7A4A}" type="presOf" srcId="{C94612BA-A14E-4FCD-8FDF-7D7D4D813D00}" destId="{0CB98AD7-1C95-44AE-9AB0-B296DF711396}" srcOrd="0" destOrd="0" presId="urn:microsoft.com/office/officeart/2005/8/layout/vList5"/>
-    <dgm:cxn modelId="{EC853230-4E3A-4A74-9126-29CD2F449A80}" srcId="{93EB7FA8-6339-4D36-9783-B1863C6713A9}" destId="{C94612BA-A14E-4FCD-8FDF-7D7D4D813D00}" srcOrd="0" destOrd="0" parTransId="{A9FA2BF0-9F7B-434F-BDF6-CB0E71C8595F}" sibTransId="{696922EC-69DD-4046-9F73-84F02BA56E41}"/>
-    <dgm:cxn modelId="{C7BB4816-98E8-44AA-B0D5-878AF10F4411}" srcId="{A486086D-3973-41CD-BFDA-99DD16F60116}" destId="{E59B4DAA-4A65-43A1-A857-46B9CDBDE94C}" srcOrd="1" destOrd="0" parTransId="{2D1A7CAC-74AA-4F46-B3FB-4E5CF9375ADD}" sibTransId="{8F583882-4D1E-447A-B12C-CC6F438C80D9}"/>
-    <dgm:cxn modelId="{68E2C40E-EE44-40DA-8C3E-F2941CE8D4FE}" srcId="{F8762282-0DB6-4EED-9E6C-C1B2895B4E3A}" destId="{5644627F-407D-48D8-AE09-5B4222A7B34C}" srcOrd="1" destOrd="0" parTransId="{B1A3B3D1-458E-46E6-8BB5-A86BDAAEFF3F}" sibTransId="{8D6D4F2E-2AC2-4BEF-B983-75A431882F0B}"/>
-    <dgm:cxn modelId="{C3422FD9-3EDE-448A-92BA-580039EC5EB9}" srcId="{47E17375-23AB-42EE-A038-F242B4CECC8E}" destId="{93EB7FA8-6339-4D36-9783-B1863C6713A9}" srcOrd="3" destOrd="0" parTransId="{96AA1A08-C108-4153-AED5-ED1F6FC7FB13}" sibTransId="{15C990F6-260B-41F1-A696-A713EB064E0C}"/>
-    <dgm:cxn modelId="{D75D14D2-C099-409C-B2A3-27566199AF0C}" type="presOf" srcId="{5644627F-407D-48D8-AE09-5B4222A7B34C}" destId="{3B90F7AB-354C-474F-BD17-4415D3D7E4D7}" srcOrd="0" destOrd="1" presId="urn:microsoft.com/office/officeart/2005/8/layout/vList5"/>
-    <dgm:cxn modelId="{2CDDCEBB-8BCD-4FF6-A6D3-9ADD7C8A43C7}" srcId="{A486086D-3973-41CD-BFDA-99DD16F60116}" destId="{630A21CF-A64F-4644-B674-9D39693D9252}" srcOrd="0" destOrd="0" parTransId="{33AA3D73-D036-473D-81BD-E697DCBB0225}" sibTransId="{446AF9C9-E3B3-4004-B17D-BEE76BEF9E79}"/>
-    <dgm:cxn modelId="{584DB6A4-3A9A-4218-9C2F-83D58AA4DB0D}" srcId="{F8762282-0DB6-4EED-9E6C-C1B2895B4E3A}" destId="{11E99BA6-90F3-41C2-A46D-ED2227724B67}" srcOrd="0" destOrd="0" parTransId="{B045A075-526D-4F5A-8801-9757F65651AA}" sibTransId="{6F1DA75C-B1E6-4EEF-8979-3FAD634F5C7C}"/>
     <dgm:cxn modelId="{295079FE-E8EB-4481-BD58-5BA3710DE104}" type="presOf" srcId="{4628840C-EE3A-4565-9D8A-2D2298BADD80}" destId="{1E99C034-FE49-4C05-A699-202F5B8D9D6B}" srcOrd="0" destOrd="0" presId="urn:microsoft.com/office/officeart/2005/8/layout/vList5"/>
-    <dgm:cxn modelId="{DB42EAA9-C64E-4E85-929C-F9FD114BC046}" srcId="{47E17375-23AB-42EE-A038-F242B4CECC8E}" destId="{9334AD0D-EE29-43F4-9642-B470C28FB030}" srcOrd="2" destOrd="0" parTransId="{2A584E55-955E-42C5-87EA-7A21A3FFF000}" sibTransId="{448829C6-74C9-40A7-B742-71146D7B3D32}"/>
-    <dgm:cxn modelId="{04F52C26-9955-4691-AD15-EF9E1F0949FE}" type="presOf" srcId="{FDFA7363-EA81-496A-B51B-DCB6629F8BAA}" destId="{1E99C034-FE49-4C05-A699-202F5B8D9D6B}" srcOrd="0" destOrd="1" presId="urn:microsoft.com/office/officeart/2005/8/layout/vList5"/>
-    <dgm:cxn modelId="{AF3E4B3D-4C45-46AE-91D6-3CAF2615DCD8}" type="presOf" srcId="{F8762282-0DB6-4EED-9E6C-C1B2895B4E3A}" destId="{FDB54CF2-CC95-4814-AB27-738DE01EDE33}" srcOrd="0" destOrd="0" presId="urn:microsoft.com/office/officeart/2005/8/layout/vList5"/>
-    <dgm:cxn modelId="{8288DF86-8206-442D-A089-F872ACA0D952}" type="presOf" srcId="{11E99BA6-90F3-41C2-A46D-ED2227724B67}" destId="{3B90F7AB-354C-474F-BD17-4415D3D7E4D7}" srcOrd="0" destOrd="0" presId="urn:microsoft.com/office/officeart/2005/8/layout/vList5"/>
-    <dgm:cxn modelId="{2623B583-71D2-4618-8A60-BA26CF930827}" type="presOf" srcId="{630A21CF-A64F-4644-B674-9D39693D9252}" destId="{02951DDA-FB41-4901-978A-B011C066A09C}" srcOrd="0" destOrd="0" presId="urn:microsoft.com/office/officeart/2005/8/layout/vList5"/>
     <dgm:cxn modelId="{6FEBDE01-49A9-4CC0-85FB-B4BE13F2CB3D}" type="presParOf" srcId="{CBEF7033-8276-4471-9A1E-BE464D7BF6A4}" destId="{3DA8AB9B-B65F-4D81-B2EA-F566FF664565}" srcOrd="0" destOrd="0" presId="urn:microsoft.com/office/officeart/2005/8/layout/vList5"/>
     <dgm:cxn modelId="{DBF172BE-5AA3-435A-B202-12C443B8175C}" type="presParOf" srcId="{3DA8AB9B-B65F-4D81-B2EA-F566FF664565}" destId="{47755CC4-8276-4149-B465-0EDDD68DB703}" srcOrd="0" destOrd="0" presId="urn:microsoft.com/office/officeart/2005/8/layout/vList5"/>
     <dgm:cxn modelId="{E2E6234E-ABBA-4476-A1F3-60644CA090B2}" type="presParOf" srcId="{3DA8AB9B-B65F-4D81-B2EA-F566FF664565}" destId="{02951DDA-FB41-4901-978A-B011C066A09C}" srcOrd="1" destOrd="0" presId="urn:microsoft.com/office/officeart/2005/8/layout/vList5"/>
@@ -7171,7 +6799,7 @@
         </a:bodyPr>
         <a:lstStyle/>
         <a:p>
-          <a:pPr lvl="0" algn="ctr" defTabSz="2755900">
+          <a:pPr marL="0" lvl="0" indent="0" algn="ctr" defTabSz="2755900">
             <a:lnSpc>
               <a:spcPct val="90000"/>
             </a:lnSpc>
@@ -7181,12 +6809,12 @@
             <a:spcAft>
               <a:spcPct val="35000"/>
             </a:spcAft>
+            <a:buNone/>
           </a:pPr>
           <a:r>
-            <a:rPr lang="es-ES" sz="6200" kern="1200" dirty="0" smtClean="0"/>
+            <a:rPr lang="es-ES" sz="6200" kern="1200"/>
             <a:t>ACTIVO</a:t>
           </a:r>
-          <a:endParaRPr lang="es-ES" sz="6200" kern="1200" dirty="0"/>
         </a:p>
       </dsp:txBody>
       <dsp:txXfrm>
@@ -7250,7 +6878,7 @@
         </a:bodyPr>
         <a:lstStyle/>
         <a:p>
-          <a:pPr lvl="0" algn="ctr" defTabSz="1111250">
+          <a:pPr marL="0" lvl="0" indent="0" algn="ctr" defTabSz="1111250">
             <a:lnSpc>
               <a:spcPct val="90000"/>
             </a:lnSpc>
@@ -7260,12 +6888,12 @@
             <a:spcAft>
               <a:spcPct val="35000"/>
             </a:spcAft>
+            <a:buNone/>
           </a:pPr>
           <a:r>
-            <a:rPr lang="es-ES" sz="2500" kern="1200" dirty="0" smtClean="0"/>
+            <a:rPr lang="es-ES" sz="2500" kern="1200"/>
             <a:t>Bienes</a:t>
           </a:r>
-          <a:endParaRPr lang="es-ES" sz="2500" kern="1200" dirty="0"/>
         </a:p>
       </dsp:txBody>
       <dsp:txXfrm>
@@ -7329,7 +6957,7 @@
         </a:bodyPr>
         <a:lstStyle/>
         <a:p>
-          <a:pPr lvl="0" algn="ctr" defTabSz="1111250">
+          <a:pPr marL="0" lvl="0" indent="0" algn="ctr" defTabSz="1111250">
             <a:lnSpc>
               <a:spcPct val="90000"/>
             </a:lnSpc>
@@ -7339,12 +6967,12 @@
             <a:spcAft>
               <a:spcPct val="35000"/>
             </a:spcAft>
+            <a:buNone/>
           </a:pPr>
           <a:r>
-            <a:rPr lang="es-ES" sz="2500" kern="1200" dirty="0" smtClean="0"/>
+            <a:rPr lang="es-ES" sz="2500" kern="1200"/>
             <a:t>Derechos</a:t>
           </a:r>
-          <a:endParaRPr lang="es-ES" sz="2500" kern="1200" dirty="0"/>
         </a:p>
       </dsp:txBody>
       <dsp:txXfrm>
@@ -7399,7 +7027,7 @@
         </a:bodyPr>
         <a:lstStyle/>
         <a:p>
-          <a:pPr lvl="0" algn="ctr" defTabSz="2755900">
+          <a:pPr marL="0" lvl="0" indent="0" algn="ctr" defTabSz="2755900">
             <a:lnSpc>
               <a:spcPct val="90000"/>
             </a:lnSpc>
@@ -7409,12 +7037,12 @@
             <a:spcAft>
               <a:spcPct val="35000"/>
             </a:spcAft>
+            <a:buNone/>
           </a:pPr>
           <a:r>
-            <a:rPr lang="es-ES" sz="6200" kern="1200" dirty="0" smtClean="0"/>
+            <a:rPr lang="es-ES" sz="6200" kern="1200"/>
             <a:t>PASIVO</a:t>
           </a:r>
-          <a:endParaRPr lang="es-ES" sz="6200" kern="1200" dirty="0"/>
         </a:p>
       </dsp:txBody>
       <dsp:txXfrm>
@@ -7478,7 +7106,7 @@
         </a:bodyPr>
         <a:lstStyle/>
         <a:p>
-          <a:pPr lvl="0" algn="ctr" defTabSz="1111250">
+          <a:pPr marL="0" lvl="0" indent="0" algn="ctr" defTabSz="1111250">
             <a:lnSpc>
               <a:spcPct val="90000"/>
             </a:lnSpc>
@@ -7488,14 +7116,15 @@
             <a:spcAft>
               <a:spcPct val="35000"/>
             </a:spcAft>
+            <a:buNone/>
           </a:pPr>
           <a:r>
-            <a:rPr lang="es-ES" sz="2500" kern="1200" dirty="0" smtClean="0"/>
+            <a:rPr lang="es-ES" sz="2500" kern="1200"/>
             <a:t>Patrimonio neto</a:t>
           </a:r>
         </a:p>
         <a:p>
-          <a:pPr lvl="0" algn="ctr" defTabSz="1111250">
+          <a:pPr marL="0" lvl="0" indent="0" algn="ctr" defTabSz="1111250">
             <a:lnSpc>
               <a:spcPct val="90000"/>
             </a:lnSpc>
@@ -7505,12 +7134,12 @@
             <a:spcAft>
               <a:spcPct val="35000"/>
             </a:spcAft>
+            <a:buNone/>
           </a:pPr>
           <a:r>
-            <a:rPr lang="es-ES" sz="2500" kern="1200" dirty="0" smtClean="0"/>
+            <a:rPr lang="es-ES" sz="2500" kern="1200"/>
             <a:t>(Valor contable de la empresa)</a:t>
           </a:r>
-          <a:endParaRPr lang="es-ES" sz="2500" kern="1200" dirty="0"/>
         </a:p>
       </dsp:txBody>
       <dsp:txXfrm>
@@ -7574,7 +7203,7 @@
         </a:bodyPr>
         <a:lstStyle/>
         <a:p>
-          <a:pPr lvl="0" algn="ctr" defTabSz="1111250">
+          <a:pPr marL="0" lvl="0" indent="0" algn="ctr" defTabSz="1111250">
             <a:lnSpc>
               <a:spcPct val="90000"/>
             </a:lnSpc>
@@ -7584,12 +7213,12 @@
             <a:spcAft>
               <a:spcPct val="35000"/>
             </a:spcAft>
+            <a:buNone/>
           </a:pPr>
           <a:r>
-            <a:rPr lang="es-ES" sz="2500" kern="1200" dirty="0" smtClean="0"/>
+            <a:rPr lang="es-ES" sz="2500" kern="1200"/>
             <a:t>Pasivo (deudas)</a:t>
           </a:r>
-          <a:endParaRPr lang="es-ES" sz="2500" kern="1200" dirty="0"/>
         </a:p>
       </dsp:txBody>
       <dsp:txXfrm>
@@ -7663,7 +7292,7 @@
         </a:bodyPr>
         <a:lstStyle/>
         <a:p>
-          <a:pPr lvl="0" algn="ctr" defTabSz="711200">
+          <a:pPr marL="0" lvl="0" indent="0" algn="ctr" defTabSz="711200">
             <a:lnSpc>
               <a:spcPct val="90000"/>
             </a:lnSpc>
@@ -7673,12 +7302,12 @@
             <a:spcAft>
               <a:spcPct val="35000"/>
             </a:spcAft>
+            <a:buNone/>
           </a:pPr>
           <a:r>
-            <a:rPr lang="es-ES" sz="1600" kern="1200" dirty="0" smtClean="0"/>
+            <a:rPr lang="es-ES" sz="1600" kern="1200"/>
             <a:t>ACTIVO NO CORRIENTE</a:t>
           </a:r>
-          <a:endParaRPr lang="es-ES" sz="1600" kern="1200" dirty="0"/>
         </a:p>
       </dsp:txBody>
       <dsp:txXfrm>
@@ -7752,13 +7381,12 @@
             <a:spcAft>
               <a:spcPct val="15000"/>
             </a:spcAft>
-            <a:buChar char="••"/>
+            <a:buChar char="•"/>
           </a:pPr>
           <a:r>
-            <a:rPr lang="es-ES" sz="1600" kern="1200" dirty="0" smtClean="0"/>
+            <a:rPr lang="es-ES" sz="1600" kern="1200"/>
             <a:t>Terrenos</a:t>
           </a:r>
-          <a:endParaRPr lang="es-ES" sz="1600" kern="1200" dirty="0"/>
         </a:p>
         <a:p>
           <a:pPr marL="171450" lvl="1" indent="-171450" algn="l" defTabSz="711200">
@@ -7771,13 +7399,12 @@
             <a:spcAft>
               <a:spcPct val="15000"/>
             </a:spcAft>
-            <a:buChar char="••"/>
+            <a:buChar char="•"/>
           </a:pPr>
           <a:r>
-            <a:rPr lang="es-ES" sz="1600" kern="1200" dirty="0" smtClean="0"/>
+            <a:rPr lang="es-ES" sz="1600" kern="1200"/>
             <a:t>Construcciones</a:t>
           </a:r>
-          <a:endParaRPr lang="es-ES" sz="1600" kern="1200" dirty="0"/>
         </a:p>
         <a:p>
           <a:pPr marL="171450" lvl="1" indent="-171450" algn="l" defTabSz="711200">
@@ -7790,13 +7417,12 @@
             <a:spcAft>
               <a:spcPct val="15000"/>
             </a:spcAft>
-            <a:buChar char="••"/>
+            <a:buChar char="•"/>
           </a:pPr>
           <a:r>
-            <a:rPr lang="es-ES" sz="1600" kern="1200" dirty="0" smtClean="0"/>
+            <a:rPr lang="es-ES" sz="1600" kern="1200"/>
             <a:t>Maquinaria</a:t>
           </a:r>
-          <a:endParaRPr lang="es-ES" sz="1600" kern="1200" dirty="0"/>
         </a:p>
         <a:p>
           <a:pPr marL="171450" lvl="1" indent="-171450" algn="l" defTabSz="711200">
@@ -7809,13 +7435,12 @@
             <a:spcAft>
               <a:spcPct val="15000"/>
             </a:spcAft>
-            <a:buChar char="••"/>
+            <a:buChar char="•"/>
           </a:pPr>
           <a:r>
-            <a:rPr lang="es-ES" sz="1600" kern="1200" dirty="0" smtClean="0"/>
+            <a:rPr lang="es-ES" sz="1600" kern="1200"/>
             <a:t>Utillaje (herramientas)</a:t>
           </a:r>
-          <a:endParaRPr lang="es-ES" sz="1600" kern="1200" dirty="0"/>
         </a:p>
         <a:p>
           <a:pPr marL="171450" lvl="1" indent="-171450" algn="l" defTabSz="711200">
@@ -7828,13 +7453,12 @@
             <a:spcAft>
               <a:spcPct val="15000"/>
             </a:spcAft>
-            <a:buChar char="••"/>
+            <a:buChar char="•"/>
           </a:pPr>
           <a:r>
-            <a:rPr lang="es-ES" sz="1600" kern="1200" dirty="0" smtClean="0"/>
+            <a:rPr lang="es-ES" sz="1600" kern="1200"/>
             <a:t>Mobiliario</a:t>
           </a:r>
-          <a:endParaRPr lang="es-ES" sz="1600" kern="1200" dirty="0"/>
         </a:p>
         <a:p>
           <a:pPr marL="171450" lvl="1" indent="-171450" algn="l" defTabSz="711200">
@@ -7847,13 +7471,12 @@
             <a:spcAft>
               <a:spcPct val="15000"/>
             </a:spcAft>
-            <a:buChar char="••"/>
+            <a:buChar char="•"/>
           </a:pPr>
           <a:r>
-            <a:rPr lang="es-ES" sz="1600" kern="1200" dirty="0" smtClean="0"/>
+            <a:rPr lang="es-ES" sz="1600" kern="1200"/>
             <a:t>Equipos para procesos de información</a:t>
           </a:r>
-          <a:endParaRPr lang="es-ES" sz="1600" kern="1200" dirty="0"/>
         </a:p>
         <a:p>
           <a:pPr marL="171450" lvl="1" indent="-171450" algn="l" defTabSz="711200">
@@ -7866,13 +7489,12 @@
             <a:spcAft>
               <a:spcPct val="15000"/>
             </a:spcAft>
-            <a:buChar char="••"/>
+            <a:buChar char="•"/>
           </a:pPr>
           <a:r>
-            <a:rPr lang="es-ES" sz="1600" kern="1200" dirty="0" smtClean="0"/>
+            <a:rPr lang="es-ES" sz="1600" kern="1200"/>
             <a:t>Elementos de transporte</a:t>
           </a:r>
-          <a:endParaRPr lang="es-ES" sz="1600" kern="1200" dirty="0"/>
         </a:p>
         <a:p>
           <a:pPr marL="171450" lvl="1" indent="-171450" algn="l" defTabSz="711200">
@@ -7885,13 +7507,12 @@
             <a:spcAft>
               <a:spcPct val="15000"/>
             </a:spcAft>
-            <a:buChar char="••"/>
+            <a:buChar char="•"/>
           </a:pPr>
           <a:r>
-            <a:rPr lang="es-ES" sz="1600" kern="1200" dirty="0" smtClean="0"/>
+            <a:rPr lang="es-ES" sz="1600" kern="1200"/>
             <a:t>Aplicaciones informáticas</a:t>
           </a:r>
-          <a:endParaRPr lang="es-ES" sz="1600" kern="1200" dirty="0"/>
         </a:p>
         <a:p>
           <a:pPr marL="171450" lvl="1" indent="-171450" algn="l" defTabSz="711200">
@@ -7904,13 +7525,12 @@
             <a:spcAft>
               <a:spcPct val="15000"/>
             </a:spcAft>
-            <a:buChar char="••"/>
+            <a:buChar char="•"/>
           </a:pPr>
           <a:r>
-            <a:rPr lang="es-ES" sz="1600" kern="1200" dirty="0" smtClean="0"/>
+            <a:rPr lang="es-ES" sz="1600" kern="1200"/>
             <a:t>Patentes y marcas</a:t>
           </a:r>
-          <a:endParaRPr lang="es-ES" sz="1600" kern="1200" dirty="0"/>
         </a:p>
       </dsp:txBody>
       <dsp:txXfrm>
@@ -7972,7 +7592,7 @@
         </a:bodyPr>
         <a:lstStyle/>
         <a:p>
-          <a:pPr lvl="0" algn="ctr" defTabSz="711200">
+          <a:pPr marL="0" lvl="0" indent="0" algn="ctr" defTabSz="711200">
             <a:lnSpc>
               <a:spcPct val="90000"/>
             </a:lnSpc>
@@ -7982,12 +7602,12 @@
             <a:spcAft>
               <a:spcPct val="35000"/>
             </a:spcAft>
+            <a:buNone/>
           </a:pPr>
           <a:r>
-            <a:rPr lang="es-ES" sz="1600" kern="1200" dirty="0" smtClean="0"/>
+            <a:rPr lang="es-ES" sz="1600" kern="1200"/>
             <a:t>EXISTENCIAS</a:t>
           </a:r>
-          <a:endParaRPr lang="es-ES" sz="1600" kern="1200" dirty="0"/>
         </a:p>
       </dsp:txBody>
       <dsp:txXfrm>
@@ -8061,13 +7681,12 @@
             <a:spcAft>
               <a:spcPct val="15000"/>
             </a:spcAft>
-            <a:buChar char="••"/>
+            <a:buChar char="•"/>
           </a:pPr>
           <a:r>
-            <a:rPr lang="es-ES" sz="1600" kern="1200" dirty="0" smtClean="0"/>
+            <a:rPr lang="es-ES" sz="1600" kern="1200"/>
             <a:t>Mercaderías( artículos que se venden en la empresa sin transformar)</a:t>
           </a:r>
-          <a:endParaRPr lang="es-ES" sz="1600" kern="1200" dirty="0"/>
         </a:p>
         <a:p>
           <a:pPr marL="171450" lvl="1" indent="-171450" algn="l" defTabSz="711200">
@@ -8080,13 +7699,12 @@
             <a:spcAft>
               <a:spcPct val="15000"/>
             </a:spcAft>
-            <a:buChar char="••"/>
+            <a:buChar char="•"/>
           </a:pPr>
           <a:r>
-            <a:rPr lang="es-ES" sz="1600" kern="1200" dirty="0" smtClean="0"/>
+            <a:rPr lang="es-ES" sz="1600" kern="1200"/>
             <a:t>Materias primas</a:t>
           </a:r>
-          <a:endParaRPr lang="es-ES" sz="1600" kern="1200" dirty="0"/>
         </a:p>
         <a:p>
           <a:pPr marL="171450" lvl="1" indent="-171450" algn="l" defTabSz="711200">
@@ -8099,13 +7717,12 @@
             <a:spcAft>
               <a:spcPct val="15000"/>
             </a:spcAft>
-            <a:buChar char="••"/>
+            <a:buChar char="•"/>
           </a:pPr>
           <a:r>
-            <a:rPr lang="es-ES" sz="1600" kern="1200" dirty="0" smtClean="0"/>
+            <a:rPr lang="es-ES" sz="1600" kern="1200"/>
             <a:t>Envases</a:t>
           </a:r>
-          <a:endParaRPr lang="es-ES" sz="1600" kern="1200" dirty="0"/>
         </a:p>
         <a:p>
           <a:pPr marL="171450" lvl="1" indent="-171450" algn="l" defTabSz="711200">
@@ -8118,13 +7735,12 @@
             <a:spcAft>
               <a:spcPct val="15000"/>
             </a:spcAft>
-            <a:buChar char="••"/>
+            <a:buChar char="•"/>
           </a:pPr>
           <a:r>
-            <a:rPr lang="es-ES" sz="1600" kern="1200" dirty="0" smtClean="0"/>
+            <a:rPr lang="es-ES" sz="1600" kern="1200"/>
             <a:t>Productos en elaboración</a:t>
           </a:r>
-          <a:endParaRPr lang="es-ES" sz="1600" kern="1200" dirty="0"/>
         </a:p>
       </dsp:txBody>
       <dsp:txXfrm>
@@ -8186,7 +7802,7 @@
         </a:bodyPr>
         <a:lstStyle/>
         <a:p>
-          <a:pPr lvl="0" algn="ctr" defTabSz="711200">
+          <a:pPr marL="0" lvl="0" indent="0" algn="ctr" defTabSz="711200">
             <a:lnSpc>
               <a:spcPct val="90000"/>
             </a:lnSpc>
@@ -8196,12 +7812,12 @@
             <a:spcAft>
               <a:spcPct val="35000"/>
             </a:spcAft>
+            <a:buNone/>
           </a:pPr>
           <a:r>
-            <a:rPr lang="es-ES" sz="1600" kern="1200" dirty="0" smtClean="0"/>
+            <a:rPr lang="es-ES" sz="1600" kern="1200"/>
             <a:t>REALIZABLE</a:t>
           </a:r>
-          <a:endParaRPr lang="es-ES" sz="1600" kern="1200" dirty="0"/>
         </a:p>
       </dsp:txBody>
       <dsp:txXfrm>
@@ -8275,13 +7891,12 @@
             <a:spcAft>
               <a:spcPct val="15000"/>
             </a:spcAft>
-            <a:buChar char="••"/>
+            <a:buChar char="•"/>
           </a:pPr>
           <a:r>
-            <a:rPr lang="es-ES" sz="1600" kern="1200" dirty="0" smtClean="0"/>
+            <a:rPr lang="es-ES" sz="1600" kern="1200"/>
             <a:t>Clientes ( deudas de un cliente)</a:t>
           </a:r>
-          <a:endParaRPr lang="es-ES" sz="1600" kern="1200" dirty="0"/>
         </a:p>
         <a:p>
           <a:pPr marL="171450" lvl="1" indent="-171450" algn="l" defTabSz="711200">
@@ -8294,13 +7909,12 @@
             <a:spcAft>
               <a:spcPct val="15000"/>
             </a:spcAft>
-            <a:buChar char="••"/>
+            <a:buChar char="•"/>
           </a:pPr>
           <a:r>
-            <a:rPr lang="es-ES" sz="1600" kern="1200" dirty="0" smtClean="0"/>
+            <a:rPr lang="es-ES" sz="1600" kern="1200"/>
             <a:t>Deudas de Hacienda: IVA soportado</a:t>
           </a:r>
-          <a:endParaRPr lang="es-ES" sz="1600" kern="1200" dirty="0"/>
         </a:p>
         <a:p>
           <a:pPr marL="171450" lvl="1" indent="-171450" algn="l" defTabSz="711200">
@@ -8313,13 +7927,12 @@
             <a:spcAft>
               <a:spcPct val="15000"/>
             </a:spcAft>
-            <a:buChar char="••"/>
+            <a:buChar char="•"/>
           </a:pPr>
           <a:r>
-            <a:rPr lang="es-ES" sz="1600" kern="1200" dirty="0" smtClean="0"/>
+            <a:rPr lang="es-ES" sz="1600" kern="1200"/>
             <a:t>Otros deudores</a:t>
           </a:r>
-          <a:endParaRPr lang="es-ES" sz="1600" kern="1200" dirty="0"/>
         </a:p>
       </dsp:txBody>
       <dsp:txXfrm>
@@ -8381,7 +7994,7 @@
         </a:bodyPr>
         <a:lstStyle/>
         <a:p>
-          <a:pPr lvl="0" algn="ctr" defTabSz="711200">
+          <a:pPr marL="0" lvl="0" indent="0" algn="ctr" defTabSz="711200">
             <a:lnSpc>
               <a:spcPct val="90000"/>
             </a:lnSpc>
@@ -8391,12 +8004,12 @@
             <a:spcAft>
               <a:spcPct val="35000"/>
             </a:spcAft>
+            <a:buNone/>
           </a:pPr>
           <a:r>
-            <a:rPr lang="es-ES" sz="1600" kern="1200" dirty="0" smtClean="0"/>
+            <a:rPr lang="es-ES" sz="1600" kern="1200"/>
             <a:t>DISPONIBLE</a:t>
           </a:r>
-          <a:endParaRPr lang="es-ES" sz="1600" kern="1200" dirty="0"/>
         </a:p>
       </dsp:txBody>
       <dsp:txXfrm>
@@ -8470,13 +8083,12 @@
             <a:spcAft>
               <a:spcPct val="15000"/>
             </a:spcAft>
-            <a:buChar char="••"/>
+            <a:buChar char="•"/>
           </a:pPr>
           <a:r>
-            <a:rPr lang="es-ES" sz="1600" kern="1200" dirty="0" smtClean="0"/>
+            <a:rPr lang="es-ES" sz="1600" kern="1200"/>
             <a:t>Bancos ( dinero en efectivo en cuentas bancarias)</a:t>
           </a:r>
-          <a:endParaRPr lang="es-ES" sz="1600" kern="1200" dirty="0"/>
         </a:p>
         <a:p>
           <a:pPr marL="171450" lvl="1" indent="-171450" algn="l" defTabSz="711200">
@@ -8489,13 +8101,12 @@
             <a:spcAft>
               <a:spcPct val="15000"/>
             </a:spcAft>
-            <a:buChar char="••"/>
+            <a:buChar char="•"/>
           </a:pPr>
           <a:r>
-            <a:rPr lang="es-ES" sz="1600" kern="1200" dirty="0" smtClean="0"/>
+            <a:rPr lang="es-ES" sz="1600" kern="1200"/>
             <a:t>Caja</a:t>
           </a:r>
-          <a:endParaRPr lang="es-ES" sz="1600" kern="1200" dirty="0"/>
         </a:p>
       </dsp:txBody>
       <dsp:txXfrm>
@@ -8569,7 +8180,7 @@
         </a:bodyPr>
         <a:lstStyle/>
         <a:p>
-          <a:pPr lvl="0" algn="ctr" defTabSz="844550">
+          <a:pPr marL="0" lvl="0" indent="0" algn="ctr" defTabSz="844550">
             <a:lnSpc>
               <a:spcPct val="90000"/>
             </a:lnSpc>
@@ -8579,12 +8190,12 @@
             <a:spcAft>
               <a:spcPct val="35000"/>
             </a:spcAft>
+            <a:buNone/>
           </a:pPr>
           <a:r>
-            <a:rPr lang="es-ES" sz="1900" kern="1200" dirty="0" smtClean="0"/>
+            <a:rPr lang="es-ES" sz="1900" kern="1200"/>
             <a:t>PASIVO NO CORRIENTE</a:t>
           </a:r>
-          <a:endParaRPr lang="es-ES" sz="1900" kern="1200" dirty="0"/>
         </a:p>
       </dsp:txBody>
       <dsp:txXfrm>
@@ -8658,13 +8269,12 @@
             <a:spcAft>
               <a:spcPct val="15000"/>
             </a:spcAft>
-            <a:buChar char="••"/>
+            <a:buChar char="•"/>
           </a:pPr>
           <a:r>
-            <a:rPr lang="es-ES" sz="1900" kern="1200" dirty="0" smtClean="0"/>
+            <a:rPr lang="es-ES" sz="1900" kern="1200"/>
             <a:t>Préstamo a largo plazo </a:t>
           </a:r>
-          <a:endParaRPr lang="es-ES" sz="1900" kern="1200" dirty="0"/>
         </a:p>
       </dsp:txBody>
       <dsp:txXfrm>
@@ -8726,7 +8336,7 @@
         </a:bodyPr>
         <a:lstStyle/>
         <a:p>
-          <a:pPr lvl="0" algn="ctr" defTabSz="844550">
+          <a:pPr marL="0" lvl="0" indent="0" algn="ctr" defTabSz="844550">
             <a:lnSpc>
               <a:spcPct val="90000"/>
             </a:lnSpc>
@@ -8736,12 +8346,12 @@
             <a:spcAft>
               <a:spcPct val="35000"/>
             </a:spcAft>
+            <a:buNone/>
           </a:pPr>
           <a:r>
-            <a:rPr lang="es-ES" sz="1900" kern="1200" dirty="0" smtClean="0"/>
+            <a:rPr lang="es-ES" sz="1900" kern="1200"/>
             <a:t>PASIVO CORRIENTE</a:t>
           </a:r>
-          <a:endParaRPr lang="es-ES" sz="1900" kern="1200" dirty="0"/>
         </a:p>
       </dsp:txBody>
       <dsp:txXfrm>
@@ -8815,21 +8425,12 @@
             <a:spcAft>
               <a:spcPct val="15000"/>
             </a:spcAft>
-            <a:buChar char="••"/>
+            <a:buChar char="•"/>
           </a:pPr>
           <a:r>
-            <a:rPr lang="es-ES" sz="1900" kern="1200" dirty="0" smtClean="0"/>
-            <a:t>Préstamos y </a:t>
+            <a:rPr lang="es-ES" sz="1900" kern="1200"/>
+            <a:t>Préstamos y créditos bancarios a corto plazo</a:t>
           </a:r>
-          <a:r>
-            <a:rPr lang="es-ES" sz="1900" kern="1200" smtClean="0"/>
-            <a:t>créditos bancarios </a:t>
-          </a:r>
-          <a:r>
-            <a:rPr lang="es-ES" sz="1900" kern="1200" dirty="0" smtClean="0"/>
-            <a:t>a corto plazo</a:t>
-          </a:r>
-          <a:endParaRPr lang="es-ES" sz="1900" kern="1200" dirty="0"/>
         </a:p>
         <a:p>
           <a:pPr marL="171450" lvl="1" indent="-171450" algn="l" defTabSz="844550">
@@ -8842,13 +8443,12 @@
             <a:spcAft>
               <a:spcPct val="15000"/>
             </a:spcAft>
-            <a:buChar char="••"/>
+            <a:buChar char="•"/>
           </a:pPr>
           <a:r>
-            <a:rPr lang="es-ES" sz="1900" kern="1200" dirty="0" smtClean="0"/>
+            <a:rPr lang="es-ES" sz="1900" kern="1200"/>
             <a:t>Proveedores</a:t>
           </a:r>
-          <a:endParaRPr lang="es-ES" sz="1900" kern="1200" dirty="0"/>
         </a:p>
         <a:p>
           <a:pPr marL="171450" lvl="1" indent="-171450" algn="l" defTabSz="844550">
@@ -8861,13 +8461,12 @@
             <a:spcAft>
               <a:spcPct val="15000"/>
             </a:spcAft>
-            <a:buChar char="••"/>
+            <a:buChar char="•"/>
           </a:pPr>
           <a:r>
-            <a:rPr lang="es-ES" sz="1900" kern="1200" dirty="0" smtClean="0"/>
+            <a:rPr lang="es-ES" sz="1900" kern="1200"/>
             <a:t>Acreedores: deudas con otras empresas ( ej. luz) </a:t>
           </a:r>
-          <a:endParaRPr lang="es-ES" sz="1900" kern="1200" dirty="0"/>
         </a:p>
         <a:p>
           <a:pPr marL="171450" lvl="1" indent="-171450" algn="l" defTabSz="844550">
@@ -8880,13 +8479,12 @@
             <a:spcAft>
               <a:spcPct val="15000"/>
             </a:spcAft>
-            <a:buChar char="••"/>
+            <a:buChar char="•"/>
           </a:pPr>
           <a:r>
-            <a:rPr lang="es-ES" sz="1900" kern="1200" dirty="0" smtClean="0"/>
+            <a:rPr lang="es-ES" sz="1900" kern="1200"/>
             <a:t>Deudas con Hacienda: IVA repercutido</a:t>
           </a:r>
-          <a:endParaRPr lang="es-ES" sz="1900" kern="1200" dirty="0"/>
         </a:p>
         <a:p>
           <a:pPr marL="171450" lvl="1" indent="-171450" algn="l" defTabSz="844550">
@@ -8899,13 +8497,12 @@
             <a:spcAft>
               <a:spcPct val="15000"/>
             </a:spcAft>
-            <a:buChar char="••"/>
+            <a:buChar char="•"/>
           </a:pPr>
           <a:r>
-            <a:rPr lang="es-ES" sz="1900" kern="1200" dirty="0" smtClean="0"/>
+            <a:rPr lang="es-ES" sz="1900" kern="1200"/>
             <a:t>Deudas con la Seguridad Social</a:t>
           </a:r>
-          <a:endParaRPr lang="es-ES" sz="1900" kern="1200" dirty="0"/>
         </a:p>
       </dsp:txBody>
       <dsp:txXfrm>
@@ -8967,7 +8564,7 @@
         </a:bodyPr>
         <a:lstStyle/>
         <a:p>
-          <a:pPr lvl="0" algn="ctr" defTabSz="844550">
+          <a:pPr marL="0" lvl="0" indent="0" algn="ctr" defTabSz="844550">
             <a:lnSpc>
               <a:spcPct val="90000"/>
             </a:lnSpc>
@@ -8977,12 +8574,12 @@
             <a:spcAft>
               <a:spcPct val="35000"/>
             </a:spcAft>
+            <a:buNone/>
           </a:pPr>
           <a:r>
-            <a:rPr lang="es-ES" sz="1900" kern="1200" dirty="0" smtClean="0"/>
+            <a:rPr lang="es-ES" sz="1900" kern="1200"/>
             <a:t>PATRIMONIO NETO</a:t>
           </a:r>
-          <a:endParaRPr lang="es-ES" sz="1900" kern="1200" dirty="0"/>
         </a:p>
       </dsp:txBody>
       <dsp:txXfrm>
@@ -9056,13 +8653,12 @@
             <a:spcAft>
               <a:spcPct val="15000"/>
             </a:spcAft>
-            <a:buChar char="••"/>
+            <a:buChar char="•"/>
           </a:pPr>
           <a:r>
-            <a:rPr lang="es-ES" sz="1900" kern="1200" dirty="0" smtClean="0"/>
+            <a:rPr lang="es-ES" sz="1900" kern="1200"/>
             <a:t>Capital</a:t>
           </a:r>
-          <a:endParaRPr lang="es-ES" sz="1900" kern="1200" dirty="0"/>
         </a:p>
         <a:p>
           <a:pPr marL="171450" lvl="1" indent="-171450" algn="l" defTabSz="844550">
@@ -9075,13 +8671,12 @@
             <a:spcAft>
               <a:spcPct val="15000"/>
             </a:spcAft>
-            <a:buChar char="••"/>
+            <a:buChar char="•"/>
           </a:pPr>
           <a:r>
-            <a:rPr lang="es-ES" sz="1900" kern="1200" dirty="0" smtClean="0"/>
+            <a:rPr lang="es-ES" sz="1900" kern="1200"/>
             <a:t>Reservas</a:t>
           </a:r>
-          <a:endParaRPr lang="es-ES" sz="1900" kern="1200" dirty="0"/>
         </a:p>
         <a:p>
           <a:pPr marL="171450" lvl="1" indent="-171450" algn="l" defTabSz="844550">
@@ -9094,13 +8689,12 @@
             <a:spcAft>
               <a:spcPct val="15000"/>
             </a:spcAft>
-            <a:buChar char="••"/>
+            <a:buChar char="•"/>
           </a:pPr>
           <a:r>
-            <a:rPr lang="es-ES" sz="1900" kern="1200" dirty="0" smtClean="0"/>
+            <a:rPr lang="es-ES" sz="1900" kern="1200"/>
             <a:t>Resultados del ejercicio</a:t>
           </a:r>
-          <a:endParaRPr lang="es-ES" sz="1900" kern="1200" dirty="0"/>
         </a:p>
       </dsp:txBody>
       <dsp:txXfrm>
@@ -9167,7 +8761,7 @@
         </a:bodyPr>
         <a:lstStyle/>
         <a:p>
-          <a:pPr lvl="0" algn="ctr" defTabSz="2755900">
+          <a:pPr marL="0" lvl="0" indent="0" algn="ctr" defTabSz="2755900">
             <a:lnSpc>
               <a:spcPct val="90000"/>
             </a:lnSpc>
@@ -9177,12 +8771,12 @@
             <a:spcAft>
               <a:spcPct val="35000"/>
             </a:spcAft>
+            <a:buNone/>
           </a:pPr>
           <a:r>
-            <a:rPr lang="es-ES" sz="6200" kern="1200" dirty="0" smtClean="0"/>
+            <a:rPr lang="es-ES" sz="6200" kern="1200"/>
             <a:t>ACTIVO</a:t>
           </a:r>
-          <a:endParaRPr lang="es-ES" sz="6200" kern="1200" dirty="0"/>
         </a:p>
       </dsp:txBody>
       <dsp:txXfrm>
@@ -9246,7 +8840,7 @@
         </a:bodyPr>
         <a:lstStyle/>
         <a:p>
-          <a:pPr lvl="0" algn="ctr" defTabSz="755650">
+          <a:pPr marL="0" lvl="0" indent="0" algn="ctr" defTabSz="755650">
             <a:lnSpc>
               <a:spcPct val="90000"/>
             </a:lnSpc>
@@ -9256,12 +8850,12 @@
             <a:spcAft>
               <a:spcPct val="35000"/>
             </a:spcAft>
+            <a:buNone/>
           </a:pPr>
           <a:r>
-            <a:rPr lang="es-ES" sz="1700" kern="1200" dirty="0" smtClean="0"/>
+            <a:rPr lang="es-ES" sz="1700" kern="1200"/>
             <a:t>ACTIVO NO CORRIENTE</a:t>
           </a:r>
-          <a:endParaRPr lang="es-ES" sz="1700" kern="1200" dirty="0"/>
         </a:p>
       </dsp:txBody>
       <dsp:txXfrm>
@@ -9320,7 +8914,7 @@
         </a:bodyPr>
         <a:lstStyle/>
         <a:p>
-          <a:pPr lvl="0" algn="ctr" defTabSz="755650">
+          <a:pPr marL="0" lvl="0" indent="0" algn="ctr" defTabSz="755650">
             <a:lnSpc>
               <a:spcPct val="90000"/>
             </a:lnSpc>
@@ -9330,12 +8924,12 @@
             <a:spcAft>
               <a:spcPct val="35000"/>
             </a:spcAft>
+            <a:buNone/>
           </a:pPr>
           <a:r>
-            <a:rPr lang="es-ES" sz="1700" kern="1200" dirty="0" smtClean="0"/>
+            <a:rPr lang="es-ES" sz="1700" kern="1200"/>
             <a:t>EXISTENCIAS</a:t>
           </a:r>
-          <a:endParaRPr lang="es-ES" sz="1700" kern="1200" dirty="0"/>
         </a:p>
       </dsp:txBody>
       <dsp:txXfrm>
@@ -9394,7 +8988,7 @@
         </a:bodyPr>
         <a:lstStyle/>
         <a:p>
-          <a:pPr lvl="0" algn="ctr" defTabSz="755650">
+          <a:pPr marL="0" lvl="0" indent="0" algn="ctr" defTabSz="755650">
             <a:lnSpc>
               <a:spcPct val="90000"/>
             </a:lnSpc>
@@ -9404,12 +8998,12 @@
             <a:spcAft>
               <a:spcPct val="35000"/>
             </a:spcAft>
+            <a:buNone/>
           </a:pPr>
           <a:r>
-            <a:rPr lang="es-ES" sz="1700" kern="1200" dirty="0" smtClean="0"/>
+            <a:rPr lang="es-ES" sz="1700" kern="1200"/>
             <a:t>REALIZABLE</a:t>
           </a:r>
-          <a:endParaRPr lang="es-ES" sz="1700" kern="1200" dirty="0"/>
         </a:p>
       </dsp:txBody>
       <dsp:txXfrm>
@@ -9468,7 +9062,7 @@
         </a:bodyPr>
         <a:lstStyle/>
         <a:p>
-          <a:pPr lvl="0" algn="ctr" defTabSz="755650">
+          <a:pPr marL="0" lvl="0" indent="0" algn="ctr" defTabSz="755650">
             <a:lnSpc>
               <a:spcPct val="90000"/>
             </a:lnSpc>
@@ -9478,12 +9072,12 @@
             <a:spcAft>
               <a:spcPct val="35000"/>
             </a:spcAft>
+            <a:buNone/>
           </a:pPr>
           <a:r>
-            <a:rPr lang="es-ES" sz="1700" kern="1200" dirty="0" smtClean="0"/>
+            <a:rPr lang="es-ES" sz="1700" kern="1200"/>
             <a:t>DISPONIBLE</a:t>
           </a:r>
-          <a:endParaRPr lang="es-ES" sz="1700" kern="1200" dirty="0"/>
         </a:p>
       </dsp:txBody>
       <dsp:txXfrm>
@@ -9538,7 +9132,7 @@
         </a:bodyPr>
         <a:lstStyle/>
         <a:p>
-          <a:pPr lvl="0" algn="ctr" defTabSz="2755900">
+          <a:pPr marL="0" lvl="0" indent="0" algn="ctr" defTabSz="2755900">
             <a:lnSpc>
               <a:spcPct val="90000"/>
             </a:lnSpc>
@@ -9548,12 +9142,12 @@
             <a:spcAft>
               <a:spcPct val="35000"/>
             </a:spcAft>
+            <a:buNone/>
           </a:pPr>
           <a:r>
-            <a:rPr lang="es-ES" sz="6200" kern="1200" dirty="0" smtClean="0"/>
+            <a:rPr lang="es-ES" sz="6200" kern="1200"/>
             <a:t>PASIVO</a:t>
           </a:r>
-          <a:endParaRPr lang="es-ES" sz="6200" kern="1200" dirty="0"/>
         </a:p>
       </dsp:txBody>
       <dsp:txXfrm>
@@ -9617,7 +9211,7 @@
         </a:bodyPr>
         <a:lstStyle/>
         <a:p>
-          <a:pPr lvl="0" algn="ctr" defTabSz="755650">
+          <a:pPr marL="0" lvl="0" indent="0" algn="ctr" defTabSz="755650">
             <a:lnSpc>
               <a:spcPct val="90000"/>
             </a:lnSpc>
@@ -9627,12 +9221,12 @@
             <a:spcAft>
               <a:spcPct val="35000"/>
             </a:spcAft>
+            <a:buNone/>
           </a:pPr>
           <a:r>
-            <a:rPr lang="es-ES" sz="1700" kern="1200" dirty="0" smtClean="0"/>
+            <a:rPr lang="es-ES" sz="1700" kern="1200"/>
             <a:t>PATRIMONIO NETO </a:t>
           </a:r>
-          <a:endParaRPr lang="es-ES" sz="1700" kern="1200" dirty="0"/>
         </a:p>
       </dsp:txBody>
       <dsp:txXfrm>
@@ -9696,7 +9290,7 @@
         </a:bodyPr>
         <a:lstStyle/>
         <a:p>
-          <a:pPr lvl="0" algn="ctr" defTabSz="755650">
+          <a:pPr marL="0" lvl="0" indent="0" algn="ctr" defTabSz="755650">
             <a:lnSpc>
               <a:spcPct val="90000"/>
             </a:lnSpc>
@@ -9706,12 +9300,12 @@
             <a:spcAft>
               <a:spcPct val="35000"/>
             </a:spcAft>
+            <a:buNone/>
           </a:pPr>
           <a:r>
-            <a:rPr lang="es-ES" sz="1700" kern="1200" dirty="0" smtClean="0"/>
+            <a:rPr lang="es-ES" sz="1700" kern="1200"/>
             <a:t>PASIVO NO CORRIENTE</a:t>
           </a:r>
-          <a:endParaRPr lang="es-ES" sz="1700" kern="1200" dirty="0"/>
         </a:p>
       </dsp:txBody>
       <dsp:txXfrm>
@@ -9770,7 +9364,7 @@
         </a:bodyPr>
         <a:lstStyle/>
         <a:p>
-          <a:pPr lvl="0" algn="ctr" defTabSz="755650">
+          <a:pPr marL="0" lvl="0" indent="0" algn="ctr" defTabSz="755650">
             <a:lnSpc>
               <a:spcPct val="90000"/>
             </a:lnSpc>
@@ -9780,12 +9374,12 @@
             <a:spcAft>
               <a:spcPct val="35000"/>
             </a:spcAft>
+            <a:buNone/>
           </a:pPr>
           <a:r>
-            <a:rPr lang="es-ES" sz="1700" kern="1200" dirty="0" smtClean="0"/>
+            <a:rPr lang="es-ES" sz="1700" kern="1200"/>
             <a:t>PASIVO CORRIENTE</a:t>
           </a:r>
-          <a:endParaRPr lang="es-ES" sz="1700" kern="1200" dirty="0"/>
         </a:p>
       </dsp:txBody>
       <dsp:txXfrm>
@@ -9884,17 +9478,12 @@
             <a:spcAft>
               <a:spcPct val="15000"/>
             </a:spcAft>
-            <a:buChar char="••"/>
+            <a:buChar char="•"/>
           </a:pPr>
           <a:r>
-            <a:rPr lang="es-ES" sz="1200" kern="1200" dirty="0" smtClean="0"/>
-            <a:t>INGRESOS DE LA EXPLOTACIÓN: </a:t>
+            <a:rPr lang="es-ES" sz="1200" kern="1200"/>
+            <a:t>INGRESOS DE LA EXPLOTACIÓN: Ventas de las mercaderías y los ingresos por servicios </a:t>
           </a:r>
-          <a:r>
-            <a:rPr lang="es-ES" sz="1200" kern="1200" dirty="0" smtClean="0"/>
-            <a:t>Ventas de las mercaderías y los ingresos por servicios </a:t>
-          </a:r>
-          <a:endParaRPr lang="es-ES" sz="1200" kern="1200" dirty="0"/>
         </a:p>
         <a:p>
           <a:pPr marL="114300" lvl="1" indent="-114300" algn="l" defTabSz="533400">
@@ -9907,17 +9496,12 @@
             <a:spcAft>
               <a:spcPct val="15000"/>
             </a:spcAft>
-            <a:buChar char="••"/>
+            <a:buChar char="•"/>
           </a:pPr>
           <a:r>
-            <a:rPr lang="es-ES" sz="1200" kern="1200" dirty="0" smtClean="0"/>
-            <a:t>GASTOS DE EXPLOTACIÓN: </a:t>
+            <a:rPr lang="es-ES" sz="1200" kern="1200"/>
+            <a:t>GASTOS DE EXPLOTACIÓN: Alquiler, nóminas, seguridad social, mercaderías, publicidad, seguros, reparaciones, transportes, etc.</a:t>
           </a:r>
-          <a:r>
-            <a:rPr lang="es-ES" sz="1200" kern="1200" dirty="0" smtClean="0"/>
-            <a:t>Alquiler, nóminas, seguridad social, mercaderías, publicidad, seguros, reparaciones, transportes, etc.</a:t>
-          </a:r>
-          <a:endParaRPr lang="es-ES" sz="1200" kern="1200" dirty="0"/>
         </a:p>
       </dsp:txBody>
       <dsp:txXfrm rot="-5400000">
@@ -10012,7 +9596,7 @@
         </a:bodyPr>
         <a:lstStyle/>
         <a:p>
-          <a:pPr lvl="0" algn="ctr" defTabSz="1200150">
+          <a:pPr marL="0" lvl="0" indent="0" algn="ctr" defTabSz="1200150">
             <a:lnSpc>
               <a:spcPct val="90000"/>
             </a:lnSpc>
@@ -10022,12 +9606,12 @@
             <a:spcAft>
               <a:spcPct val="35000"/>
             </a:spcAft>
+            <a:buNone/>
           </a:pPr>
           <a:r>
-            <a:rPr lang="es-ES" sz="2700" kern="1200" dirty="0" smtClean="0"/>
+            <a:rPr lang="es-ES" sz="2700" kern="1200"/>
             <a:t>Resultado de la explotación</a:t>
           </a:r>
-          <a:endParaRPr lang="es-ES" sz="2700" kern="1200" dirty="0"/>
         </a:p>
       </dsp:txBody>
       <dsp:txXfrm>
@@ -10114,13 +9698,12 @@
             <a:spcAft>
               <a:spcPct val="15000"/>
             </a:spcAft>
-            <a:buChar char="••"/>
+            <a:buChar char="•"/>
           </a:pPr>
           <a:r>
-            <a:rPr lang="es-ES" sz="1200" kern="1200" dirty="0" smtClean="0"/>
+            <a:rPr lang="es-ES" sz="1200" kern="1200"/>
             <a:t>INGRESOS FINANCIEROS: Intereses de la cuenta corriente</a:t>
           </a:r>
-          <a:endParaRPr lang="es-ES" sz="1200" kern="1200" dirty="0"/>
         </a:p>
         <a:p>
           <a:pPr marL="114300" lvl="1" indent="-114300" algn="l" defTabSz="533400">
@@ -10133,13 +9716,12 @@
             <a:spcAft>
               <a:spcPct val="15000"/>
             </a:spcAft>
-            <a:buChar char="••"/>
+            <a:buChar char="•"/>
           </a:pPr>
           <a:r>
-            <a:rPr lang="es-ES" sz="1200" kern="1200" dirty="0" smtClean="0"/>
+            <a:rPr lang="es-ES" sz="1200" kern="1200"/>
             <a:t>GASTOS FINANCIEROS: Intereses por préstamo, comisiones…</a:t>
           </a:r>
-          <a:endParaRPr lang="es-ES" sz="1200" kern="1200" dirty="0"/>
         </a:p>
       </dsp:txBody>
       <dsp:txXfrm rot="-5400000">
@@ -10234,7 +9816,7 @@
         </a:bodyPr>
         <a:lstStyle/>
         <a:p>
-          <a:pPr lvl="0" algn="ctr" defTabSz="1200150">
+          <a:pPr marL="0" lvl="0" indent="0" algn="ctr" defTabSz="1200150">
             <a:lnSpc>
               <a:spcPct val="90000"/>
             </a:lnSpc>
@@ -10244,12 +9826,12 @@
             <a:spcAft>
               <a:spcPct val="35000"/>
             </a:spcAft>
+            <a:buNone/>
           </a:pPr>
           <a:r>
-            <a:rPr lang="es-ES" sz="2700" kern="1200" dirty="0" smtClean="0"/>
+            <a:rPr lang="es-ES" sz="2700" kern="1200"/>
             <a:t>Resultado financiero</a:t>
           </a:r>
-          <a:endParaRPr lang="es-ES" sz="2700" kern="1200" dirty="0"/>
         </a:p>
       </dsp:txBody>
       <dsp:txXfrm>
@@ -10336,13 +9918,12 @@
             <a:spcAft>
               <a:spcPct val="15000"/>
             </a:spcAft>
-            <a:buChar char="••"/>
+            <a:buChar char="•"/>
           </a:pPr>
           <a:r>
-            <a:rPr lang="es-ES" sz="1200" kern="1200" dirty="0" smtClean="0"/>
+            <a:rPr lang="es-ES" sz="1200" kern="1200"/>
             <a:t>Resultado de la explotación + Resultado financiero</a:t>
           </a:r>
-          <a:endParaRPr lang="es-ES" sz="1200" kern="1200" dirty="0"/>
         </a:p>
         <a:p>
           <a:pPr marL="114300" lvl="1" indent="-114300" algn="l" defTabSz="533400">
@@ -10355,13 +9936,12 @@
             <a:spcAft>
               <a:spcPct val="15000"/>
             </a:spcAft>
-            <a:buChar char="••"/>
+            <a:buChar char="•"/>
           </a:pPr>
           <a:r>
-            <a:rPr lang="es-ES" sz="1200" kern="1200" dirty="0" smtClean="0"/>
+            <a:rPr lang="es-ES" sz="1200" kern="1200"/>
             <a:t>Es el que se envía a Hacienda, para calcular el impuesto</a:t>
           </a:r>
-          <a:endParaRPr lang="es-ES" sz="1200" kern="1200" dirty="0"/>
         </a:p>
       </dsp:txBody>
       <dsp:txXfrm rot="-5400000">
@@ -10456,7 +10036,7 @@
         </a:bodyPr>
         <a:lstStyle/>
         <a:p>
-          <a:pPr lvl="0" algn="ctr" defTabSz="1200150">
+          <a:pPr marL="0" lvl="0" indent="0" algn="ctr" defTabSz="1200150">
             <a:lnSpc>
               <a:spcPct val="90000"/>
             </a:lnSpc>
@@ -10466,12 +10046,12 @@
             <a:spcAft>
               <a:spcPct val="35000"/>
             </a:spcAft>
+            <a:buNone/>
           </a:pPr>
           <a:r>
-            <a:rPr lang="es-ES" sz="2700" kern="1200" dirty="0" smtClean="0"/>
+            <a:rPr lang="es-ES" sz="2700" kern="1200"/>
             <a:t>Resultado antes de impuestos</a:t>
           </a:r>
-          <a:endParaRPr lang="es-ES" sz="2700" kern="1200" dirty="0"/>
         </a:p>
       </dsp:txBody>
       <dsp:txXfrm>
@@ -10558,13 +10138,12 @@
             <a:spcAft>
               <a:spcPct val="15000"/>
             </a:spcAft>
-            <a:buChar char="••"/>
+            <a:buChar char="•"/>
           </a:pPr>
           <a:r>
-            <a:rPr lang="es-ES" sz="1200" kern="1200" dirty="0" smtClean="0"/>
+            <a:rPr lang="es-ES" sz="1200" kern="1200"/>
             <a:t>Se aplica el % de IRPF o de Impuesto de Sociedades correspondiente.</a:t>
           </a:r>
-          <a:endParaRPr lang="es-ES" sz="1200" kern="1200" dirty="0"/>
         </a:p>
         <a:p>
           <a:pPr marL="114300" lvl="1" indent="-114300" algn="l" defTabSz="533400">
@@ -10577,13 +10156,12 @@
             <a:spcAft>
               <a:spcPct val="15000"/>
             </a:spcAft>
-            <a:buChar char="••"/>
+            <a:buChar char="•"/>
           </a:pPr>
           <a:r>
-            <a:rPr lang="es-ES" sz="1200" kern="1200" dirty="0" smtClean="0"/>
+            <a:rPr lang="es-ES" sz="1200" kern="1200"/>
             <a:t>Figurará en el balance. </a:t>
           </a:r>
-          <a:endParaRPr lang="es-ES" sz="1200" kern="1200" dirty="0"/>
         </a:p>
         <a:p>
           <a:pPr marL="114300" lvl="1" indent="-114300" algn="l" defTabSz="533400">
@@ -10596,13 +10174,12 @@
             <a:spcAft>
               <a:spcPct val="15000"/>
             </a:spcAft>
-            <a:buChar char="••"/>
+            <a:buChar char="•"/>
           </a:pPr>
           <a:r>
-            <a:rPr lang="es-ES" sz="1200" kern="1200" dirty="0" smtClean="0"/>
+            <a:rPr lang="es-ES" sz="1200" kern="1200"/>
             <a:t>Cantidad a repartir entre los socios</a:t>
           </a:r>
-          <a:endParaRPr lang="es-ES" sz="1200" kern="1200" dirty="0"/>
         </a:p>
       </dsp:txBody>
       <dsp:txXfrm rot="-5400000">
@@ -10697,7 +10274,7 @@
         </a:bodyPr>
         <a:lstStyle/>
         <a:p>
-          <a:pPr lvl="0" algn="ctr" defTabSz="1200150">
+          <a:pPr marL="0" lvl="0" indent="0" algn="ctr" defTabSz="1200150">
             <a:lnSpc>
               <a:spcPct val="90000"/>
             </a:lnSpc>
@@ -10707,12 +10284,12 @@
             <a:spcAft>
               <a:spcPct val="35000"/>
             </a:spcAft>
+            <a:buNone/>
           </a:pPr>
           <a:r>
-            <a:rPr lang="es-ES" sz="2700" kern="1200" dirty="0" smtClean="0"/>
+            <a:rPr lang="es-ES" sz="2700" kern="1200"/>
             <a:t>Resultado después de impuestos</a:t>
           </a:r>
-          <a:endParaRPr lang="es-ES" sz="2700" kern="1200" dirty="0"/>
         </a:p>
       </dsp:txBody>
       <dsp:txXfrm>
@@ -17136,10 +16713,9 @@
           <a:lstStyle/>
           <a:p>
             <a:r>
-              <a:rPr lang="es-ES" smtClean="0"/>
+              <a:rPr lang="es-ES"/>
               <a:t>Haga clic para modificar el estilo de título del patrón</a:t>
             </a:r>
-            <a:endParaRPr lang="es-ES"/>
           </a:p>
         </p:txBody>
       </p:sp>
@@ -17255,10 +16831,9 @@
           </a:lstStyle>
           <a:p>
             <a:r>
-              <a:rPr lang="es-ES" smtClean="0"/>
+              <a:rPr lang="es-ES"/>
               <a:t>Haga clic para modificar el estilo de subtítulo del patrón</a:t>
             </a:r>
-            <a:endParaRPr lang="es-ES"/>
           </a:p>
         </p:txBody>
       </p:sp>
@@ -17279,7 +16854,7 @@
           <a:p>
             <a:fld id="{A96CFEAD-D6B8-4398-98DB-A7A2C4B96F63}" type="datetimeFigureOut">
               <a:rPr lang="es-ES" smtClean="0"/>
-              <a:t>27/02/2025</a:t>
+              <a:t>02/02/2026</a:t>
             </a:fld>
             <a:endParaRPr lang="es-ES"/>
           </a:p>
@@ -17321,7 +16896,7 @@
           <a:p>
             <a:fld id="{83CC6727-501C-40C5-BD85-242C39381038}" type="slidenum">
               <a:rPr lang="es-ES" smtClean="0"/>
-              <a:t>‹Nº›</a:t>
+              <a:t>‹#›</a:t>
             </a:fld>
             <a:endParaRPr lang="es-ES"/>
           </a:p>
@@ -17373,10 +16948,9 @@
           <a:lstStyle/>
           <a:p>
             <a:r>
-              <a:rPr lang="es-ES" smtClean="0"/>
+              <a:rPr lang="es-ES"/>
               <a:t>Haga clic para modificar el estilo de título del patrón</a:t>
             </a:r>
-            <a:endParaRPr lang="es-ES"/>
           </a:p>
         </p:txBody>
       </p:sp>
@@ -17397,38 +16971,37 @@
           <a:p>
             <a:pPr lvl="0"/>
             <a:r>
-              <a:rPr lang="es-ES" smtClean="0"/>
+              <a:rPr lang="es-ES"/>
               <a:t>Haga clic para modificar el estilo de texto del patrón</a:t>
             </a:r>
           </a:p>
           <a:p>
             <a:pPr lvl="1"/>
             <a:r>
-              <a:rPr lang="es-ES" smtClean="0"/>
+              <a:rPr lang="es-ES"/>
               <a:t>Segundo nivel</a:t>
             </a:r>
           </a:p>
           <a:p>
             <a:pPr lvl="2"/>
             <a:r>
-              <a:rPr lang="es-ES" smtClean="0"/>
+              <a:rPr lang="es-ES"/>
               <a:t>Tercer nivel</a:t>
             </a:r>
           </a:p>
           <a:p>
             <a:pPr lvl="3"/>
             <a:r>
-              <a:rPr lang="es-ES" smtClean="0"/>
+              <a:rPr lang="es-ES"/>
               <a:t>Cuarto nivel</a:t>
             </a:r>
           </a:p>
           <a:p>
             <a:pPr lvl="4"/>
             <a:r>
-              <a:rPr lang="es-ES" smtClean="0"/>
+              <a:rPr lang="es-ES"/>
               <a:t>Quinto nivel</a:t>
             </a:r>
-            <a:endParaRPr lang="es-ES"/>
           </a:p>
         </p:txBody>
       </p:sp>
@@ -17449,7 +17022,7 @@
           <a:p>
             <a:fld id="{A96CFEAD-D6B8-4398-98DB-A7A2C4B96F63}" type="datetimeFigureOut">
               <a:rPr lang="es-ES" smtClean="0"/>
-              <a:t>27/02/2025</a:t>
+              <a:t>02/02/2026</a:t>
             </a:fld>
             <a:endParaRPr lang="es-ES"/>
           </a:p>
@@ -17491,7 +17064,7 @@
           <a:p>
             <a:fld id="{83CC6727-501C-40C5-BD85-242C39381038}" type="slidenum">
               <a:rPr lang="es-ES" smtClean="0"/>
-              <a:t>‹Nº›</a:t>
+              <a:t>‹#›</a:t>
             </a:fld>
             <a:endParaRPr lang="es-ES"/>
           </a:p>
@@ -17548,10 +17121,9 @@
           <a:lstStyle/>
           <a:p>
             <a:r>
-              <a:rPr lang="es-ES" smtClean="0"/>
+              <a:rPr lang="es-ES"/>
               <a:t>Haga clic para modificar el estilo de título del patrón</a:t>
             </a:r>
-            <a:endParaRPr lang="es-ES"/>
           </a:p>
         </p:txBody>
       </p:sp>
@@ -17577,38 +17149,37 @@
           <a:p>
             <a:pPr lvl="0"/>
             <a:r>
-              <a:rPr lang="es-ES" smtClean="0"/>
+              <a:rPr lang="es-ES"/>
               <a:t>Haga clic para modificar el estilo de texto del patrón</a:t>
             </a:r>
           </a:p>
           <a:p>
             <a:pPr lvl="1"/>
             <a:r>
-              <a:rPr lang="es-ES" smtClean="0"/>
+              <a:rPr lang="es-ES"/>
               <a:t>Segundo nivel</a:t>
             </a:r>
           </a:p>
           <a:p>
             <a:pPr lvl="2"/>
             <a:r>
-              <a:rPr lang="es-ES" smtClean="0"/>
+              <a:rPr lang="es-ES"/>
               <a:t>Tercer nivel</a:t>
             </a:r>
           </a:p>
           <a:p>
             <a:pPr lvl="3"/>
             <a:r>
-              <a:rPr lang="es-ES" smtClean="0"/>
+              <a:rPr lang="es-ES"/>
               <a:t>Cuarto nivel</a:t>
             </a:r>
           </a:p>
           <a:p>
             <a:pPr lvl="4"/>
             <a:r>
-              <a:rPr lang="es-ES" smtClean="0"/>
+              <a:rPr lang="es-ES"/>
               <a:t>Quinto nivel</a:t>
             </a:r>
-            <a:endParaRPr lang="es-ES"/>
           </a:p>
         </p:txBody>
       </p:sp>
@@ -17629,7 +17200,7 @@
           <a:p>
             <a:fld id="{A96CFEAD-D6B8-4398-98DB-A7A2C4B96F63}" type="datetimeFigureOut">
               <a:rPr lang="es-ES" smtClean="0"/>
-              <a:t>27/02/2025</a:t>
+              <a:t>02/02/2026</a:t>
             </a:fld>
             <a:endParaRPr lang="es-ES"/>
           </a:p>
@@ -17671,7 +17242,7 @@
           <a:p>
             <a:fld id="{83CC6727-501C-40C5-BD85-242C39381038}" type="slidenum">
               <a:rPr lang="es-ES" smtClean="0"/>
-              <a:t>‹Nº›</a:t>
+              <a:t>‹#›</a:t>
             </a:fld>
             <a:endParaRPr lang="es-ES"/>
           </a:p>
@@ -17723,10 +17294,9 @@
           <a:lstStyle/>
           <a:p>
             <a:r>
-              <a:rPr lang="es-ES" smtClean="0"/>
+              <a:rPr lang="es-ES"/>
               <a:t>Haga clic para modificar el estilo de título del patrón</a:t>
             </a:r>
-            <a:endParaRPr lang="es-ES"/>
           </a:p>
         </p:txBody>
       </p:sp>
@@ -17747,38 +17317,37 @@
           <a:p>
             <a:pPr lvl="0"/>
             <a:r>
-              <a:rPr lang="es-ES" smtClean="0"/>
+              <a:rPr lang="es-ES"/>
               <a:t>Haga clic para modificar el estilo de texto del patrón</a:t>
             </a:r>
           </a:p>
           <a:p>
             <a:pPr lvl="1"/>
             <a:r>
-              <a:rPr lang="es-ES" smtClean="0"/>
+              <a:rPr lang="es-ES"/>
               <a:t>Segundo nivel</a:t>
             </a:r>
           </a:p>
           <a:p>
             <a:pPr lvl="2"/>
             <a:r>
-              <a:rPr lang="es-ES" smtClean="0"/>
+              <a:rPr lang="es-ES"/>
               <a:t>Tercer nivel</a:t>
             </a:r>
           </a:p>
           <a:p>
             <a:pPr lvl="3"/>
             <a:r>
-              <a:rPr lang="es-ES" smtClean="0"/>
+              <a:rPr lang="es-ES"/>
               <a:t>Cuarto nivel</a:t>
             </a:r>
           </a:p>
           <a:p>
             <a:pPr lvl="4"/>
             <a:r>
-              <a:rPr lang="es-ES" smtClean="0"/>
+              <a:rPr lang="es-ES"/>
               <a:t>Quinto nivel</a:t>
             </a:r>
-            <a:endParaRPr lang="es-ES"/>
           </a:p>
         </p:txBody>
       </p:sp>
@@ -17799,7 +17368,7 @@
           <a:p>
             <a:fld id="{A96CFEAD-D6B8-4398-98DB-A7A2C4B96F63}" type="datetimeFigureOut">
               <a:rPr lang="es-ES" smtClean="0"/>
-              <a:t>27/02/2025</a:t>
+              <a:t>02/02/2026</a:t>
             </a:fld>
             <a:endParaRPr lang="es-ES"/>
           </a:p>
@@ -17841,7 +17410,7 @@
           <a:p>
             <a:fld id="{83CC6727-501C-40C5-BD85-242C39381038}" type="slidenum">
               <a:rPr lang="es-ES" smtClean="0"/>
-              <a:t>‹Nº›</a:t>
+              <a:t>‹#›</a:t>
             </a:fld>
             <a:endParaRPr lang="es-ES"/>
           </a:p>
@@ -17902,10 +17471,9 @@
           </a:lstStyle>
           <a:p>
             <a:r>
-              <a:rPr lang="es-ES" smtClean="0"/>
+              <a:rPr lang="es-ES"/>
               <a:t>Haga clic para modificar el estilo de título del patrón</a:t>
             </a:r>
-            <a:endParaRPr lang="es-ES"/>
           </a:p>
         </p:txBody>
       </p:sp>
@@ -18022,7 +17590,7 @@
           <a:p>
             <a:pPr lvl="0"/>
             <a:r>
-              <a:rPr lang="es-ES" smtClean="0"/>
+              <a:rPr lang="es-ES"/>
               <a:t>Haga clic para modificar el estilo de texto del patrón</a:t>
             </a:r>
           </a:p>
@@ -18045,7 +17613,7 @@
           <a:p>
             <a:fld id="{A96CFEAD-D6B8-4398-98DB-A7A2C4B96F63}" type="datetimeFigureOut">
               <a:rPr lang="es-ES" smtClean="0"/>
-              <a:t>27/02/2025</a:t>
+              <a:t>02/02/2026</a:t>
             </a:fld>
             <a:endParaRPr lang="es-ES"/>
           </a:p>
@@ -18087,7 +17655,7 @@
           <a:p>
             <a:fld id="{83CC6727-501C-40C5-BD85-242C39381038}" type="slidenum">
               <a:rPr lang="es-ES" smtClean="0"/>
-              <a:t>‹Nº›</a:t>
+              <a:t>‹#›</a:t>
             </a:fld>
             <a:endParaRPr lang="es-ES"/>
           </a:p>
@@ -18139,10 +17707,9 @@
           <a:lstStyle/>
           <a:p>
             <a:r>
-              <a:rPr lang="es-ES" smtClean="0"/>
+              <a:rPr lang="es-ES"/>
               <a:t>Haga clic para modificar el estilo de título del patrón</a:t>
             </a:r>
-            <a:endParaRPr lang="es-ES"/>
           </a:p>
         </p:txBody>
       </p:sp>
@@ -18196,38 +17763,37 @@
           <a:p>
             <a:pPr lvl="0"/>
             <a:r>
-              <a:rPr lang="es-ES" smtClean="0"/>
+              <a:rPr lang="es-ES"/>
               <a:t>Haga clic para modificar el estilo de texto del patrón</a:t>
             </a:r>
           </a:p>
           <a:p>
             <a:pPr lvl="1"/>
             <a:r>
-              <a:rPr lang="es-ES" smtClean="0"/>
+              <a:rPr lang="es-ES"/>
               <a:t>Segundo nivel</a:t>
             </a:r>
           </a:p>
           <a:p>
             <a:pPr lvl="2"/>
             <a:r>
-              <a:rPr lang="es-ES" smtClean="0"/>
+              <a:rPr lang="es-ES"/>
               <a:t>Tercer nivel</a:t>
             </a:r>
           </a:p>
           <a:p>
             <a:pPr lvl="3"/>
             <a:r>
-              <a:rPr lang="es-ES" smtClean="0"/>
+              <a:rPr lang="es-ES"/>
               <a:t>Cuarto nivel</a:t>
             </a:r>
           </a:p>
           <a:p>
             <a:pPr lvl="4"/>
             <a:r>
-              <a:rPr lang="es-ES" smtClean="0"/>
+              <a:rPr lang="es-ES"/>
               <a:t>Quinto nivel</a:t>
             </a:r>
-            <a:endParaRPr lang="es-ES"/>
           </a:p>
         </p:txBody>
       </p:sp>
@@ -18281,38 +17847,37 @@
           <a:p>
             <a:pPr lvl="0"/>
             <a:r>
-              <a:rPr lang="es-ES" smtClean="0"/>
+              <a:rPr lang="es-ES"/>
               <a:t>Haga clic para modificar el estilo de texto del patrón</a:t>
             </a:r>
           </a:p>
           <a:p>
             <a:pPr lvl="1"/>
             <a:r>
-              <a:rPr lang="es-ES" smtClean="0"/>
+              <a:rPr lang="es-ES"/>
               <a:t>Segundo nivel</a:t>
             </a:r>
           </a:p>
           <a:p>
             <a:pPr lvl="2"/>
             <a:r>
-              <a:rPr lang="es-ES" smtClean="0"/>
+              <a:rPr lang="es-ES"/>
               <a:t>Tercer nivel</a:t>
             </a:r>
           </a:p>
           <a:p>
             <a:pPr lvl="3"/>
             <a:r>
-              <a:rPr lang="es-ES" smtClean="0"/>
+              <a:rPr lang="es-ES"/>
               <a:t>Cuarto nivel</a:t>
             </a:r>
           </a:p>
           <a:p>
             <a:pPr lvl="4"/>
             <a:r>
-              <a:rPr lang="es-ES" smtClean="0"/>
+              <a:rPr lang="es-ES"/>
               <a:t>Quinto nivel</a:t>
             </a:r>
-            <a:endParaRPr lang="es-ES"/>
           </a:p>
         </p:txBody>
       </p:sp>
@@ -18333,7 +17898,7 @@
           <a:p>
             <a:fld id="{A96CFEAD-D6B8-4398-98DB-A7A2C4B96F63}" type="datetimeFigureOut">
               <a:rPr lang="es-ES" smtClean="0"/>
-              <a:t>27/02/2025</a:t>
+              <a:t>02/02/2026</a:t>
             </a:fld>
             <a:endParaRPr lang="es-ES"/>
           </a:p>
@@ -18375,7 +17940,7 @@
           <a:p>
             <a:fld id="{83CC6727-501C-40C5-BD85-242C39381038}" type="slidenum">
               <a:rPr lang="es-ES" smtClean="0"/>
-              <a:t>‹Nº›</a:t>
+              <a:t>‹#›</a:t>
             </a:fld>
             <a:endParaRPr lang="es-ES"/>
           </a:p>
@@ -18431,10 +17996,9 @@
           </a:lstStyle>
           <a:p>
             <a:r>
-              <a:rPr lang="es-ES" smtClean="0"/>
+              <a:rPr lang="es-ES"/>
               <a:t>Haga clic para modificar el estilo de título del patrón</a:t>
             </a:r>
-            <a:endParaRPr lang="es-ES"/>
           </a:p>
         </p:txBody>
       </p:sp>
@@ -18497,7 +18061,7 @@
           <a:p>
             <a:pPr lvl="0"/>
             <a:r>
-              <a:rPr lang="es-ES" smtClean="0"/>
+              <a:rPr lang="es-ES"/>
               <a:t>Haga clic para modificar el estilo de texto del patrón</a:t>
             </a:r>
           </a:p>
@@ -18553,38 +18117,37 @@
           <a:p>
             <a:pPr lvl="0"/>
             <a:r>
-              <a:rPr lang="es-ES" smtClean="0"/>
+              <a:rPr lang="es-ES"/>
               <a:t>Haga clic para modificar el estilo de texto del patrón</a:t>
             </a:r>
           </a:p>
           <a:p>
             <a:pPr lvl="1"/>
             <a:r>
-              <a:rPr lang="es-ES" smtClean="0"/>
+              <a:rPr lang="es-ES"/>
               <a:t>Segundo nivel</a:t>
             </a:r>
           </a:p>
           <a:p>
             <a:pPr lvl="2"/>
             <a:r>
-              <a:rPr lang="es-ES" smtClean="0"/>
+              <a:rPr lang="es-ES"/>
               <a:t>Tercer nivel</a:t>
             </a:r>
           </a:p>
           <a:p>
             <a:pPr lvl="3"/>
             <a:r>
-              <a:rPr lang="es-ES" smtClean="0"/>
+              <a:rPr lang="es-ES"/>
               <a:t>Cuarto nivel</a:t>
             </a:r>
           </a:p>
           <a:p>
             <a:pPr lvl="4"/>
             <a:r>
-              <a:rPr lang="es-ES" smtClean="0"/>
+              <a:rPr lang="es-ES"/>
               <a:t>Quinto nivel</a:t>
             </a:r>
-            <a:endParaRPr lang="es-ES"/>
           </a:p>
         </p:txBody>
       </p:sp>
@@ -18647,7 +18210,7 @@
           <a:p>
             <a:pPr lvl="0"/>
             <a:r>
-              <a:rPr lang="es-ES" smtClean="0"/>
+              <a:rPr lang="es-ES"/>
               <a:t>Haga clic para modificar el estilo de texto del patrón</a:t>
             </a:r>
           </a:p>
@@ -18703,38 +18266,37 @@
           <a:p>
             <a:pPr lvl="0"/>
             <a:r>
-              <a:rPr lang="es-ES" smtClean="0"/>
+              <a:rPr lang="es-ES"/>
               <a:t>Haga clic para modificar el estilo de texto del patrón</a:t>
             </a:r>
           </a:p>
           <a:p>
             <a:pPr lvl="1"/>
             <a:r>
-              <a:rPr lang="es-ES" smtClean="0"/>
+              <a:rPr lang="es-ES"/>
               <a:t>Segundo nivel</a:t>
             </a:r>
           </a:p>
           <a:p>
             <a:pPr lvl="2"/>
             <a:r>
-              <a:rPr lang="es-ES" smtClean="0"/>
+              <a:rPr lang="es-ES"/>
               <a:t>Tercer nivel</a:t>
             </a:r>
           </a:p>
           <a:p>
             <a:pPr lvl="3"/>
             <a:r>
-              <a:rPr lang="es-ES" smtClean="0"/>
+              <a:rPr lang="es-ES"/>
               <a:t>Cuarto nivel</a:t>
             </a:r>
           </a:p>
           <a:p>
             <a:pPr lvl="4"/>
             <a:r>
-              <a:rPr lang="es-ES" smtClean="0"/>
+              <a:rPr lang="es-ES"/>
               <a:t>Quinto nivel</a:t>
             </a:r>
-            <a:endParaRPr lang="es-ES"/>
           </a:p>
         </p:txBody>
       </p:sp>
@@ -18755,7 +18317,7 @@
           <a:p>
             <a:fld id="{A96CFEAD-D6B8-4398-98DB-A7A2C4B96F63}" type="datetimeFigureOut">
               <a:rPr lang="es-ES" smtClean="0"/>
-              <a:t>27/02/2025</a:t>
+              <a:t>02/02/2026</a:t>
             </a:fld>
             <a:endParaRPr lang="es-ES"/>
           </a:p>
@@ -18797,7 +18359,7 @@
           <a:p>
             <a:fld id="{83CC6727-501C-40C5-BD85-242C39381038}" type="slidenum">
               <a:rPr lang="es-ES" smtClean="0"/>
-              <a:t>‹Nº›</a:t>
+              <a:t>‹#›</a:t>
             </a:fld>
             <a:endParaRPr lang="es-ES"/>
           </a:p>
@@ -18849,10 +18411,9 @@
           <a:lstStyle/>
           <a:p>
             <a:r>
-              <a:rPr lang="es-ES" smtClean="0"/>
+              <a:rPr lang="es-ES"/>
               <a:t>Haga clic para modificar el estilo de título del patrón</a:t>
             </a:r>
-            <a:endParaRPr lang="es-ES"/>
           </a:p>
         </p:txBody>
       </p:sp>
@@ -18873,7 +18434,7 @@
           <a:p>
             <a:fld id="{A96CFEAD-D6B8-4398-98DB-A7A2C4B96F63}" type="datetimeFigureOut">
               <a:rPr lang="es-ES" smtClean="0"/>
-              <a:t>27/02/2025</a:t>
+              <a:t>02/02/2026</a:t>
             </a:fld>
             <a:endParaRPr lang="es-ES"/>
           </a:p>
@@ -18915,7 +18476,7 @@
           <a:p>
             <a:fld id="{83CC6727-501C-40C5-BD85-242C39381038}" type="slidenum">
               <a:rPr lang="es-ES" smtClean="0"/>
-              <a:t>‹Nº›</a:t>
+              <a:t>‹#›</a:t>
             </a:fld>
             <a:endParaRPr lang="es-ES"/>
           </a:p>
@@ -18968,7 +18529,7 @@
           <a:p>
             <a:fld id="{A96CFEAD-D6B8-4398-98DB-A7A2C4B96F63}" type="datetimeFigureOut">
               <a:rPr lang="es-ES" smtClean="0"/>
-              <a:t>27/02/2025</a:t>
+              <a:t>02/02/2026</a:t>
             </a:fld>
             <a:endParaRPr lang="es-ES"/>
           </a:p>
@@ -19010,7 +18571,7 @@
           <a:p>
             <a:fld id="{83CC6727-501C-40C5-BD85-242C39381038}" type="slidenum">
               <a:rPr lang="es-ES" smtClean="0"/>
-              <a:t>‹Nº›</a:t>
+              <a:t>‹#›</a:t>
             </a:fld>
             <a:endParaRPr lang="es-ES"/>
           </a:p>
@@ -19071,10 +18632,9 @@
           </a:lstStyle>
           <a:p>
             <a:r>
-              <a:rPr lang="es-ES" smtClean="0"/>
+              <a:rPr lang="es-ES"/>
               <a:t>Haga clic para modificar el estilo de título del patrón</a:t>
             </a:r>
-            <a:endParaRPr lang="es-ES"/>
           </a:p>
         </p:txBody>
       </p:sp>
@@ -19128,38 +18688,37 @@
           <a:p>
             <a:pPr lvl="0"/>
             <a:r>
-              <a:rPr lang="es-ES" smtClean="0"/>
+              <a:rPr lang="es-ES"/>
               <a:t>Haga clic para modificar el estilo de texto del patrón</a:t>
             </a:r>
           </a:p>
           <a:p>
             <a:pPr lvl="1"/>
             <a:r>
-              <a:rPr lang="es-ES" smtClean="0"/>
+              <a:rPr lang="es-ES"/>
               <a:t>Segundo nivel</a:t>
             </a:r>
           </a:p>
           <a:p>
             <a:pPr lvl="2"/>
             <a:r>
-              <a:rPr lang="es-ES" smtClean="0"/>
+              <a:rPr lang="es-ES"/>
               <a:t>Tercer nivel</a:t>
             </a:r>
           </a:p>
           <a:p>
             <a:pPr lvl="3"/>
             <a:r>
-              <a:rPr lang="es-ES" smtClean="0"/>
+              <a:rPr lang="es-ES"/>
               <a:t>Cuarto nivel</a:t>
             </a:r>
           </a:p>
           <a:p>
             <a:pPr lvl="4"/>
             <a:r>
-              <a:rPr lang="es-ES" smtClean="0"/>
+              <a:rPr lang="es-ES"/>
               <a:t>Quinto nivel</a:t>
             </a:r>
-            <a:endParaRPr lang="es-ES"/>
           </a:p>
         </p:txBody>
       </p:sp>
@@ -19222,7 +18781,7 @@
           <a:p>
             <a:pPr lvl="0"/>
             <a:r>
-              <a:rPr lang="es-ES" smtClean="0"/>
+              <a:rPr lang="es-ES"/>
               <a:t>Haga clic para modificar el estilo de texto del patrón</a:t>
             </a:r>
           </a:p>
@@ -19245,7 +18804,7 @@
           <a:p>
             <a:fld id="{A96CFEAD-D6B8-4398-98DB-A7A2C4B96F63}" type="datetimeFigureOut">
               <a:rPr lang="es-ES" smtClean="0"/>
-              <a:t>27/02/2025</a:t>
+              <a:t>02/02/2026</a:t>
             </a:fld>
             <a:endParaRPr lang="es-ES"/>
           </a:p>
@@ -19287,7 +18846,7 @@
           <a:p>
             <a:fld id="{83CC6727-501C-40C5-BD85-242C39381038}" type="slidenum">
               <a:rPr lang="es-ES" smtClean="0"/>
-              <a:t>‹Nº›</a:t>
+              <a:t>‹#›</a:t>
             </a:fld>
             <a:endParaRPr lang="es-ES"/>
           </a:p>
@@ -19348,10 +18907,9 @@
           </a:lstStyle>
           <a:p>
             <a:r>
-              <a:rPr lang="es-ES" smtClean="0"/>
+              <a:rPr lang="es-ES"/>
               <a:t>Haga clic para modificar el estilo de título del patrón</a:t>
             </a:r>
-            <a:endParaRPr lang="es-ES"/>
           </a:p>
         </p:txBody>
       </p:sp>
@@ -19475,7 +19033,7 @@
           <a:p>
             <a:pPr lvl="0"/>
             <a:r>
-              <a:rPr lang="es-ES" smtClean="0"/>
+              <a:rPr lang="es-ES"/>
               <a:t>Haga clic para modificar el estilo de texto del patrón</a:t>
             </a:r>
           </a:p>
@@ -19498,7 +19056,7 @@
           <a:p>
             <a:fld id="{A96CFEAD-D6B8-4398-98DB-A7A2C4B96F63}" type="datetimeFigureOut">
               <a:rPr lang="es-ES" smtClean="0"/>
-              <a:t>27/02/2025</a:t>
+              <a:t>02/02/2026</a:t>
             </a:fld>
             <a:endParaRPr lang="es-ES"/>
           </a:p>
@@ -19540,7 +19098,7 @@
           <a:p>
             <a:fld id="{83CC6727-501C-40C5-BD85-242C39381038}" type="slidenum">
               <a:rPr lang="es-ES" smtClean="0"/>
-              <a:t>‹Nº›</a:t>
+              <a:t>‹#›</a:t>
             </a:fld>
             <a:endParaRPr lang="es-ES"/>
           </a:p>
@@ -19607,10 +19165,9 @@
           <a:lstStyle/>
           <a:p>
             <a:r>
-              <a:rPr lang="es-ES" smtClean="0"/>
+              <a:rPr lang="es-ES"/>
               <a:t>Haga clic para modificar el estilo de título del patrón</a:t>
             </a:r>
-            <a:endParaRPr lang="es-ES"/>
           </a:p>
         </p:txBody>
       </p:sp>
@@ -19641,38 +19198,37 @@
           <a:p>
             <a:pPr lvl="0"/>
             <a:r>
-              <a:rPr lang="es-ES" smtClean="0"/>
+              <a:rPr lang="es-ES"/>
               <a:t>Haga clic para modificar el estilo de texto del patrón</a:t>
             </a:r>
           </a:p>
           <a:p>
             <a:pPr lvl="1"/>
             <a:r>
-              <a:rPr lang="es-ES" smtClean="0"/>
+              <a:rPr lang="es-ES"/>
               <a:t>Segundo nivel</a:t>
             </a:r>
           </a:p>
           <a:p>
             <a:pPr lvl="2"/>
             <a:r>
-              <a:rPr lang="es-ES" smtClean="0"/>
+              <a:rPr lang="es-ES"/>
               <a:t>Tercer nivel</a:t>
             </a:r>
           </a:p>
           <a:p>
             <a:pPr lvl="3"/>
             <a:r>
-              <a:rPr lang="es-ES" smtClean="0"/>
+              <a:rPr lang="es-ES"/>
               <a:t>Cuarto nivel</a:t>
             </a:r>
           </a:p>
           <a:p>
             <a:pPr lvl="4"/>
             <a:r>
-              <a:rPr lang="es-ES" smtClean="0"/>
+              <a:rPr lang="es-ES"/>
               <a:t>Quinto nivel</a:t>
             </a:r>
-            <a:endParaRPr lang="es-ES"/>
           </a:p>
         </p:txBody>
       </p:sp>
@@ -19711,7 +19267,7 @@
           <a:p>
             <a:fld id="{A96CFEAD-D6B8-4398-98DB-A7A2C4B96F63}" type="datetimeFigureOut">
               <a:rPr lang="es-ES" smtClean="0"/>
-              <a:t>27/02/2025</a:t>
+              <a:t>02/02/2026</a:t>
             </a:fld>
             <a:endParaRPr lang="es-ES"/>
           </a:p>
@@ -19789,7 +19345,7 @@
           <a:p>
             <a:fld id="{83CC6727-501C-40C5-BD85-242C39381038}" type="slidenum">
               <a:rPr lang="es-ES" smtClean="0"/>
-              <a:t>‹Nº›</a:t>
+              <a:t>‹#›</a:t>
             </a:fld>
             <a:endParaRPr lang="es-ES"/>
           </a:p>
@@ -20102,10 +19658,9 @@
           <a:lstStyle/>
           <a:p>
             <a:r>
-              <a:rPr lang="es-ES" dirty="0" smtClean="0"/>
+              <a:rPr lang="es-ES"/>
               <a:t>LA CONTABILIDAD</a:t>
             </a:r>
-            <a:endParaRPr lang="es-ES" dirty="0"/>
           </a:p>
         </p:txBody>
       </p:sp>
@@ -20125,16 +19680,15 @@
           <a:lstStyle/>
           <a:p>
             <a:r>
-              <a:rPr lang="es-ES" dirty="0" smtClean="0"/>
+              <a:rPr lang="es-ES"/>
               <a:t>Balance de situación</a:t>
             </a:r>
           </a:p>
           <a:p>
             <a:r>
-              <a:rPr lang="es-ES" dirty="0" smtClean="0"/>
+              <a:rPr lang="es-ES"/>
               <a:t>La cuenta de resultados</a:t>
             </a:r>
-            <a:endParaRPr lang="es-ES" dirty="0"/>
           </a:p>
         </p:txBody>
       </p:sp>
@@ -20184,10 +19738,9 @@
           <a:lstStyle/>
           <a:p>
             <a:r>
-              <a:rPr lang="es-ES" dirty="0" smtClean="0"/>
+              <a:rPr lang="es-ES"/>
               <a:t>BALANCE DE SITUACIÓN</a:t>
             </a:r>
-            <a:endParaRPr lang="es-ES" dirty="0"/>
           </a:p>
         </p:txBody>
       </p:sp>
@@ -20253,10 +19806,9 @@
           <a:p>
             <a:pPr algn="ctr"/>
             <a:r>
-              <a:rPr lang="es-ES" dirty="0" smtClean="0"/>
+              <a:rPr lang="es-ES"/>
               <a:t>Activo = Pasivo</a:t>
             </a:r>
-            <a:endParaRPr lang="es-ES" dirty="0"/>
           </a:p>
         </p:txBody>
       </p:sp>
@@ -20306,10 +19858,9 @@
           <a:lstStyle/>
           <a:p>
             <a:r>
-              <a:rPr lang="es-ES" dirty="0" smtClean="0"/>
+              <a:rPr lang="es-ES"/>
               <a:t>ACTIVO</a:t>
             </a:r>
-            <a:endParaRPr lang="es-ES" dirty="0"/>
           </a:p>
         </p:txBody>
       </p:sp>
@@ -20323,13 +19874,13 @@
             <p:ph idx="1"/>
             <p:extLst>
               <p:ext uri="{D42A27DB-BD31-4B8C-83A1-F6EECF244321}">
-                <p14:modId xmlns:p14="http://schemas.microsoft.com/office/powerpoint/2010/main" val="4159090698"/>
+                <p14:modId xmlns:p14="http://schemas.microsoft.com/office/powerpoint/2010/main" val="2512989774"/>
               </p:ext>
             </p:extLst>
           </p:nvPr>
         </p:nvGraphicFramePr>
         <p:xfrm>
-          <a:off x="457200" y="1600200"/>
+          <a:off x="457200" y="1610451"/>
           <a:ext cx="8229600" cy="4525963"/>
         </p:xfrm>
         <a:graphic>
@@ -20384,10 +19935,9 @@
           <a:lstStyle/>
           <a:p>
             <a:r>
-              <a:rPr lang="es-ES" dirty="0" smtClean="0"/>
+              <a:rPr lang="es-ES"/>
               <a:t>PASIVO</a:t>
             </a:r>
-            <a:endParaRPr lang="es-ES" dirty="0"/>
           </a:p>
         </p:txBody>
       </p:sp>
@@ -20461,7 +20011,7 @@
           <a:bodyPr/>
           <a:lstStyle/>
           <a:p>
-            <a:endParaRPr lang="es-ES" dirty="0"/>
+            <a:endParaRPr lang="es-ES"/>
           </a:p>
         </p:txBody>
       </p:sp>
@@ -20533,10 +20083,9 @@
           <a:p>
             <a:pPr algn="ctr"/>
             <a:r>
-              <a:rPr lang="es-ES" dirty="0" smtClean="0"/>
+              <a:rPr lang="es-ES"/>
               <a:t>FONDO DE MANIOBRA= ACTIVO CORRIENTE- PASIVO CORRIENTE</a:t>
             </a:r>
-            <a:endParaRPr lang="es-ES" dirty="0"/>
           </a:p>
         </p:txBody>
       </p:sp>
@@ -20563,10 +20112,9 @@
           <a:lstStyle/>
           <a:p>
             <a:r>
-              <a:rPr lang="es-ES" dirty="0" smtClean="0"/>
+              <a:rPr lang="es-ES"/>
               <a:t>¿Tenemos suficiente dinero para pagar las deudas a corto plazo?</a:t>
             </a:r>
-            <a:endParaRPr lang="es-ES" dirty="0"/>
           </a:p>
         </p:txBody>
       </p:sp>
@@ -20593,18 +20141,13 @@
           <a:lstStyle/>
           <a:p>
             <a:r>
-              <a:rPr lang="es-ES" b="1" dirty="0" smtClean="0">
+              <a:rPr lang="es-ES" b="1">
                 <a:solidFill>
                   <a:srgbClr val="C00000"/>
                 </a:solidFill>
               </a:rPr>
               <a:t>¿SUSPENSIÓN DE PAGOS ?</a:t>
             </a:r>
-            <a:endParaRPr lang="es-ES" b="1" dirty="0">
-              <a:solidFill>
-                <a:srgbClr val="C00000"/>
-              </a:solidFill>
-            </a:endParaRPr>
           </a:p>
         </p:txBody>
       </p:sp>
@@ -20654,10 +20197,9 @@
           <a:lstStyle/>
           <a:p>
             <a:r>
-              <a:rPr lang="es-ES" dirty="0" smtClean="0"/>
+              <a:rPr lang="es-ES"/>
               <a:t>RATIOS</a:t>
             </a:r>
-            <a:endParaRPr lang="es-ES" dirty="0"/>
           </a:p>
         </p:txBody>
       </p:sp>
@@ -20673,25 +20215,27 @@
         </p:nvSpPr>
         <p:spPr/>
         <p:txBody>
-          <a:bodyPr/>
+          <a:bodyPr vert="horz" lIns="91440" tIns="45720" rIns="91440" bIns="45720" rtlCol="0" anchor="t">
+            <a:normAutofit/>
+          </a:bodyPr>
           <a:lstStyle/>
           <a:p>
             <a:r>
-              <a:rPr lang="es-ES" dirty="0" smtClean="0"/>
+              <a:rPr lang="es-ES"/>
               <a:t>Ratio de liquidez =   </a:t>
             </a:r>
             <a:r>
-              <a:rPr lang="es-ES" u="sng" dirty="0" smtClean="0"/>
+              <a:rPr lang="es-ES" u="sng"/>
               <a:t>AC</a:t>
             </a:r>
-            <a:endParaRPr lang="es-ES" dirty="0"/>
+            <a:endParaRPr lang="es-ES"/>
           </a:p>
           <a:p>
             <a:pPr marL="0" indent="0">
               <a:buNone/>
             </a:pPr>
             <a:r>
-              <a:rPr lang="es-ES" dirty="0" smtClean="0"/>
+              <a:rPr lang="es-ES"/>
               <a:t>				PC</a:t>
             </a:r>
           </a:p>
@@ -20699,14 +20243,14 @@
             <a:pPr marL="0" indent="0">
               <a:buNone/>
             </a:pPr>
-            <a:endParaRPr lang="es-ES" dirty="0"/>
+            <a:endParaRPr lang="es-ES"/>
           </a:p>
           <a:p>
             <a:pPr marL="0" indent="0">
               <a:buNone/>
             </a:pPr>
             <a:r>
-              <a:rPr lang="es-ES" sz="2000" dirty="0" smtClean="0">
+              <a:rPr lang="es-ES" sz="2000">
                 <a:solidFill>
                   <a:srgbClr val="C00000"/>
                 </a:solidFill>
@@ -20718,15 +20262,15 @@
             <a:pPr marL="0" indent="0">
               <a:buNone/>
             </a:pPr>
-            <a:endParaRPr lang="es-ES" dirty="0" smtClean="0"/>
+            <a:endParaRPr lang="es-ES"/>
           </a:p>
           <a:p>
             <a:r>
-              <a:rPr lang="es-ES" sz="2800" dirty="0" smtClean="0"/>
+              <a:rPr lang="es-ES" sz="2800"/>
               <a:t>Ratio de endeudamiento = </a:t>
             </a:r>
             <a:r>
-              <a:rPr lang="es-ES" sz="2800" u="sng" dirty="0" smtClean="0"/>
+              <a:rPr lang="es-ES" sz="2800" u="sng"/>
               <a:t>P a s i v o</a:t>
             </a:r>
           </a:p>
@@ -20735,10 +20279,13 @@
               <a:buNone/>
             </a:pPr>
             <a:r>
-              <a:rPr lang="es-ES" sz="2800" dirty="0" smtClean="0"/>
-              <a:t>				(Pasivo- Patrimonio neto) </a:t>
+              <a:rPr lang="es-ES" sz="2800"/>
+              <a:t>				(Pasivo+ Patrimonio neto) </a:t>
             </a:r>
-            <a:endParaRPr lang="es-ES" sz="2800" dirty="0"/>
+            <a:endParaRPr lang="es-ES" sz="2800">
+              <a:ea typeface="Calibri"/>
+              <a:cs typeface="Calibri"/>
+            </a:endParaRPr>
           </a:p>
         </p:txBody>
       </p:sp>
@@ -20765,7 +20312,7 @@
           <a:lstStyle/>
           <a:p>
             <a:r>
-              <a:rPr lang="es-ES" dirty="0" smtClean="0">
+              <a:rPr lang="es-ES">
                 <a:solidFill>
                   <a:srgbClr val="C00000"/>
                 </a:solidFill>
@@ -20775,18 +20322,13 @@
           </a:p>
           <a:p>
             <a:r>
-              <a:rPr lang="es-ES" dirty="0" smtClean="0">
+              <a:rPr lang="es-ES">
                 <a:solidFill>
                   <a:srgbClr val="C00000"/>
                 </a:solidFill>
               </a:rPr>
               <a:t>Recomendable no superar el 0,6</a:t>
             </a:r>
-            <a:endParaRPr lang="es-ES" dirty="0">
-              <a:solidFill>
-                <a:srgbClr val="C00000"/>
-              </a:solidFill>
-            </a:endParaRPr>
           </a:p>
         </p:txBody>
       </p:sp>
@@ -20838,10 +20380,9 @@
           <a:lstStyle/>
           <a:p>
             <a:r>
-              <a:rPr lang="es-ES" dirty="0" smtClean="0"/>
+              <a:rPr lang="es-ES"/>
               <a:t>CUENTA DE RESULTADOS (Pérdidas o ganancias)</a:t>
             </a:r>
-            <a:endParaRPr lang="es-ES" dirty="0"/>
           </a:p>
         </p:txBody>
       </p:sp>
@@ -21169,8 +20710,8 @@
 </file>
 
 <file path=customXml/item1.xml><?xml version="1.0" encoding="utf-8"?>
-<ct:contentTypeSchema xmlns:ct="http://schemas.microsoft.com/office/2006/metadata/contentType" xmlns:ma="http://schemas.microsoft.com/office/2006/metadata/properties/metaAttributes" ct:_="" ma:_="" ma:contentTypeName="Documento" ma:contentTypeID="0x010100B0D81B3C2E6BB44FBF43D80D2B4778EA" ma:contentTypeVersion="3" ma:contentTypeDescription="Crear nuevo documento." ma:contentTypeScope="" ma:versionID="a5039163465ecb16e41239710fbc919d">
-  <xsd:schema xmlns:xsd="http://www.w3.org/2001/XMLSchema" xmlns:xs="http://www.w3.org/2001/XMLSchema" xmlns:p="http://schemas.microsoft.com/office/2006/metadata/properties" xmlns:ns2="a714bc21-de37-4509-b491-7d9df166aef9" targetNamespace="http://schemas.microsoft.com/office/2006/metadata/properties" ma:root="true" ma:fieldsID="2b9137fbcb1345a9254411b77d9b676a" ns2:_="">
+<ct:contentTypeSchema xmlns:ct="http://schemas.microsoft.com/office/2006/metadata/contentType" xmlns:ma="http://schemas.microsoft.com/office/2006/metadata/properties/metaAttributes" ct:_="" ma:_="" ma:contentTypeName="Documento" ma:contentTypeID="0x010100B0D81B3C2E6BB44FBF43D80D2B4778EA" ma:contentTypeVersion="3" ma:contentTypeDescription="Crear nuevo documento." ma:contentTypeScope="" ma:versionID="a4206ae106810df296770ff8b6a11d4b">
+  <xsd:schema xmlns:xsd="http://www.w3.org/2001/XMLSchema" xmlns:xs="http://www.w3.org/2001/XMLSchema" xmlns:p="http://schemas.microsoft.com/office/2006/metadata/properties" xmlns:ns2="a714bc21-de37-4509-b491-7d9df166aef9" targetNamespace="http://schemas.microsoft.com/office/2006/metadata/properties" ma:root="true" ma:fieldsID="25dc20869612d64541bebf8b41d16a2b" ns2:_="">
     <xsd:import namespace="a714bc21-de37-4509-b491-7d9df166aef9"/>
     <xsd:element name="properties">
       <xsd:complexType>
@@ -21322,13 +20863,36 @@
 </file>
 
 <file path=customXml/itemProps1.xml><?xml version="1.0" encoding="utf-8"?>
-<ds:datastoreItem xmlns:ds="http://schemas.openxmlformats.org/officeDocument/2006/customXml" ds:itemID="{594B1129-A980-4C72-A570-A0566784CEB1}"/>
+<ds:datastoreItem xmlns:ds="http://schemas.openxmlformats.org/officeDocument/2006/customXml" ds:itemID="{81619788-2F1D-4AAC-A391-8CE341FF8987}">
+  <ds:schemaRefs>
+    <ds:schemaRef ds:uri="a714bc21-de37-4509-b491-7d9df166aef9"/>
+    <ds:schemaRef ds:uri="http://purl.org/dc/elements/1.1/"/>
+    <ds:schemaRef ds:uri="http://purl.org/dc/terms/"/>
+    <ds:schemaRef ds:uri="http://schemas.microsoft.com/internal/obd"/>
+    <ds:schemaRef ds:uri="http://schemas.microsoft.com/office/2006/documentManagement/types"/>
+    <ds:schemaRef ds:uri="http://schemas.microsoft.com/office/2006/metadata/contentType"/>
+    <ds:schemaRef ds:uri="http://schemas.microsoft.com/office/2006/metadata/properties"/>
+    <ds:schemaRef ds:uri="http://schemas.microsoft.com/office/2006/metadata/properties/metaAttributes"/>
+    <ds:schemaRef ds:uri="http://schemas.microsoft.com/office/infopath/2007/PartnerControls"/>
+    <ds:schemaRef ds:uri="http://schemas.openxmlformats.org/package/2006/metadata/core-properties"/>
+    <ds:schemaRef ds:uri="http://www.w3.org/2001/XMLSchema"/>
+  </ds:schemaRefs>
+</ds:datastoreItem>
 </file>
 
 <file path=customXml/itemProps2.xml><?xml version="1.0" encoding="utf-8"?>
-<ds:datastoreItem xmlns:ds="http://schemas.openxmlformats.org/officeDocument/2006/customXml" ds:itemID="{0F3A017F-1F68-41C0-AF42-2F45AE2D5280}"/>
+<ds:datastoreItem xmlns:ds="http://schemas.openxmlformats.org/officeDocument/2006/customXml" ds:itemID="{0F3A017F-1F68-41C0-AF42-2F45AE2D5280}">
+  <ds:schemaRefs>
+    <ds:schemaRef ds:uri="http://schemas.microsoft.com/sharepoint/v3/contenttype/forms"/>
+  </ds:schemaRefs>
+</ds:datastoreItem>
 </file>
 
 <file path=customXml/itemProps3.xml><?xml version="1.0" encoding="utf-8"?>
-<ds:datastoreItem xmlns:ds="http://schemas.openxmlformats.org/officeDocument/2006/customXml" ds:itemID="{90424DB1-8AE6-4E78-8698-4A148F64F899}"/>
+<ds:datastoreItem xmlns:ds="http://schemas.openxmlformats.org/officeDocument/2006/customXml" ds:itemID="{90424DB1-8AE6-4E78-8698-4A148F64F899}">
+  <ds:schemaRefs>
+    <ds:schemaRef ds:uri="http://schemas.microsoft.com/office/2006/metadata/properties"/>
+    <ds:schemaRef ds:uri="http://schemas.microsoft.com/office/infopath/2007/PartnerControls"/>
+  </ds:schemaRefs>
+</ds:datastoreItem>
 </file>